--- a/ppt/ocr_benchmark/current/OCR_Benchmark_V3.pptx
+++ b/ppt/ocr_benchmark/current/OCR_Benchmark_V3.pptx
@@ -772,7 +772,7 @@
           <a:lstStyle/>
           <a:p>
             <a:r>
-              <a:t>Main finding: Azure DI + AOAI reached 88.2% with a prompt written before these receipts; a prompt revised on them reached 96.1% on the same receipts (development result, not validated). The rules handled these receipts only after being rewritten for them, and that tuning gave no gain on 4 unseen receipts. The benchmark is small (9 receipts), so this is not a production decision. Source: python/receipt_ocr_benchmark/results/v2/scores_improved and scores_aoai_improved (summary.csv, detail.csv), results/v1_heldout, and extraction JSON.</a:t>
+              <a:t>Initial implementations: Azure DI + AOAI 88.2%, rules 37.3% and 41.2%, the gap mostly from missing Chinese support in the rules. After reviewing these receipts: rules 88.2% and 86.3%, AOAI prompt v2 96.1%, all development results. The benchmark is small (9 receipts), so this is not a production decision. A small held-out check on Version 1 receipts (4-6 receipts, mostly handwritten) is too small to say whether either approach generalises better, so it is not shown on the slides. Source: python/receipt_ocr_benchmark/results/v2/scores_improved and scores_aoai_improved (summary.csv, detail.csv), results/v1_heldout, and extraction JSON.</a:t>
             </a:r>
           </a:p>
         </p:txBody>
@@ -912,7 +912,7 @@
           <a:lstStyle/>
           <a:p>
             <a:r>
-              <a:t>Accuracy = correct fields / 51 fields present on the 9 receipts. Azure DI + AOAI with the original prompt (88.2%) is the only figure measured before any tuning on these receipts. Prompt v2 (96.1%) was written after reviewing the errors on these receipts, so it is a development result. Rule accuracy is not shown: the original rules had no Chinese labels, so their scores mostly reflect missing language support, and the improved rules were tuned on these receipts. Held-out check on the Version 1 receipts: the improved rules scored the same as the original rules on the 4 unseen receipts (PaddleOCR Light 13/15, Azure DI 10/15 fields), and prompt v2 scored the same as the original prompt on 6 receipts (18/25). Time = average per receipt (PaddleOCR: CPU on Azure ML compute; Azure: API call time incl. network). Source: python/receipt_ocr_benchmark/results/v2/scores_improved and scores_aoai_improved (summary.csv, detail.csv), results/v1_heldout, and extraction JSON.</a:t>
+              <a:t>Accuracy = correct fields / 51 fields present on the 9 Version 2 receipts, before anything was changed for them. The original extraction rules knew English labels only, with no Chinese or bilingual labels, although four of the receipts are Chinese or bilingual. On those receipts the OCR read the values but the rules could not find them (see example 1). The AOAI prompt was written before these receipts existed. So this compares initial implementations, not the maximum capability of each approach. Time = average per receipt (PaddleOCR: CPU on Azure ML compute; Azure: API call time incl. network). Source: python/receipt_ocr_benchmark/results/v2/scores_improved and scores_aoai_improved (summary.csv, detail.csv), results/v1_heldout, and extraction JSON.</a:t>
             </a:r>
           </a:p>
         </p:txBody>
@@ -982,7 +982,7 @@
           <a:lstStyle/>
           <a:p>
             <a:r>
-              <a:t>Rule-based pipeline: OCR text, then hand-written extraction rules. To handle these receipts the rules were rewritten after reviewing their errors (label phrases 69 to 225), mostly to add Chinese and bilingual labels. AI pipeline: the same kind of OCR text is passed to Azure OpenAI (gpt-5-mini) with one prompt; with the original prompt, written before these receipts, it reached 88.2%. So on this benchmark the model did the job the rules had to be tuned to do. It still made mistakes, and it has not been tested on a large set of unseen receipts. Source: python/receipt_ocr_benchmark/results/v2/scores_improved and scores_aoai_improved (summary.csv, detail.csv), results/v1_heldout, and extraction JSON.</a:t>
+              <a:t>All changes were made after reviewing the errors on these 9 receipts, so the scores are development results, not independent validation. Rules: rewritten by hand (label phrases 69 to 225: Chinese and bilingual labels, distractor labels, layout handling); on PaddleOCR Light text this fixed 27 fields and broke 1, on Azure DI text it fixed 24 and broke 1. AOAI: prompt v2 with clearer field definitions, DI text grouped into page rows and a few general checks; it fixed 4 fields and broke 0. A small held-out check on Version 1 receipts (4-6 receipts, mostly handwritten) is too small to say whether either approach generalises better, so it is not shown on the slides. Source: python/receipt_ocr_benchmark/results/v2/scores_improved and scores_aoai_improved (summary.csv, detail.csv), results/v1_heldout, and extraction JSON.</a:t>
             </a:r>
           </a:p>
         </p:txBody>
@@ -1122,7 +1122,7 @@
           <a:lstStyle/>
           <a:p>
             <a:r>
-              <a:t>Receipt 4 (Chinese medicine): the OCR read every value, but the original rules only knew English labels (0 of 6 fields). After adding Chinese labels by hand: 6 of 6. DI + AOAI with its original prompt: 6 of 6. The label vocabulary grew from 69 to 225 phrases (counted in extraction_general.py and extraction_improved.py). On the vet invoice (receipt 9) the original rules found receipt number 369303; after the changes they return 380048. On the 4 Version 1 receipts not used for tuning, the improved rules scored the same as the original rules (PaddleOCR Light 13/15, Azure DI 10/15 fields). Whether AOAI needs less maintenance on new layouts has not been tested yet. Source: python/receipt_ocr_benchmark/results/v2/scores_improved and scores_aoai_improved (summary.csv, detail.csv), results/v1_heldout, and extraction JSON.</a:t>
+              <a:t>Receipt 4 (Chinese medicine): the OCR read every value, but the original rules only knew English labels (0 of 6 fields). After adding Chinese labels by hand: 6 of 6. DI + AOAI with its original prompt: 6 of 6. The label vocabulary grew from 69 to 225 phrases (counted in extraction_general.py and extraction_improved.py). On the vet invoice (receipt 9) the original rules found receipt number 369303; after the changes they return 380048. Whether AOAI needs less maintenance on new layouts has not been tested yet. Source: python/receipt_ocr_benchmark/results/v2/scores_improved and scores_aoai_improved (summary.csv, detail.csv), results/v1_heldout, and extraction JSON.</a:t>
             </a:r>
           </a:p>
         </p:txBody>
@@ -1192,7 +1192,7 @@
           <a:lstStyle/>
           <a:p>
             <a:r>
-              <a:t>Receipt 9 (vet invoice). The improved rules now take the payment table's 'Receipt #' (380048) instead of the invoice number. Both OCR engines read 'FPatient:' (a stray mark merged into the label), so no rule matched the patient label; AOAI still found the name. AOAI with the original prompt chose the sub total (1361.50) instead of the total (1361.00). Prompt v2 returns the correct total, but it was written after reviewing this error. Across all 9 receipts AOAI got 6 of 51 fields wrong with the original prompt and 2 with prompt v2 (development result). Values: detail.csv, checked against the extraction JSON. Source: python/receipt_ocr_benchmark/results/v2/scores_improved and scores_aoai_improved (summary.csv, detail.csv), results/v1_heldout, and extraction JSON.</a:t>
+              <a:t>Receipt 9 (vet invoice). The improved rules now take the payment table's 'Receipt #' (380048) instead of the invoice number. Both OCR engines read 'FPatient:' (a stray mark merged into the label), so no rule matched the patient label; AOAI still found the name. AOAI with the original prompt chose the sub total (1361.50) instead of the total (1361.00). Prompt v2 returns the correct total, but it was written after reviewing this error. Values: detail.csv, checked against the extraction JSON. Source: python/receipt_ocr_benchmark/results/v2/scores_improved and scores_aoai_improved (summary.csv, detail.csv), results/v1_heldout, and extraction JSON.</a:t>
             </a:r>
           </a:p>
         </p:txBody>
@@ -1262,7 +1262,7 @@
           <a:lstStyle/>
           <a:p>
             <a:r>
-              <a:t>Accuracy: Azure DI + AOAI 88.2% with the original prompt; 96.1% with prompt v2, a development result because the prompt was revised on these receipts. No accuracy is shown for the rules: the original rules had no Chinese labels, and the improved rules were tuned on these 9 receipts. Unseen receipts: the improved rules scored the same as the original rules on 4 Version 1 receipts, and prompt v2 the same as the original prompt on 6 (18/25). Lower maintenance for AOAI is the key implication of this benchmark, not a result proven in production. Running cost: DI page plus about 602 input / 263 output gpt-5-mini tokens per receipt (original prompt); prices are not yet confirmed. Source: python/receipt_ocr_benchmark/results/v2/scores_improved and scores_aoai_improved (summary.csv, detail.csv), results/v1_heldout, and extraction JSON.</a:t>
+              <a:t>Effort: the rules were rewritten by hand after reviewing the errors on these receipts (label phrases 69 to 225); the AOAI prompt was revised once. Side effects on these receipts: the rule changes broke 1 correct field on PaddleOCR Light text, the prompt revision broke 0. Lower maintenance for AOAI on new layouts is the key implication of this benchmark, not a result proven in production. Running cost: DI page plus about 602 input / 263 output gpt-5-mini tokens per receipt (original prompt); prices are not yet confirmed. Source: python/receipt_ocr_benchmark/results/v2/scores_improved and scores_aoai_improved (summary.csv, detail.csv), results/v1_heldout, and extraction JSON.</a:t>
             </a:r>
           </a:p>
         </p:txBody>
@@ -1332,7 +1332,7 @@
           <a:lstStyle/>
           <a:p>
             <a:r>
-              <a:t>Measured: rules grew from 69 to 225 label phrases while being tuned on these 9 receipts; vet invoice receipt number 369303 correct before tuning, 380048 after; on 4 unseen receipts the tuned rules scored the same as the original rules. Azure DI + AOAI 88.2% with the original prompt; 6 of 51 fields wrong, e.g. vet invoice total 1361.5 although the Azure DI text contains the correct 1361.00; 6.2 s vs 13.9 s per receipt. Expected, not measured: that new formats need rule updates, that AOAI needs less rule maintenance, control, API fees and the upkeep AOAI still needs (validation, monitoring, prompt). AOAI is not maintenance free. Prices are not yet confirmed. Source: python/receipt_ocr_benchmark/results/v2/scores_improved and scores_aoai_improved (summary.csv, detail.csv), results/v1_heldout, and extraction JSON.</a:t>
+              <a:t>Measured: rules grew from 69 to 225 label phrases while being tuned on these 9 receipts; vet invoice receipt number 369303 correct before tuning, 380048 after. Azure DI + AOAI had the highest accuracy before any tuning; it still made mistakes, e.g. vet invoice total 1361.5 although the Azure DI text contains the correct 1361.00; 6.2 s vs 13.9 s per receipt. Expected, not measured: that new formats need rule updates, that AOAI needs less rule maintenance, control, API fees and the upkeep AOAI still needs (validation, monitoring, prompt). AOAI is not maintenance free. Prices are not yet confirmed. Source: python/receipt_ocr_benchmark/results/v2/scores_improved and scores_aoai_improved (summary.csv, detail.csv), results/v1_heldout, and extraction JSON.</a:t>
             </a:r>
           </a:p>
         </p:txBody>
@@ -6213,7 +6213,7 @@
                 <a:latin typeface="Arial"/>
                 <a:ea typeface="Microsoft JhengHei"/>
               </a:rPr>
-              <a:t>Azure DI + AOAI reached 88.2% with a prompt written before these receipts. A tuned prompt reached 96.1% on the same receipts: a development result, not validated.</a:t>
+              <a:t>Initial implementations: AI extraction led by a wide margin, mainly because the first rules had no Chinese support.</a:t>
             </a:r>
           </a:p>
           <a:p>
@@ -6232,7 +6232,7 @@
                 <a:latin typeface="Arial"/>
                 <a:ea typeface="Microsoft JhengHei"/>
               </a:rPr>
-              <a:t>The rules worked only after hand-tuning for these layouts, and the tuning did not help on unseen receipts.</a:t>
+              <a:t>After reviewing these receipts both improved. Rules needed code and vocabulary changes; AI needed one prompt revision. Neither is validated on unseen receipts.</a:t>
             </a:r>
           </a:p>
           <a:p>
@@ -7375,7 +7375,7 @@
                 <a:latin typeface="Arial"/>
                 <a:ea typeface="Microsoft JhengHei"/>
               </a:rPr>
-              <a:t>Results: One Fair Accuracy Figure</a:t>
+              <a:t>Initial Results</a:t>
             </a:r>
           </a:p>
         </p:txBody>
@@ -7462,7 +7462,7 @@
                 <a:latin typeface="Arial"/>
                 <a:ea typeface="Microsoft JhengHei"/>
               </a:rPr>
-              <a:t>AI extraction reached 88.2% with a prompt written before these receipts: the only untuned result.</a:t>
+              <a:t>Before any tuning on these 9 receipts, AI extraction was far ahead of the first rule sets.</a:t>
             </a:r>
           </a:p>
         </p:txBody>
@@ -7477,7 +7477,7 @@
         </p:nvGraphicFramePr>
         <p:xfrm>
           <a:off x="356616" y="1783080"/>
-          <a:ext cx="11475720" cy="2962656"/>
+          <a:ext cx="7178040" cy="3035808"/>
         </p:xfrm>
         <a:graphic>
           <a:graphicData uri="http://schemas.openxmlformats.org/drawingml/2006/table">
@@ -7486,12 +7486,11 @@
                 <a:tableStyleId>{2D5ABB26-0587-4C30-8999-92F81FD0307C}</a:tableStyleId>
               </a:tblPr>
               <a:tblGrid>
-                <a:gridCol w="3383280"/>
-                <a:gridCol w="2194560"/>
+                <a:gridCol w="3246120"/>
+                <a:gridCol w="2240280"/>
                 <a:gridCol w="1691640"/>
-                <a:gridCol w="4206240"/>
               </a:tblGrid>
-              <a:tr h="548640">
+              <a:tr h="566928">
                 <a:tc>
                   <a:txBody>
                     <a:bodyPr wrap="square"/>
@@ -7542,7 +7541,7 @@
                           <a:latin typeface="Arial"/>
                           <a:ea typeface="Microsoft JhengHei"/>
                         </a:rPr>
-                        <a:t>Accuracy (9 receipts)</a:t>
+                        <a:t>Accuracy</a:t>
                       </a:r>
                     </a:p>
                   </a:txBody>
@@ -7600,6 +7599,8 @@
                     </a:solidFill>
                   </a:tcPr>
                 </a:tc>
+              </a:tr>
+              <a:tr h="822960">
                 <a:tc>
                   <a:txBody>
                     <a:bodyPr wrap="square"/>
@@ -7607,45 +7608,7 @@
                     <a:p>
                       <a:pPr algn="l"/>
                       <a:r>
-                        <a:rPr sz="1500" b="1" i="0">
-                          <a:solidFill>
-                            <a:srgbClr val="FFFFFF"/>
-                          </a:solidFill>
-                          <a:latin typeface="Arial"/>
-                          <a:ea typeface="Microsoft JhengHei"/>
-                        </a:rPr>
-                        <a:t>How to read it</a:t>
-                      </a:r>
-                    </a:p>
-                  </a:txBody>
-                  <a:tcPr marL="91440" marR="91440" marT="45720" marB="45720" anchor="ctr">
-                    <a:lnL w="0">
-                      <a:noFill/>
-                    </a:lnL>
-                    <a:lnR w="0">
-                      <a:noFill/>
-                    </a:lnR>
-                    <a:lnT w="0">
-                      <a:noFill/>
-                    </a:lnT>
-                    <a:lnB w="0">
-                      <a:noFill/>
-                    </a:lnB>
-                    <a:solidFill>
-                      <a:srgbClr val="333D47"/>
-                    </a:solidFill>
-                  </a:tcPr>
-                </a:tc>
-              </a:tr>
-              <a:tr h="603504">
-                <a:tc>
-                  <a:txBody>
-                    <a:bodyPr wrap="square"/>
-                    <a:lstStyle/>
-                    <a:p>
-                      <a:pPr algn="l"/>
-                      <a:r>
-                        <a:rPr sz="1600" b="1" i="0">
+                        <a:rPr sz="1700" b="1" i="0">
                           <a:solidFill>
                             <a:srgbClr val="333D47"/>
                           </a:solidFill>
@@ -7681,14 +7644,24 @@
                     <a:p>
                       <a:pPr algn="ctr"/>
                       <a:r>
-                        <a:rPr sz="1400" b="0" i="0">
+                        <a:rPr sz="2400" b="1" i="0">
+                          <a:solidFill>
+                            <a:srgbClr val="333D47"/>
+                          </a:solidFill>
+                          <a:latin typeface="Arial"/>
+                          <a:ea typeface="Microsoft JhengHei"/>
+                        </a:rPr>
+                        <a:t>37.3%</a:t>
+                      </a:r>
+                      <a:r>
+                        <a:rPr sz="1200" b="0" i="0">
                           <a:solidFill>
                             <a:srgbClr val="5F6770"/>
                           </a:solidFill>
                           <a:latin typeface="Arial"/>
                           <a:ea typeface="Microsoft JhengHei"/>
                         </a:rPr>
-                        <a:t>Not shown</a:t>
+                        <a:t>  (19/51)</a:t>
                       </a:r>
                     </a:p>
                   </a:txBody>
@@ -7746,6 +7719,8 @@
                     <a:noFill/>
                   </a:tcPr>
                 </a:tc>
+              </a:tr>
+              <a:tr h="822960">
                 <a:tc>
                   <a:txBody>
                     <a:bodyPr wrap="square"/>
@@ -7753,45 +7728,7 @@
                     <a:p>
                       <a:pPr algn="l"/>
                       <a:r>
-                        <a:rPr sz="1300" b="0" i="0">
-                          <a:solidFill>
-                            <a:srgbClr val="5F6770"/>
-                          </a:solidFill>
-                          <a:latin typeface="Arial"/>
-                          <a:ea typeface="Microsoft JhengHei"/>
-                        </a:rPr>
-                        <a:t>Rules tuned by hand on these receipts</a:t>
-                      </a:r>
-                    </a:p>
-                  </a:txBody>
-                  <a:tcPr marL="91440" marR="91440" marT="45720" marB="45720" anchor="ctr">
-                    <a:lnL w="0">
-                      <a:noFill/>
-                    </a:lnL>
-                    <a:lnR w="0">
-                      <a:noFill/>
-                    </a:lnR>
-                    <a:lnT w="0">
-                      <a:noFill/>
-                    </a:lnT>
-                    <a:lnB w="9525" cmpd="sng">
-                      <a:solidFill>
-                        <a:srgbClr val="BFBFBF"/>
-                      </a:solidFill>
-                    </a:lnB>
-                    <a:noFill/>
-                  </a:tcPr>
-                </a:tc>
-              </a:tr>
-              <a:tr h="603504">
-                <a:tc>
-                  <a:txBody>
-                    <a:bodyPr wrap="square"/>
-                    <a:lstStyle/>
-                    <a:p>
-                      <a:pPr algn="l"/>
-                      <a:r>
-                        <a:rPr sz="1600" b="1" i="0">
+                        <a:rPr sz="1700" b="1" i="0">
                           <a:solidFill>
                             <a:srgbClr val="333D47"/>
                           </a:solidFill>
@@ -7827,14 +7764,24 @@
                     <a:p>
                       <a:pPr algn="ctr"/>
                       <a:r>
-                        <a:rPr sz="1400" b="0" i="0">
+                        <a:rPr sz="2400" b="1" i="0">
+                          <a:solidFill>
+                            <a:srgbClr val="333D47"/>
+                          </a:solidFill>
+                          <a:latin typeface="Arial"/>
+                          <a:ea typeface="Microsoft JhengHei"/>
+                        </a:rPr>
+                        <a:t>41.2%</a:t>
+                      </a:r>
+                      <a:r>
+                        <a:rPr sz="1200" b="0" i="0">
                           <a:solidFill>
                             <a:srgbClr val="5F6770"/>
                           </a:solidFill>
                           <a:latin typeface="Arial"/>
                           <a:ea typeface="Microsoft JhengHei"/>
                         </a:rPr>
-                        <a:t>Not shown</a:t>
+                        <a:t>  (21/51)</a:t>
                       </a:r>
                     </a:p>
                   </a:txBody>
@@ -7892,6 +7839,8 @@
                     <a:noFill/>
                   </a:tcPr>
                 </a:tc>
+              </a:tr>
+              <a:tr h="822960">
                 <a:tc>
                   <a:txBody>
                     <a:bodyPr wrap="square"/>
@@ -7899,52 +7848,14 @@
                     <a:p>
                       <a:pPr algn="l"/>
                       <a:r>
-                        <a:rPr sz="1300" b="0" i="0">
-                          <a:solidFill>
-                            <a:srgbClr val="5F6770"/>
-                          </a:solidFill>
-                          <a:latin typeface="Arial"/>
-                          <a:ea typeface="Microsoft JhengHei"/>
-                        </a:rPr>
-                        <a:t>Rules tuned by hand on these receipts</a:t>
-                      </a:r>
-                    </a:p>
-                  </a:txBody>
-                  <a:tcPr marL="91440" marR="91440" marT="45720" marB="45720" anchor="ctr">
-                    <a:lnL w="0">
-                      <a:noFill/>
-                    </a:lnL>
-                    <a:lnR w="0">
-                      <a:noFill/>
-                    </a:lnR>
-                    <a:lnT w="0">
-                      <a:noFill/>
-                    </a:lnT>
-                    <a:lnB w="9525" cmpd="sng">
-                      <a:solidFill>
-                        <a:srgbClr val="BFBFBF"/>
-                      </a:solidFill>
-                    </a:lnB>
-                    <a:noFill/>
-                  </a:tcPr>
-                </a:tc>
-              </a:tr>
-              <a:tr h="603504">
-                <a:tc>
-                  <a:txBody>
-                    <a:bodyPr wrap="square"/>
-                    <a:lstStyle/>
-                    <a:p>
-                      <a:pPr algn="l"/>
-                      <a:r>
-                        <a:rPr sz="1600" b="1" i="0">
+                        <a:rPr sz="1700" b="1" i="0">
                           <a:solidFill>
                             <a:srgbClr val="333D47"/>
                           </a:solidFill>
                           <a:latin typeface="Arial"/>
                           <a:ea typeface="Microsoft JhengHei"/>
                         </a:rPr>
-                        <a:t>Azure DI + AOAI, original prompt</a:t>
+                        <a:t>Azure DI + AOAI</a:t>
                       </a:r>
                     </a:p>
                   </a:txBody>
@@ -7975,7 +7886,7 @@
                     <a:p>
                       <a:pPr algn="ctr"/>
                       <a:r>
-                        <a:rPr sz="2000" b="1" i="0">
+                        <a:rPr sz="2400" b="1" i="0">
                           <a:solidFill>
                             <a:srgbClr val="D31145"/>
                           </a:solidFill>
@@ -8054,200 +7965,6 @@
                     </a:solidFill>
                   </a:tcPr>
                 </a:tc>
-                <a:tc>
-                  <a:txBody>
-                    <a:bodyPr wrap="square"/>
-                    <a:lstStyle/>
-                    <a:p>
-                      <a:pPr algn="l"/>
-                      <a:r>
-                        <a:rPr sz="1300" b="1" i="0">
-                          <a:solidFill>
-                            <a:srgbClr val="333D47"/>
-                          </a:solidFill>
-                          <a:latin typeface="Arial"/>
-                          <a:ea typeface="Microsoft JhengHei"/>
-                        </a:rPr>
-                        <a:t>Prompt written before these receipts</a:t>
-                      </a:r>
-                    </a:p>
-                  </a:txBody>
-                  <a:tcPr marL="91440" marR="91440" marT="45720" marB="45720" anchor="ctr">
-                    <a:lnL w="0">
-                      <a:noFill/>
-                    </a:lnL>
-                    <a:lnR w="0">
-                      <a:noFill/>
-                    </a:lnR>
-                    <a:lnT w="0">
-                      <a:noFill/>
-                    </a:lnT>
-                    <a:lnB w="9525" cmpd="sng">
-                      <a:solidFill>
-                        <a:srgbClr val="BFBFBF"/>
-                      </a:solidFill>
-                    </a:lnB>
-                    <a:solidFill>
-                      <a:srgbClr val="F2F2F2"/>
-                    </a:solidFill>
-                  </a:tcPr>
-                </a:tc>
-              </a:tr>
-              <a:tr h="603504">
-                <a:tc>
-                  <a:txBody>
-                    <a:bodyPr wrap="square"/>
-                    <a:lstStyle/>
-                    <a:p>
-                      <a:pPr algn="l"/>
-                      <a:r>
-                        <a:rPr sz="1600" b="1" i="0">
-                          <a:solidFill>
-                            <a:srgbClr val="333D47"/>
-                          </a:solidFill>
-                          <a:latin typeface="Arial"/>
-                          <a:ea typeface="Microsoft JhengHei"/>
-                        </a:rPr>
-                        <a:t>Azure DI + AOAI, prompt v2</a:t>
-                      </a:r>
-                    </a:p>
-                  </a:txBody>
-                  <a:tcPr marL="91440" marR="91440" marT="45720" marB="45720" anchor="ctr">
-                    <a:lnL w="0">
-                      <a:noFill/>
-                    </a:lnL>
-                    <a:lnR w="0">
-                      <a:noFill/>
-                    </a:lnR>
-                    <a:lnT w="0">
-                      <a:noFill/>
-                    </a:lnT>
-                    <a:lnB w="9525" cmpd="sng">
-                      <a:solidFill>
-                        <a:srgbClr val="BFBFBF"/>
-                      </a:solidFill>
-                    </a:lnB>
-                    <a:noFill/>
-                  </a:tcPr>
-                </a:tc>
-                <a:tc>
-                  <a:txBody>
-                    <a:bodyPr wrap="square"/>
-                    <a:lstStyle/>
-                    <a:p>
-                      <a:pPr algn="ctr"/>
-                      <a:r>
-                        <a:rPr sz="2000" b="0" i="0">
-                          <a:solidFill>
-                            <a:srgbClr val="333D47"/>
-                          </a:solidFill>
-                          <a:latin typeface="Arial"/>
-                          <a:ea typeface="Microsoft JhengHei"/>
-                        </a:rPr>
-                        <a:t>96.1%*</a:t>
-                      </a:r>
-                      <a:r>
-                        <a:rPr sz="1200" b="0" i="0">
-                          <a:solidFill>
-                            <a:srgbClr val="5F6770"/>
-                          </a:solidFill>
-                          <a:latin typeface="Arial"/>
-                          <a:ea typeface="Microsoft JhengHei"/>
-                        </a:rPr>
-                        <a:t>  (49/51)</a:t>
-                      </a:r>
-                    </a:p>
-                  </a:txBody>
-                  <a:tcPr marL="91440" marR="91440" marT="45720" marB="45720" anchor="ctr">
-                    <a:lnL w="0">
-                      <a:noFill/>
-                    </a:lnL>
-                    <a:lnR w="0">
-                      <a:noFill/>
-                    </a:lnR>
-                    <a:lnT w="0">
-                      <a:noFill/>
-                    </a:lnT>
-                    <a:lnB w="9525" cmpd="sng">
-                      <a:solidFill>
-                        <a:srgbClr val="BFBFBF"/>
-                      </a:solidFill>
-                    </a:lnB>
-                    <a:noFill/>
-                  </a:tcPr>
-                </a:tc>
-                <a:tc>
-                  <a:txBody>
-                    <a:bodyPr wrap="square"/>
-                    <a:lstStyle/>
-                    <a:p>
-                      <a:pPr algn="ctr"/>
-                      <a:r>
-                        <a:rPr sz="1800" b="0" i="0">
-                          <a:solidFill>
-                            <a:srgbClr val="333D47"/>
-                          </a:solidFill>
-                          <a:latin typeface="Arial"/>
-                          <a:ea typeface="Microsoft JhengHei"/>
-                        </a:rPr>
-                        <a:t>6.4 s</a:t>
-                      </a:r>
-                    </a:p>
-                  </a:txBody>
-                  <a:tcPr marL="91440" marR="91440" marT="45720" marB="45720" anchor="ctr">
-                    <a:lnL w="0">
-                      <a:noFill/>
-                    </a:lnL>
-                    <a:lnR w="0">
-                      <a:noFill/>
-                    </a:lnR>
-                    <a:lnT w="0">
-                      <a:noFill/>
-                    </a:lnT>
-                    <a:lnB w="9525" cmpd="sng">
-                      <a:solidFill>
-                        <a:srgbClr val="BFBFBF"/>
-                      </a:solidFill>
-                    </a:lnB>
-                    <a:noFill/>
-                  </a:tcPr>
-                </a:tc>
-                <a:tc>
-                  <a:txBody>
-                    <a:bodyPr wrap="square"/>
-                    <a:lstStyle/>
-                    <a:p>
-                      <a:pPr algn="l"/>
-                      <a:r>
-                        <a:rPr sz="1300" b="0" i="0">
-                          <a:solidFill>
-                            <a:srgbClr val="5F6770"/>
-                          </a:solidFill>
-                          <a:latin typeface="Arial"/>
-                          <a:ea typeface="Microsoft JhengHei"/>
-                        </a:rPr>
-                        <a:t>Development result: prompt tuned on these receipts</a:t>
-                      </a:r>
-                    </a:p>
-                  </a:txBody>
-                  <a:tcPr marL="91440" marR="91440" marT="45720" marB="45720" anchor="ctr">
-                    <a:lnL w="0">
-                      <a:noFill/>
-                    </a:lnL>
-                    <a:lnR w="0">
-                      <a:noFill/>
-                    </a:lnR>
-                    <a:lnT w="0">
-                      <a:noFill/>
-                    </a:lnT>
-                    <a:lnB w="9525" cmpd="sng">
-                      <a:solidFill>
-                        <a:srgbClr val="BFBFBF"/>
-                      </a:solidFill>
-                    </a:lnB>
-                    <a:noFill/>
-                  </a:tcPr>
-                </a:tc>
               </a:tr>
             </a:tbl>
           </a:graphicData>
@@ -8261,8 +7978,8 @@
         </p:nvSpPr>
         <p:spPr>
           <a:xfrm>
-            <a:off x="356616" y="4892040"/>
-            <a:ext cx="11475720" cy="566928"/>
+            <a:off x="7818120" y="1783080"/>
+            <a:ext cx="4014215" cy="3035808"/>
           </a:xfrm>
           <a:prstGeom prst="rect">
             <a:avLst/>
@@ -8275,34 +7992,81 @@
           </a:ln>
         </p:spPr>
         <p:txBody>
-          <a:bodyPr rtlCol="0" anchor="ctr" wrap="square" lIns="164592" rIns="164592" tIns="109728" bIns="109728"/>
+          <a:bodyPr rtlCol="0" anchor="t" wrap="square" lIns="228600" rIns="228600" tIns="109728" bIns="109728"/>
           <a:lstStyle/>
           <a:p>
             <a:pPr algn="l" marL="0" indent="0">
+              <a:spcAft>
+                <a:spcPts val="800"/>
+              </a:spcAft>
+              <a:buNone/>
+            </a:pPr>
+            <a:r>
+              <a:rPr sz="1600" b="1" i="0">
+                <a:solidFill>
+                  <a:srgbClr val="D31145"/>
+                </a:solidFill>
+                <a:latin typeface="Arial"/>
+                <a:ea typeface="Microsoft JhengHei"/>
+              </a:rPr>
+              <a:t>Why the rules scored low</a:t>
+            </a:r>
+          </a:p>
+          <a:p>
+            <a:pPr marL="182880" indent="-182880" algn="l">
+              <a:spcAft>
+                <a:spcPts val="600"/>
+              </a:spcAft>
+              <a:buFont typeface="Arial"/>
+              <a:buChar char="•"/>
+            </a:pPr>
+            <a:r>
+              <a:rPr sz="1400" b="0" i="0">
+                <a:solidFill>
+                  <a:srgbClr val="333D47"/>
+                </a:solidFill>
+                <a:latin typeface="Arial"/>
+                <a:ea typeface="Microsoft JhengHei"/>
+              </a:rPr>
+              <a:t>The original rules knew English labels only: no Chinese or bilingual labels.</a:t>
+            </a:r>
+          </a:p>
+          <a:p>
+            <a:pPr marL="182880" indent="-182880" algn="l">
+              <a:spcAft>
+                <a:spcPts val="600"/>
+              </a:spcAft>
+              <a:buFont typeface="Arial"/>
+              <a:buChar char="•"/>
+            </a:pPr>
+            <a:r>
+              <a:rPr sz="1400" b="0" i="0">
+                <a:solidFill>
+                  <a:srgbClr val="333D47"/>
+                </a:solidFill>
+                <a:latin typeface="Arial"/>
+                <a:ea typeface="Microsoft JhengHei"/>
+              </a:rPr>
+              <a:t>On Chinese and bilingual receipts the OCR read the values, but the rules could not find them.</a:t>
+            </a:r>
+          </a:p>
+          <a:p>
+            <a:pPr marL="182880" indent="-182880" algn="l">
               <a:spcAft>
                 <a:spcPts val="0"/>
               </a:spcAft>
-              <a:buNone/>
+              <a:buFont typeface="Arial"/>
+              <a:buChar char="•"/>
             </a:pPr>
             <a:r>
-              <a:rPr sz="1300" b="1" i="0">
+              <a:rPr sz="1400" b="1" i="0">
                 <a:solidFill>
                   <a:srgbClr val="333D47"/>
                 </a:solidFill>
                 <a:latin typeface="Arial"/>
                 <a:ea typeface="Microsoft JhengHei"/>
               </a:rPr>
-              <a:t>Unseen receipts (Version 1): </a:t>
-            </a:r>
-            <a:r>
-              <a:rPr sz="1300" b="0" i="0">
-                <a:solidFill>
-                  <a:srgbClr val="333D47"/>
-                </a:solidFill>
-                <a:latin typeface="Arial"/>
-                <a:ea typeface="Microsoft JhengHei"/>
-              </a:rPr>
-              <a:t>tuning did not carry over. The improved rules scored the same as the original rules on 4 unseen receipts, and prompt v2 the same as the original prompt on 6 receipts. Too few to rank approaches.</a:t>
+              <a:t>So this compares initial implementations, not the best each approach can do.</a:t>
             </a:r>
           </a:p>
         </p:txBody>
@@ -8315,7 +8079,7 @@
         </p:nvSpPr>
         <p:spPr>
           <a:xfrm>
-            <a:off x="356616" y="5559552"/>
+            <a:off x="356616" y="5074920"/>
             <a:ext cx="10972800" cy="320040"/>
           </a:xfrm>
           <a:prstGeom prst="rect">
@@ -8341,7 +8105,7 @@
                 <a:latin typeface="Arial"/>
                 <a:ea typeface="Microsoft JhengHei"/>
               </a:rPr>
-              <a:t>Rules: no accuracy shown (original rules had no Chinese labels; improved rules were tuned on these receipts). * Not independently validated.</a:t>
+              <a:t>Accuracy = correct fields out of 51. The AOAI prompt was written before these receipts. All approaches processed all 9 receipts.</a:t>
             </a:r>
           </a:p>
         </p:txBody>
@@ -8392,7 +8156,7 @@
                 <a:latin typeface="Arial"/>
                 <a:ea typeface="Microsoft JhengHei"/>
               </a:rPr>
-              <a:t>AOAI Replaces the Manual Rule Layer</a:t>
+              <a:t>How We Improved Accuracy</a:t>
             </a:r>
           </a:p>
         </p:txBody>
@@ -8479,86 +8243,721 @@
                 <a:latin typeface="Arial"/>
                 <a:ea typeface="Microsoft JhengHei"/>
               </a:rPr>
-              <a:t>Both pipelines read the text the same way. Only the step that finds the fields changes.</a:t>
+              <a:t>Both approaches improved after reviewing these receipts. Changing rules took far more work than changing a prompt.</a:t>
             </a:r>
           </a:p>
         </p:txBody>
       </p:sp>
-      <p:sp>
-        <p:nvSpPr>
-          <p:cNvPr id="12" name="TextBox 11"/>
-          <p:cNvSpPr txBox="1"/>
+      <p:graphicFrame>
+        <p:nvGraphicFramePr>
+          <p:cNvPr id="12" name="Table 11"/>
+          <p:cNvGraphicFramePr>
+            <a:graphicFrameLocks noGrp="1"/>
+          </p:cNvGraphicFramePr>
           <p:nvPr/>
-        </p:nvSpPr>
-        <p:spPr>
-          <a:xfrm>
-            <a:off x="356616" y="1828800"/>
-            <a:ext cx="2514600" cy="1097280"/>
-          </a:xfrm>
-          <a:prstGeom prst="rect">
-            <a:avLst/>
-          </a:prstGeom>
-          <a:noFill/>
-        </p:spPr>
-        <p:txBody>
-          <a:bodyPr wrap="square" lIns="0" rIns="0" tIns="0" bIns="0" anchor="ctr"/>
-          <a:lstStyle/>
-          <a:p>
-            <a:pPr marL="0" indent="0" algn="l">
-              <a:spcAft>
-                <a:spcPts val="200"/>
-              </a:spcAft>
-              <a:buNone/>
-            </a:pPr>
-            <a:r>
-              <a:rPr sz="1800" b="1" i="0">
-                <a:solidFill>
-                  <a:srgbClr val="333D47"/>
-                </a:solidFill>
-                <a:latin typeface="Arial"/>
-                <a:ea typeface="Microsoft JhengHei"/>
-              </a:rPr>
-              <a:t>Rule-based</a:t>
-            </a:r>
-          </a:p>
-          <a:p>
-            <a:pPr marL="0" indent="0" algn="l">
-              <a:spcAft>
-                <a:spcPts val="600"/>
-              </a:spcAft>
-              <a:buNone/>
-            </a:pPr>
-            <a:r>
-              <a:rPr sz="1300" b="0" i="0">
-                <a:solidFill>
-                  <a:srgbClr val="5F6770"/>
-                </a:solidFill>
-                <a:latin typeface="Arial"/>
-                <a:ea typeface="Microsoft JhengHei"/>
-              </a:rPr>
-              <a:t>PaddleOCR Light + rules</a:t>
-            </a:r>
-          </a:p>
-          <a:p>
-            <a:pPr marL="0" indent="0" algn="l">
-              <a:spcAft>
-                <a:spcPts val="0"/>
-              </a:spcAft>
-              <a:buNone/>
-            </a:pPr>
-            <a:r>
-              <a:rPr sz="1500" b="1" i="0">
-                <a:solidFill>
-                  <a:srgbClr val="D31145"/>
-                </a:solidFill>
-                <a:latin typeface="Arial"/>
-                <a:ea typeface="Microsoft JhengHei"/>
-              </a:rPr>
-              <a:t>tuned by hand for these layouts</a:t>
-            </a:r>
-          </a:p>
-        </p:txBody>
-      </p:sp>
+        </p:nvGraphicFramePr>
+        <p:xfrm>
+          <a:off x="356616" y="1783080"/>
+          <a:ext cx="11475719" cy="2560320"/>
+        </p:xfrm>
+        <a:graphic>
+          <a:graphicData uri="http://schemas.openxmlformats.org/drawingml/2006/table">
+            <a:tbl>
+              <a:tblPr firstRow="0" bandRow="0">
+                <a:tableStyleId>{2D5ABB26-0587-4C30-8999-92F81FD0307C}</a:tableStyleId>
+              </a:tblPr>
+              <a:tblGrid>
+                <a:gridCol w="2788920"/>
+                <a:gridCol w="5074920"/>
+                <a:gridCol w="1874519"/>
+                <a:gridCol w="1737360"/>
+              </a:tblGrid>
+              <a:tr h="566928">
+                <a:tc>
+                  <a:txBody>
+                    <a:bodyPr wrap="square"/>
+                    <a:lstStyle/>
+                    <a:p>
+                      <a:pPr algn="l"/>
+                      <a:r>
+                        <a:rPr sz="1400" b="1" i="0">
+                          <a:solidFill>
+                            <a:srgbClr val="FFFFFF"/>
+                          </a:solidFill>
+                          <a:latin typeface="Arial"/>
+                          <a:ea typeface="Microsoft JhengHei"/>
+                        </a:rPr>
+                        <a:t>Approach</a:t>
+                      </a:r>
+                    </a:p>
+                  </a:txBody>
+                  <a:tcPr marL="91440" marR="91440" marT="45720" marB="45720" anchor="ctr">
+                    <a:lnL w="0">
+                      <a:noFill/>
+                    </a:lnL>
+                    <a:lnR w="0">
+                      <a:noFill/>
+                    </a:lnR>
+                    <a:lnT w="0">
+                      <a:noFill/>
+                    </a:lnT>
+                    <a:lnB w="0">
+                      <a:noFill/>
+                    </a:lnB>
+                    <a:solidFill>
+                      <a:srgbClr val="333D47"/>
+                    </a:solidFill>
+                  </a:tcPr>
+                </a:tc>
+                <a:tc>
+                  <a:txBody>
+                    <a:bodyPr wrap="square"/>
+                    <a:lstStyle/>
+                    <a:p>
+                      <a:pPr algn="l"/>
+                      <a:r>
+                        <a:rPr sz="1400" b="1" i="0">
+                          <a:solidFill>
+                            <a:srgbClr val="FFFFFF"/>
+                          </a:solidFill>
+                          <a:latin typeface="Arial"/>
+                          <a:ea typeface="Microsoft JhengHei"/>
+                        </a:rPr>
+                        <a:t>What we changed</a:t>
+                      </a:r>
+                    </a:p>
+                  </a:txBody>
+                  <a:tcPr marL="91440" marR="91440" marT="45720" marB="45720" anchor="ctr">
+                    <a:lnL w="0">
+                      <a:noFill/>
+                    </a:lnL>
+                    <a:lnR w="0">
+                      <a:noFill/>
+                    </a:lnR>
+                    <a:lnT w="0">
+                      <a:noFill/>
+                    </a:lnT>
+                    <a:lnB w="0">
+                      <a:noFill/>
+                    </a:lnB>
+                    <a:solidFill>
+                      <a:srgbClr val="333D47"/>
+                    </a:solidFill>
+                  </a:tcPr>
+                </a:tc>
+                <a:tc>
+                  <a:txBody>
+                    <a:bodyPr wrap="square"/>
+                    <a:lstStyle/>
+                    <a:p>
+                      <a:pPr algn="ctr"/>
+                      <a:r>
+                        <a:rPr sz="1400" b="1" i="0">
+                          <a:solidFill>
+                            <a:srgbClr val="FFFFFF"/>
+                          </a:solidFill>
+                          <a:latin typeface="Arial"/>
+                          <a:ea typeface="Microsoft JhengHei"/>
+                        </a:rPr>
+                        <a:t>Development score</a:t>
+                      </a:r>
+                    </a:p>
+                  </a:txBody>
+                  <a:tcPr marL="91440" marR="91440" marT="45720" marB="45720" anchor="ctr">
+                    <a:lnL w="0">
+                      <a:noFill/>
+                    </a:lnL>
+                    <a:lnR w="0">
+                      <a:noFill/>
+                    </a:lnR>
+                    <a:lnT w="0">
+                      <a:noFill/>
+                    </a:lnT>
+                    <a:lnB w="0">
+                      <a:noFill/>
+                    </a:lnB>
+                    <a:solidFill>
+                      <a:srgbClr val="333D47"/>
+                    </a:solidFill>
+                  </a:tcPr>
+                </a:tc>
+                <a:tc>
+                  <a:txBody>
+                    <a:bodyPr wrap="square"/>
+                    <a:lstStyle/>
+                    <a:p>
+                      <a:pPr algn="ctr"/>
+                      <a:r>
+                        <a:rPr sz="1400" b="1" i="0">
+                          <a:solidFill>
+                            <a:srgbClr val="FFFFFF"/>
+                          </a:solidFill>
+                          <a:latin typeface="Arial"/>
+                          <a:ea typeface="Microsoft JhengHei"/>
+                        </a:rPr>
+                        <a:t>Fixed / broke</a:t>
+                      </a:r>
+                    </a:p>
+                  </a:txBody>
+                  <a:tcPr marL="91440" marR="91440" marT="45720" marB="45720" anchor="ctr">
+                    <a:lnL w="0">
+                      <a:noFill/>
+                    </a:lnL>
+                    <a:lnR w="0">
+                      <a:noFill/>
+                    </a:lnR>
+                    <a:lnT w="0">
+                      <a:noFill/>
+                    </a:lnT>
+                    <a:lnB w="0">
+                      <a:noFill/>
+                    </a:lnB>
+                    <a:solidFill>
+                      <a:srgbClr val="333D47"/>
+                    </a:solidFill>
+                  </a:tcPr>
+                </a:tc>
+              </a:tr>
+              <a:tr h="713232">
+                <a:tc>
+                  <a:txBody>
+                    <a:bodyPr wrap="square"/>
+                    <a:lstStyle/>
+                    <a:p>
+                      <a:pPr algn="l"/>
+                      <a:r>
+                        <a:rPr sz="1500" b="1" i="0">
+                          <a:solidFill>
+                            <a:srgbClr val="333D47"/>
+                          </a:solidFill>
+                          <a:latin typeface="Arial"/>
+                          <a:ea typeface="Microsoft JhengHei"/>
+                        </a:rPr>
+                        <a:t>PaddleOCR Light + rules</a:t>
+                      </a:r>
+                    </a:p>
+                  </a:txBody>
+                  <a:tcPr marL="91440" marR="91440" marT="45720" marB="45720" anchor="ctr">
+                    <a:lnL w="0">
+                      <a:noFill/>
+                    </a:lnL>
+                    <a:lnR w="0">
+                      <a:noFill/>
+                    </a:lnR>
+                    <a:lnT w="0">
+                      <a:noFill/>
+                    </a:lnT>
+                    <a:lnB w="9525" cmpd="sng">
+                      <a:solidFill>
+                        <a:srgbClr val="BFBFBF"/>
+                      </a:solidFill>
+                    </a:lnB>
+                    <a:noFill/>
+                  </a:tcPr>
+                </a:tc>
+                <a:tc>
+                  <a:txBody>
+                    <a:bodyPr wrap="square"/>
+                    <a:lstStyle/>
+                    <a:p>
+                      <a:pPr algn="l"/>
+                      <a:r>
+                        <a:rPr sz="1300" b="0" i="0">
+                          <a:solidFill>
+                            <a:srgbClr val="333D47"/>
+                          </a:solidFill>
+                          <a:latin typeface="Arial"/>
+                          <a:ea typeface="Microsoft JhengHei"/>
+                        </a:rPr>
+                        <a:t>Rewrote the rules by hand: Chinese and bilingual labels, distractor labels, layouts (69 → 225 label phrases)</a:t>
+                      </a:r>
+                    </a:p>
+                  </a:txBody>
+                  <a:tcPr marL="91440" marR="91440" marT="45720" marB="45720" anchor="ctr">
+                    <a:lnL w="0">
+                      <a:noFill/>
+                    </a:lnL>
+                    <a:lnR w="0">
+                      <a:noFill/>
+                    </a:lnR>
+                    <a:lnT w="0">
+                      <a:noFill/>
+                    </a:lnT>
+                    <a:lnB w="9525" cmpd="sng">
+                      <a:solidFill>
+                        <a:srgbClr val="BFBFBF"/>
+                      </a:solidFill>
+                    </a:lnB>
+                    <a:noFill/>
+                  </a:tcPr>
+                </a:tc>
+                <a:tc>
+                  <a:txBody>
+                    <a:bodyPr wrap="square"/>
+                    <a:lstStyle/>
+                    <a:p>
+                      <a:pPr algn="ctr"/>
+                      <a:r>
+                        <a:rPr sz="2000" b="1" i="0">
+                          <a:solidFill>
+                            <a:srgbClr val="333D47"/>
+                          </a:solidFill>
+                          <a:latin typeface="Arial"/>
+                          <a:ea typeface="Microsoft JhengHei"/>
+                        </a:rPr>
+                        <a:t>88.2%</a:t>
+                      </a:r>
+                      <a:r>
+                        <a:rPr sz="1100" b="0" i="0">
+                          <a:solidFill>
+                            <a:srgbClr val="5F6770"/>
+                          </a:solidFill>
+                          <a:latin typeface="Arial"/>
+                          <a:ea typeface="Microsoft JhengHei"/>
+                        </a:rPr>
+                        <a:t>  (45/51)</a:t>
+                      </a:r>
+                    </a:p>
+                  </a:txBody>
+                  <a:tcPr marL="91440" marR="91440" marT="45720" marB="45720" anchor="ctr">
+                    <a:lnL w="0">
+                      <a:noFill/>
+                    </a:lnL>
+                    <a:lnR w="0">
+                      <a:noFill/>
+                    </a:lnR>
+                    <a:lnT w="0">
+                      <a:noFill/>
+                    </a:lnT>
+                    <a:lnB w="9525" cmpd="sng">
+                      <a:solidFill>
+                        <a:srgbClr val="BFBFBF"/>
+                      </a:solidFill>
+                    </a:lnB>
+                    <a:noFill/>
+                  </a:tcPr>
+                </a:tc>
+                <a:tc>
+                  <a:txBody>
+                    <a:bodyPr wrap="square"/>
+                    <a:lstStyle/>
+                    <a:p>
+                      <a:pPr algn="ctr"/>
+                      <a:r>
+                        <a:rPr sz="1600" b="1" i="0">
+                          <a:solidFill>
+                            <a:srgbClr val="1E7B4A"/>
+                          </a:solidFill>
+                          <a:latin typeface="Arial"/>
+                          <a:ea typeface="Microsoft JhengHei"/>
+                        </a:rPr>
+                        <a:t>+27</a:t>
+                      </a:r>
+                      <a:r>
+                        <a:rPr sz="1600" b="0" i="0">
+                          <a:solidFill>
+                            <a:srgbClr val="333D47"/>
+                          </a:solidFill>
+                          <a:latin typeface="Arial"/>
+                          <a:ea typeface="Microsoft JhengHei"/>
+                        </a:rPr>
+                        <a:t> / </a:t>
+                      </a:r>
+                      <a:r>
+                        <a:rPr sz="1600" b="1" i="0">
+                          <a:solidFill>
+                            <a:srgbClr val="D31145"/>
+                          </a:solidFill>
+                          <a:latin typeface="Arial"/>
+                          <a:ea typeface="Microsoft JhengHei"/>
+                        </a:rPr>
+                        <a:t>−1</a:t>
+                      </a:r>
+                    </a:p>
+                  </a:txBody>
+                  <a:tcPr marL="91440" marR="91440" marT="45720" marB="45720" anchor="ctr">
+                    <a:lnL w="0">
+                      <a:noFill/>
+                    </a:lnL>
+                    <a:lnR w="0">
+                      <a:noFill/>
+                    </a:lnR>
+                    <a:lnT w="0">
+                      <a:noFill/>
+                    </a:lnT>
+                    <a:lnB w="9525" cmpd="sng">
+                      <a:solidFill>
+                        <a:srgbClr val="BFBFBF"/>
+                      </a:solidFill>
+                    </a:lnB>
+                    <a:noFill/>
+                  </a:tcPr>
+                </a:tc>
+              </a:tr>
+              <a:tr h="566928">
+                <a:tc>
+                  <a:txBody>
+                    <a:bodyPr wrap="square"/>
+                    <a:lstStyle/>
+                    <a:p>
+                      <a:pPr algn="l"/>
+                      <a:r>
+                        <a:rPr sz="1500" b="1" i="0">
+                          <a:solidFill>
+                            <a:srgbClr val="333D47"/>
+                          </a:solidFill>
+                          <a:latin typeface="Arial"/>
+                          <a:ea typeface="Microsoft JhengHei"/>
+                        </a:rPr>
+                        <a:t>Azure DI + rules</a:t>
+                      </a:r>
+                    </a:p>
+                  </a:txBody>
+                  <a:tcPr marL="91440" marR="91440" marT="45720" marB="45720" anchor="ctr">
+                    <a:lnL w="0">
+                      <a:noFill/>
+                    </a:lnL>
+                    <a:lnR w="0">
+                      <a:noFill/>
+                    </a:lnR>
+                    <a:lnT w="0">
+                      <a:noFill/>
+                    </a:lnT>
+                    <a:lnB w="9525" cmpd="sng">
+                      <a:solidFill>
+                        <a:srgbClr val="BFBFBF"/>
+                      </a:solidFill>
+                    </a:lnB>
+                    <a:noFill/>
+                  </a:tcPr>
+                </a:tc>
+                <a:tc>
+                  <a:txBody>
+                    <a:bodyPr wrap="square"/>
+                    <a:lstStyle/>
+                    <a:p>
+                      <a:pPr algn="l"/>
+                      <a:r>
+                        <a:rPr sz="1300" b="0" i="0">
+                          <a:solidFill>
+                            <a:srgbClr val="333D47"/>
+                          </a:solidFill>
+                          <a:latin typeface="Arial"/>
+                          <a:ea typeface="Microsoft JhengHei"/>
+                        </a:rPr>
+                        <a:t>The same rule changes, on Azure DI text</a:t>
+                      </a:r>
+                    </a:p>
+                  </a:txBody>
+                  <a:tcPr marL="91440" marR="91440" marT="45720" marB="45720" anchor="ctr">
+                    <a:lnL w="0">
+                      <a:noFill/>
+                    </a:lnL>
+                    <a:lnR w="0">
+                      <a:noFill/>
+                    </a:lnR>
+                    <a:lnT w="0">
+                      <a:noFill/>
+                    </a:lnT>
+                    <a:lnB w="9525" cmpd="sng">
+                      <a:solidFill>
+                        <a:srgbClr val="BFBFBF"/>
+                      </a:solidFill>
+                    </a:lnB>
+                    <a:noFill/>
+                  </a:tcPr>
+                </a:tc>
+                <a:tc>
+                  <a:txBody>
+                    <a:bodyPr wrap="square"/>
+                    <a:lstStyle/>
+                    <a:p>
+                      <a:pPr algn="ctr"/>
+                      <a:r>
+                        <a:rPr sz="2000" b="1" i="0">
+                          <a:solidFill>
+                            <a:srgbClr val="333D47"/>
+                          </a:solidFill>
+                          <a:latin typeface="Arial"/>
+                          <a:ea typeface="Microsoft JhengHei"/>
+                        </a:rPr>
+                        <a:t>86.3%</a:t>
+                      </a:r>
+                      <a:r>
+                        <a:rPr sz="1100" b="0" i="0">
+                          <a:solidFill>
+                            <a:srgbClr val="5F6770"/>
+                          </a:solidFill>
+                          <a:latin typeface="Arial"/>
+                          <a:ea typeface="Microsoft JhengHei"/>
+                        </a:rPr>
+                        <a:t>  (44/51)</a:t>
+                      </a:r>
+                    </a:p>
+                  </a:txBody>
+                  <a:tcPr marL="91440" marR="91440" marT="45720" marB="45720" anchor="ctr">
+                    <a:lnL w="0">
+                      <a:noFill/>
+                    </a:lnL>
+                    <a:lnR w="0">
+                      <a:noFill/>
+                    </a:lnR>
+                    <a:lnT w="0">
+                      <a:noFill/>
+                    </a:lnT>
+                    <a:lnB w="9525" cmpd="sng">
+                      <a:solidFill>
+                        <a:srgbClr val="BFBFBF"/>
+                      </a:solidFill>
+                    </a:lnB>
+                    <a:noFill/>
+                  </a:tcPr>
+                </a:tc>
+                <a:tc>
+                  <a:txBody>
+                    <a:bodyPr wrap="square"/>
+                    <a:lstStyle/>
+                    <a:p>
+                      <a:pPr algn="ctr"/>
+                      <a:r>
+                        <a:rPr sz="1600" b="1" i="0">
+                          <a:solidFill>
+                            <a:srgbClr val="1E7B4A"/>
+                          </a:solidFill>
+                          <a:latin typeface="Arial"/>
+                          <a:ea typeface="Microsoft JhengHei"/>
+                        </a:rPr>
+                        <a:t>+24</a:t>
+                      </a:r>
+                      <a:r>
+                        <a:rPr sz="1600" b="0" i="0">
+                          <a:solidFill>
+                            <a:srgbClr val="333D47"/>
+                          </a:solidFill>
+                          <a:latin typeface="Arial"/>
+                          <a:ea typeface="Microsoft JhengHei"/>
+                        </a:rPr>
+                        <a:t> / </a:t>
+                      </a:r>
+                      <a:r>
+                        <a:rPr sz="1600" b="1" i="0">
+                          <a:solidFill>
+                            <a:srgbClr val="D31145"/>
+                          </a:solidFill>
+                          <a:latin typeface="Arial"/>
+                          <a:ea typeface="Microsoft JhengHei"/>
+                        </a:rPr>
+                        <a:t>−1</a:t>
+                      </a:r>
+                    </a:p>
+                  </a:txBody>
+                  <a:tcPr marL="91440" marR="91440" marT="45720" marB="45720" anchor="ctr">
+                    <a:lnL w="0">
+                      <a:noFill/>
+                    </a:lnL>
+                    <a:lnR w="0">
+                      <a:noFill/>
+                    </a:lnR>
+                    <a:lnT w="0">
+                      <a:noFill/>
+                    </a:lnT>
+                    <a:lnB w="9525" cmpd="sng">
+                      <a:solidFill>
+                        <a:srgbClr val="BFBFBF"/>
+                      </a:solidFill>
+                    </a:lnB>
+                    <a:noFill/>
+                  </a:tcPr>
+                </a:tc>
+              </a:tr>
+              <a:tr h="713232">
+                <a:tc>
+                  <a:txBody>
+                    <a:bodyPr wrap="square"/>
+                    <a:lstStyle/>
+                    <a:p>
+                      <a:pPr algn="l"/>
+                      <a:r>
+                        <a:rPr sz="1500" b="1" i="0">
+                          <a:solidFill>
+                            <a:srgbClr val="333D47"/>
+                          </a:solidFill>
+                          <a:latin typeface="Arial"/>
+                          <a:ea typeface="Microsoft JhengHei"/>
+                        </a:rPr>
+                        <a:t>Azure DI + AOAI, prompt v2</a:t>
+                      </a:r>
+                    </a:p>
+                  </a:txBody>
+                  <a:tcPr marL="91440" marR="91440" marT="45720" marB="45720" anchor="ctr">
+                    <a:lnL w="0">
+                      <a:noFill/>
+                    </a:lnL>
+                    <a:lnR w="0">
+                      <a:noFill/>
+                    </a:lnR>
+                    <a:lnT w="0">
+                      <a:noFill/>
+                    </a:lnT>
+                    <a:lnB w="9525" cmpd="sng">
+                      <a:solidFill>
+                        <a:srgbClr val="BFBFBF"/>
+                      </a:solidFill>
+                    </a:lnB>
+                    <a:solidFill>
+                      <a:srgbClr val="F2F2F2"/>
+                    </a:solidFill>
+                  </a:tcPr>
+                </a:tc>
+                <a:tc>
+                  <a:txBody>
+                    <a:bodyPr wrap="square"/>
+                    <a:lstStyle/>
+                    <a:p>
+                      <a:pPr algn="l"/>
+                      <a:r>
+                        <a:rPr sz="1300" b="0" i="0">
+                          <a:solidFill>
+                            <a:srgbClr val="333D47"/>
+                          </a:solidFill>
+                          <a:latin typeface="Arial"/>
+                          <a:ea typeface="Microsoft JhengHei"/>
+                        </a:rPr>
+                        <a:t>Revised the prompt: clearer field definitions, text kept in page rows, a few general checks</a:t>
+                      </a:r>
+                    </a:p>
+                  </a:txBody>
+                  <a:tcPr marL="91440" marR="91440" marT="45720" marB="45720" anchor="ctr">
+                    <a:lnL w="0">
+                      <a:noFill/>
+                    </a:lnL>
+                    <a:lnR w="0">
+                      <a:noFill/>
+                    </a:lnR>
+                    <a:lnT w="0">
+                      <a:noFill/>
+                    </a:lnT>
+                    <a:lnB w="9525" cmpd="sng">
+                      <a:solidFill>
+                        <a:srgbClr val="BFBFBF"/>
+                      </a:solidFill>
+                    </a:lnB>
+                    <a:solidFill>
+                      <a:srgbClr val="F2F2F2"/>
+                    </a:solidFill>
+                  </a:tcPr>
+                </a:tc>
+                <a:tc>
+                  <a:txBody>
+                    <a:bodyPr wrap="square"/>
+                    <a:lstStyle/>
+                    <a:p>
+                      <a:pPr algn="ctr"/>
+                      <a:r>
+                        <a:rPr sz="2000" b="1" i="0">
+                          <a:solidFill>
+                            <a:srgbClr val="D31145"/>
+                          </a:solidFill>
+                          <a:latin typeface="Arial"/>
+                          <a:ea typeface="Microsoft JhengHei"/>
+                        </a:rPr>
+                        <a:t>96.1%</a:t>
+                      </a:r>
+                      <a:r>
+                        <a:rPr sz="1100" b="0" i="0">
+                          <a:solidFill>
+                            <a:srgbClr val="5F6770"/>
+                          </a:solidFill>
+                          <a:latin typeface="Arial"/>
+                          <a:ea typeface="Microsoft JhengHei"/>
+                        </a:rPr>
+                        <a:t>  (49/51)</a:t>
+                      </a:r>
+                    </a:p>
+                  </a:txBody>
+                  <a:tcPr marL="91440" marR="91440" marT="45720" marB="45720" anchor="ctr">
+                    <a:lnL w="0">
+                      <a:noFill/>
+                    </a:lnL>
+                    <a:lnR w="0">
+                      <a:noFill/>
+                    </a:lnR>
+                    <a:lnT w="0">
+                      <a:noFill/>
+                    </a:lnT>
+                    <a:lnB w="9525" cmpd="sng">
+                      <a:solidFill>
+                        <a:srgbClr val="BFBFBF"/>
+                      </a:solidFill>
+                    </a:lnB>
+                    <a:solidFill>
+                      <a:srgbClr val="F2F2F2"/>
+                    </a:solidFill>
+                  </a:tcPr>
+                </a:tc>
+                <a:tc>
+                  <a:txBody>
+                    <a:bodyPr wrap="square"/>
+                    <a:lstStyle/>
+                    <a:p>
+                      <a:pPr algn="ctr"/>
+                      <a:r>
+                        <a:rPr sz="1600" b="1" i="0">
+                          <a:solidFill>
+                            <a:srgbClr val="1E7B4A"/>
+                          </a:solidFill>
+                          <a:latin typeface="Arial"/>
+                          <a:ea typeface="Microsoft JhengHei"/>
+                        </a:rPr>
+                        <a:t>+4</a:t>
+                      </a:r>
+                      <a:r>
+                        <a:rPr sz="1600" b="0" i="0">
+                          <a:solidFill>
+                            <a:srgbClr val="333D47"/>
+                          </a:solidFill>
+                          <a:latin typeface="Arial"/>
+                          <a:ea typeface="Microsoft JhengHei"/>
+                        </a:rPr>
+                        <a:t> / </a:t>
+                      </a:r>
+                      <a:r>
+                        <a:rPr sz="1600" b="0" i="0">
+                          <a:solidFill>
+                            <a:srgbClr val="333D47"/>
+                          </a:solidFill>
+                          <a:latin typeface="Arial"/>
+                          <a:ea typeface="Microsoft JhengHei"/>
+                        </a:rPr>
+                        <a:t>−0</a:t>
+                      </a:r>
+                    </a:p>
+                  </a:txBody>
+                  <a:tcPr marL="91440" marR="91440" marT="45720" marB="45720" anchor="ctr">
+                    <a:lnL w="0">
+                      <a:noFill/>
+                    </a:lnL>
+                    <a:lnR w="0">
+                      <a:noFill/>
+                    </a:lnR>
+                    <a:lnT w="0">
+                      <a:noFill/>
+                    </a:lnT>
+                    <a:lnB w="9525" cmpd="sng">
+                      <a:solidFill>
+                        <a:srgbClr val="BFBFBF"/>
+                      </a:solidFill>
+                    </a:lnB>
+                    <a:solidFill>
+                      <a:srgbClr val="F2F2F2"/>
+                    </a:solidFill>
+                  </a:tcPr>
+                </a:tc>
+              </a:tr>
+            </a:tbl>
+          </a:graphicData>
+        </a:graphic>
+      </p:graphicFrame>
       <p:sp>
         <p:nvSpPr>
           <p:cNvPr id="13" name="Rectangle 12"/>
@@ -8567,8 +8966,8 @@
         </p:nvSpPr>
         <p:spPr>
           <a:xfrm>
-            <a:off x="3017520" y="1828800"/>
-            <a:ext cx="2560320" cy="1097280"/>
+            <a:off x="356616" y="4526280"/>
+            <a:ext cx="5623560" cy="868680"/>
           </a:xfrm>
           <a:prstGeom prst="rect">
             <a:avLst/>
@@ -8581,24 +8980,24 @@
           </a:ln>
         </p:spPr>
         <p:txBody>
-          <a:bodyPr rtlCol="0" anchor="ctr" wrap="square" lIns="146304" rIns="146304" tIns="109728" bIns="109728"/>
+          <a:bodyPr rtlCol="0" anchor="t" wrap="square" lIns="182880" rIns="182880" tIns="109728" bIns="109728"/>
           <a:lstStyle/>
           <a:p>
             <a:pPr algn="l" marL="0" indent="0">
               <a:spcAft>
-                <a:spcPts val="400"/>
+                <a:spcPts val="300"/>
               </a:spcAft>
               <a:buNone/>
             </a:pPr>
             <a:r>
-              <a:rPr sz="1600" b="1" i="0">
-                <a:solidFill>
-                  <a:srgbClr val="333D47"/>
+              <a:rPr sz="1500" b="1" i="0">
+                <a:solidFill>
+                  <a:srgbClr val="D31145"/>
                 </a:solidFill>
                 <a:latin typeface="Arial"/>
                 <a:ea typeface="Microsoft JhengHei"/>
               </a:rPr>
-              <a:t>Read text (OCR)</a:t>
+              <a:t>Changing rules</a:t>
             </a:r>
           </a:p>
           <a:p>
@@ -8609,14 +9008,14 @@
               <a:buNone/>
             </a:pPr>
             <a:r>
-              <a:rPr sz="1250" b="0" i="0">
-                <a:solidFill>
-                  <a:srgbClr val="5F6770"/>
+              <a:rPr sz="1300" b="0" i="0">
+                <a:solidFill>
+                  <a:srgbClr val="333D47"/>
                 </a:solidFill>
                 <a:latin typeface="Arial"/>
                 <a:ea typeface="Microsoft JhengHei"/>
               </a:rPr>
-              <a:t>PaddleOCR Light</a:t>
+              <a:t>Code and vocabulary for every new wording or language, then a retest of every receipt. One change broke a receipt that was already correct.</a:t>
             </a:r>
           </a:p>
         </p:txBody>
@@ -8629,101 +9028,8 @@
         </p:nvSpPr>
         <p:spPr>
           <a:xfrm>
-            <a:off x="6126479" y="1828800"/>
-            <a:ext cx="2560320" cy="1097280"/>
-          </a:xfrm>
-          <a:prstGeom prst="rect">
-            <a:avLst/>
-          </a:prstGeom>
-          <a:solidFill>
-            <a:srgbClr val="FFFFFF"/>
-          </a:solidFill>
-          <a:ln w="25400">
-            <a:solidFill>
-              <a:srgbClr val="D31145"/>
-            </a:solidFill>
-          </a:ln>
-        </p:spPr>
-        <p:txBody>
-          <a:bodyPr rtlCol="0" anchor="ctr" wrap="square" lIns="146304" rIns="146304" tIns="109728" bIns="109728"/>
-          <a:lstStyle/>
-          <a:p>
-            <a:pPr algn="l" marL="0" indent="0">
-              <a:spcAft>
-                <a:spcPts val="400"/>
-              </a:spcAft>
-              <a:buNone/>
-            </a:pPr>
-            <a:r>
-              <a:rPr sz="1600" b="1" i="0">
-                <a:solidFill>
-                  <a:srgbClr val="D31145"/>
-                </a:solidFill>
-                <a:latin typeface="Arial"/>
-                <a:ea typeface="Microsoft JhengHei"/>
-              </a:rPr>
-              <a:t>Extraction rules</a:t>
-            </a:r>
-          </a:p>
-          <a:p>
-            <a:pPr marL="0" indent="0" algn="l">
-              <a:spcAft>
-                <a:spcPts val="0"/>
-              </a:spcAft>
-              <a:buNone/>
-            </a:pPr>
-            <a:r>
-              <a:rPr sz="1250" b="0" i="0">
-                <a:solidFill>
-                  <a:srgbClr val="333D47"/>
-                </a:solidFill>
-                <a:latin typeface="Arial"/>
-                <a:ea typeface="Microsoft JhengHei"/>
-              </a:rPr>
-              <a:t>written and updated by hand (69 → 225 label phrases)</a:t>
-            </a:r>
-          </a:p>
-        </p:txBody>
-      </p:sp>
-      <p:sp>
-        <p:nvSpPr>
-          <p:cNvPr id="15" name="Right Arrow 14"/>
-          <p:cNvSpPr/>
-          <p:nvPr/>
-        </p:nvSpPr>
-        <p:spPr>
-          <a:xfrm>
-            <a:off x="5705855" y="2240280"/>
-            <a:ext cx="292607" cy="274320"/>
-          </a:xfrm>
-          <a:prstGeom prst="rightArrow">
-            <a:avLst/>
-          </a:prstGeom>
-          <a:solidFill>
-            <a:srgbClr val="5F6770"/>
-          </a:solidFill>
-          <a:ln>
-            <a:noFill/>
-          </a:ln>
-        </p:spPr>
-        <p:txBody>
-          <a:bodyPr rtlCol="0" anchor="ctr"/>
-          <a:lstStyle/>
-          <a:p>
-            <a:pPr algn="ctr"/>
-          </a:p>
-        </p:txBody>
-      </p:sp>
-      <p:sp>
-        <p:nvSpPr>
-          <p:cNvPr id="16" name="Rectangle 15"/>
-          <p:cNvSpPr/>
-          <p:nvPr/>
-        </p:nvSpPr>
-        <p:spPr>
-          <a:xfrm>
-            <a:off x="9235440" y="1828800"/>
-            <a:ext cx="2560320" cy="1097280"/>
+            <a:off x="6208776" y="4526280"/>
+            <a:ext cx="5623560" cy="868680"/>
           </a:xfrm>
           <a:prstGeom prst="rect">
             <a:avLst/>
@@ -8736,24 +9042,24 @@
           </a:ln>
         </p:spPr>
         <p:txBody>
-          <a:bodyPr rtlCol="0" anchor="ctr" wrap="square" lIns="146304" rIns="146304" tIns="109728" bIns="109728"/>
+          <a:bodyPr rtlCol="0" anchor="t" wrap="square" lIns="182880" rIns="182880" tIns="109728" bIns="109728"/>
           <a:lstStyle/>
           <a:p>
             <a:pPr algn="l" marL="0" indent="0">
               <a:spcAft>
-                <a:spcPts val="400"/>
+                <a:spcPts val="300"/>
               </a:spcAft>
               <a:buNone/>
             </a:pPr>
             <a:r>
-              <a:rPr sz="1600" b="1" i="0">
-                <a:solidFill>
-                  <a:srgbClr val="333D47"/>
+              <a:rPr sz="1500" b="1" i="0">
+                <a:solidFill>
+                  <a:srgbClr val="D31145"/>
                 </a:solidFill>
                 <a:latin typeface="Arial"/>
                 <a:ea typeface="Microsoft JhengHei"/>
               </a:rPr>
-              <a:t>6 fields</a:t>
+              <a:t>Changing the AI prompt</a:t>
             </a:r>
           </a:p>
           <a:p>
@@ -8764,407 +9070,28 @@
               <a:buNone/>
             </a:pPr>
             <a:r>
-              <a:rPr sz="1250" b="0" i="0">
-                <a:solidFill>
-                  <a:srgbClr val="5F6770"/>
+              <a:rPr sz="1300" b="0" i="0">
+                <a:solidFill>
+                  <a:srgbClr val="333D47"/>
                 </a:solidFill>
                 <a:latin typeface="Arial"/>
                 <a:ea typeface="Microsoft JhengHei"/>
               </a:rPr>
-              <a:t>doctor, patient, total, …</a:t>
+              <a:t>Plain-language edits to one prompt, then a rerun. No field broke on these receipts.</a:t>
             </a:r>
           </a:p>
         </p:txBody>
       </p:sp>
       <p:sp>
         <p:nvSpPr>
-          <p:cNvPr id="17" name="Right Arrow 16"/>
-          <p:cNvSpPr/>
-          <p:nvPr/>
-        </p:nvSpPr>
-        <p:spPr>
-          <a:xfrm>
-            <a:off x="8814816" y="2240280"/>
-            <a:ext cx="292607" cy="274320"/>
-          </a:xfrm>
-          <a:prstGeom prst="rightArrow">
-            <a:avLst/>
-          </a:prstGeom>
-          <a:solidFill>
-            <a:srgbClr val="5F6770"/>
-          </a:solidFill>
-          <a:ln>
-            <a:noFill/>
-          </a:ln>
-        </p:spPr>
-        <p:txBody>
-          <a:bodyPr rtlCol="0" anchor="ctr"/>
-          <a:lstStyle/>
-          <a:p>
-            <a:pPr algn="ctr"/>
-          </a:p>
-        </p:txBody>
-      </p:sp>
-      <p:sp>
-        <p:nvSpPr>
-          <p:cNvPr id="18" name="TextBox 17"/>
+          <p:cNvPr id="15" name="TextBox 14"/>
           <p:cNvSpPr txBox="1"/>
           <p:nvPr/>
         </p:nvSpPr>
         <p:spPr>
           <a:xfrm>
-            <a:off x="356616" y="3611880"/>
-            <a:ext cx="2514600" cy="1097280"/>
-          </a:xfrm>
-          <a:prstGeom prst="rect">
-            <a:avLst/>
-          </a:prstGeom>
-          <a:noFill/>
-        </p:spPr>
-        <p:txBody>
-          <a:bodyPr wrap="square" lIns="0" rIns="0" tIns="0" bIns="0" anchor="ctr"/>
-          <a:lstStyle/>
-          <a:p>
-            <a:pPr marL="0" indent="0" algn="l">
-              <a:spcAft>
-                <a:spcPts val="200"/>
-              </a:spcAft>
-              <a:buNone/>
-            </a:pPr>
-            <a:r>
-              <a:rPr sz="1800" b="1" i="0">
-                <a:solidFill>
-                  <a:srgbClr val="333D47"/>
-                </a:solidFill>
-                <a:latin typeface="Arial"/>
-                <a:ea typeface="Microsoft JhengHei"/>
-              </a:rPr>
-              <a:t>AI extraction</a:t>
-            </a:r>
-          </a:p>
-          <a:p>
-            <a:pPr marL="0" indent="0" algn="l">
-              <a:spcAft>
-                <a:spcPts val="600"/>
-              </a:spcAft>
-              <a:buNone/>
-            </a:pPr>
-            <a:r>
-              <a:rPr sz="1300" b="0" i="0">
-                <a:solidFill>
-                  <a:srgbClr val="5F6770"/>
-                </a:solidFill>
-                <a:latin typeface="Arial"/>
-                <a:ea typeface="Microsoft JhengHei"/>
-              </a:rPr>
-              <a:t>Azure DI + AOAI</a:t>
-            </a:r>
-          </a:p>
-          <a:p>
-            <a:pPr marL="0" indent="0" algn="l">
-              <a:spcAft>
-                <a:spcPts val="0"/>
-              </a:spcAft>
-              <a:buNone/>
-            </a:pPr>
-            <a:r>
-              <a:rPr sz="1500" b="1" i="0">
-                <a:solidFill>
-                  <a:srgbClr val="D31145"/>
-                </a:solidFill>
-                <a:latin typeface="Arial"/>
-                <a:ea typeface="Microsoft JhengHei"/>
-              </a:rPr>
-              <a:t>88.2%, original prompt</a:t>
-            </a:r>
-          </a:p>
-        </p:txBody>
-      </p:sp>
-      <p:sp>
-        <p:nvSpPr>
-          <p:cNvPr id="19" name="Rectangle 18"/>
-          <p:cNvSpPr/>
-          <p:nvPr/>
-        </p:nvSpPr>
-        <p:spPr>
-          <a:xfrm>
-            <a:off x="3017520" y="3611880"/>
-            <a:ext cx="2560320" cy="1097280"/>
-          </a:xfrm>
-          <a:prstGeom prst="rect">
-            <a:avLst/>
-          </a:prstGeom>
-          <a:solidFill>
-            <a:srgbClr val="F2F2F2"/>
-          </a:solidFill>
-          <a:ln>
-            <a:noFill/>
-          </a:ln>
-        </p:spPr>
-        <p:txBody>
-          <a:bodyPr rtlCol="0" anchor="ctr" wrap="square" lIns="146304" rIns="146304" tIns="109728" bIns="109728"/>
-          <a:lstStyle/>
-          <a:p>
-            <a:pPr algn="l" marL="0" indent="0">
-              <a:spcAft>
-                <a:spcPts val="400"/>
-              </a:spcAft>
-              <a:buNone/>
-            </a:pPr>
-            <a:r>
-              <a:rPr sz="1600" b="1" i="0">
-                <a:solidFill>
-                  <a:srgbClr val="333D47"/>
-                </a:solidFill>
-                <a:latin typeface="Arial"/>
-                <a:ea typeface="Microsoft JhengHei"/>
-              </a:rPr>
-              <a:t>Read text (OCR)</a:t>
-            </a:r>
-          </a:p>
-          <a:p>
-            <a:pPr marL="0" indent="0" algn="l">
-              <a:spcAft>
-                <a:spcPts val="0"/>
-              </a:spcAft>
-              <a:buNone/>
-            </a:pPr>
-            <a:r>
-              <a:rPr sz="1250" b="0" i="0">
-                <a:solidFill>
-                  <a:srgbClr val="5F6770"/>
-                </a:solidFill>
-                <a:latin typeface="Arial"/>
-                <a:ea typeface="Microsoft JhengHei"/>
-              </a:rPr>
-              <a:t>Azure DI</a:t>
-            </a:r>
-          </a:p>
-        </p:txBody>
-      </p:sp>
-      <p:sp>
-        <p:nvSpPr>
-          <p:cNvPr id="20" name="Rectangle 19"/>
-          <p:cNvSpPr/>
-          <p:nvPr/>
-        </p:nvSpPr>
-        <p:spPr>
-          <a:xfrm>
-            <a:off x="6126479" y="3611880"/>
-            <a:ext cx="2560320" cy="1097280"/>
-          </a:xfrm>
-          <a:prstGeom prst="rect">
-            <a:avLst/>
-          </a:prstGeom>
-          <a:solidFill>
-            <a:srgbClr val="FFFFFF"/>
-          </a:solidFill>
-          <a:ln w="25400">
-            <a:solidFill>
-              <a:srgbClr val="D31145"/>
-            </a:solidFill>
-          </a:ln>
-        </p:spPr>
-        <p:txBody>
-          <a:bodyPr rtlCol="0" anchor="ctr" wrap="square" lIns="146304" rIns="146304" tIns="109728" bIns="109728"/>
-          <a:lstStyle/>
-          <a:p>
-            <a:pPr algn="l" marL="0" indent="0">
-              <a:spcAft>
-                <a:spcPts val="400"/>
-              </a:spcAft>
-              <a:buNone/>
-            </a:pPr>
-            <a:r>
-              <a:rPr sz="1600" b="1" i="0">
-                <a:solidFill>
-                  <a:srgbClr val="D31145"/>
-                </a:solidFill>
-                <a:latin typeface="Arial"/>
-                <a:ea typeface="Microsoft JhengHei"/>
-              </a:rPr>
-              <a:t>Azure OpenAI</a:t>
-            </a:r>
-          </a:p>
-          <a:p>
-            <a:pPr marL="0" indent="0" algn="l">
-              <a:spcAft>
-                <a:spcPts val="0"/>
-              </a:spcAft>
-              <a:buNone/>
-            </a:pPr>
-            <a:r>
-              <a:rPr sz="1250" b="0" i="0">
-                <a:solidFill>
-                  <a:srgbClr val="333D47"/>
-                </a:solidFill>
-                <a:latin typeface="Arial"/>
-                <a:ea typeface="Microsoft JhengHei"/>
-              </a:rPr>
-              <a:t>one prompt, written before these receipts</a:t>
-            </a:r>
-          </a:p>
-        </p:txBody>
-      </p:sp>
-      <p:sp>
-        <p:nvSpPr>
-          <p:cNvPr id="21" name="Right Arrow 20"/>
-          <p:cNvSpPr/>
-          <p:nvPr/>
-        </p:nvSpPr>
-        <p:spPr>
-          <a:xfrm>
-            <a:off x="5705855" y="4023359"/>
-            <a:ext cx="292607" cy="274320"/>
-          </a:xfrm>
-          <a:prstGeom prst="rightArrow">
-            <a:avLst/>
-          </a:prstGeom>
-          <a:solidFill>
-            <a:srgbClr val="5F6770"/>
-          </a:solidFill>
-          <a:ln>
-            <a:noFill/>
-          </a:ln>
-        </p:spPr>
-        <p:txBody>
-          <a:bodyPr rtlCol="0" anchor="ctr"/>
-          <a:lstStyle/>
-          <a:p>
-            <a:pPr algn="ctr"/>
-          </a:p>
-        </p:txBody>
-      </p:sp>
-      <p:sp>
-        <p:nvSpPr>
-          <p:cNvPr id="22" name="Rectangle 21"/>
-          <p:cNvSpPr/>
-          <p:nvPr/>
-        </p:nvSpPr>
-        <p:spPr>
-          <a:xfrm>
-            <a:off x="9235440" y="3611880"/>
-            <a:ext cx="2560320" cy="1097280"/>
-          </a:xfrm>
-          <a:prstGeom prst="rect">
-            <a:avLst/>
-          </a:prstGeom>
-          <a:solidFill>
-            <a:srgbClr val="F2F2F2"/>
-          </a:solidFill>
-          <a:ln>
-            <a:noFill/>
-          </a:ln>
-        </p:spPr>
-        <p:txBody>
-          <a:bodyPr rtlCol="0" anchor="ctr" wrap="square" lIns="146304" rIns="146304" tIns="109728" bIns="109728"/>
-          <a:lstStyle/>
-          <a:p>
-            <a:pPr algn="l" marL="0" indent="0">
-              <a:spcAft>
-                <a:spcPts val="400"/>
-              </a:spcAft>
-              <a:buNone/>
-            </a:pPr>
-            <a:r>
-              <a:rPr sz="1600" b="1" i="0">
-                <a:solidFill>
-                  <a:srgbClr val="333D47"/>
-                </a:solidFill>
-                <a:latin typeface="Arial"/>
-                <a:ea typeface="Microsoft JhengHei"/>
-              </a:rPr>
-              <a:t>6 fields</a:t>
-            </a:r>
-          </a:p>
-          <a:p>
-            <a:pPr marL="0" indent="0" algn="l">
-              <a:spcAft>
-                <a:spcPts val="0"/>
-              </a:spcAft>
-              <a:buNone/>
-            </a:pPr>
-            <a:r>
-              <a:rPr sz="1250" b="0" i="0">
-                <a:solidFill>
-                  <a:srgbClr val="5F6770"/>
-                </a:solidFill>
-                <a:latin typeface="Arial"/>
-                <a:ea typeface="Microsoft JhengHei"/>
-              </a:rPr>
-              <a:t>doctor, patient, total, …</a:t>
-            </a:r>
-          </a:p>
-        </p:txBody>
-      </p:sp>
-      <p:sp>
-        <p:nvSpPr>
-          <p:cNvPr id="23" name="Right Arrow 22"/>
-          <p:cNvSpPr/>
-          <p:nvPr/>
-        </p:nvSpPr>
-        <p:spPr>
-          <a:xfrm>
-            <a:off x="8814816" y="4023359"/>
-            <a:ext cx="292607" cy="274320"/>
-          </a:xfrm>
-          <a:prstGeom prst="rightArrow">
-            <a:avLst/>
-          </a:prstGeom>
-          <a:solidFill>
-            <a:srgbClr val="5F6770"/>
-          </a:solidFill>
-          <a:ln>
-            <a:noFill/>
-          </a:ln>
-        </p:spPr>
-        <p:txBody>
-          <a:bodyPr rtlCol="0" anchor="ctr"/>
-          <a:lstStyle/>
-          <a:p>
-            <a:pPr algn="ctr"/>
-          </a:p>
-        </p:txBody>
-      </p:sp>
-      <p:sp>
-        <p:nvSpPr>
-          <p:cNvPr id="24" name="Down Arrow 23"/>
-          <p:cNvSpPr/>
-          <p:nvPr/>
-        </p:nvSpPr>
-        <p:spPr>
-          <a:xfrm>
-            <a:off x="7223759" y="3017520"/>
-            <a:ext cx="365760" cy="502920"/>
-          </a:xfrm>
-          <a:prstGeom prst="downArrow">
-            <a:avLst/>
-          </a:prstGeom>
-          <a:solidFill>
-            <a:srgbClr val="D31145"/>
-          </a:solidFill>
-          <a:ln>
-            <a:noFill/>
-          </a:ln>
-        </p:spPr>
-        <p:txBody>
-          <a:bodyPr rtlCol="0" anchor="ctr"/>
-          <a:lstStyle/>
-          <a:p>
-            <a:pPr algn="ctr"/>
-          </a:p>
-        </p:txBody>
-      </p:sp>
-      <p:sp>
-        <p:nvSpPr>
-          <p:cNvPr id="25" name="TextBox 24"/>
-          <p:cNvSpPr txBox="1"/>
-          <p:nvPr/>
-        </p:nvSpPr>
-        <p:spPr>
-          <a:xfrm>
-            <a:off x="7726679" y="3081528"/>
-            <a:ext cx="2377440" cy="365760"/>
+            <a:off x="356616" y="5504688"/>
+            <a:ext cx="10972800" cy="320040"/>
           </a:xfrm>
           <a:prstGeom prst="rect">
             <a:avLst/>
@@ -9182,68 +9109,14 @@
               <a:buNone/>
             </a:pPr>
             <a:r>
-              <a:rPr sz="1400" b="0" i="1">
-                <a:solidFill>
-                  <a:srgbClr val="D31145"/>
+              <a:rPr sz="1100" b="0" i="1">
+                <a:solidFill>
+                  <a:srgbClr val="5F6770"/>
                 </a:solidFill>
                 <a:latin typeface="Arial"/>
                 <a:ea typeface="Microsoft JhengHei"/>
               </a:rPr>
-              <a:t>replaced by</a:t>
-            </a:r>
-          </a:p>
-        </p:txBody>
-      </p:sp>
-      <p:sp>
-        <p:nvSpPr>
-          <p:cNvPr id="26" name="Rectangle 25"/>
-          <p:cNvSpPr/>
-          <p:nvPr/>
-        </p:nvSpPr>
-        <p:spPr>
-          <a:xfrm>
-            <a:off x="356616" y="4983480"/>
-            <a:ext cx="11475720" cy="685800"/>
-          </a:xfrm>
-          <a:prstGeom prst="rect">
-            <a:avLst/>
-          </a:prstGeom>
-          <a:solidFill>
-            <a:srgbClr val="F2F2F2"/>
-          </a:solidFill>
-          <a:ln>
-            <a:noFill/>
-          </a:ln>
-        </p:spPr>
-        <p:txBody>
-          <a:bodyPr rtlCol="0" anchor="ctr" wrap="square" lIns="228600" rIns="228600" tIns="109728" bIns="109728"/>
-          <a:lstStyle/>
-          <a:p>
-            <a:pPr algn="l" marL="0" indent="0">
-              <a:spcAft>
-                <a:spcPts val="0"/>
-              </a:spcAft>
-              <a:buNone/>
-            </a:pPr>
-            <a:r>
-              <a:rPr sz="1600" b="1" i="0">
-                <a:solidFill>
-                  <a:srgbClr val="333D47"/>
-                </a:solidFill>
-                <a:latin typeface="Arial"/>
-                <a:ea typeface="Microsoft JhengHei"/>
-              </a:rPr>
-              <a:t>AOAI replaces the manual rule layer. </a:t>
-            </a:r>
-            <a:r>
-              <a:rPr sz="1500" b="0" i="0">
-                <a:solidFill>
-                  <a:srgbClr val="333D47"/>
-                </a:solidFill>
-                <a:latin typeface="Arial"/>
-                <a:ea typeface="Microsoft JhengHei"/>
-              </a:rPr>
-              <a:t>It still makes mistakes (6 of 51 fields wrong with the original prompt) and has not yet been tested on a large set of unseen receipts.</a:t>
+              <a:t>Development results: every change was made after reviewing these 9 receipts, so these scores are not independent validation.</a:t>
             </a:r>
           </a:p>
         </p:txBody>
@@ -10312,7 +10185,7 @@
                 <a:latin typeface="Arial"/>
                 <a:ea typeface="Microsoft JhengHei"/>
               </a:rPr>
-              <a:t>Each label wording was added by hand, one change broke a receipt, and the tuning did not carry over.</a:t>
+              <a:t>Each label wording was added by hand, and one change broke a receipt that was already correct.</a:t>
             </a:r>
           </a:p>
         </p:txBody>
@@ -10548,7 +10421,7 @@
                 <a:latin typeface="Arial"/>
                 <a:ea typeface="Microsoft JhengHei"/>
               </a:rPr>
-              <a:t>No gain</a:t>
+              <a:t>New layouts</a:t>
             </a:r>
           </a:p>
           <a:p>
@@ -10566,7 +10439,7 @@
                 <a:latin typeface="Arial"/>
                 <a:ea typeface="Microsoft JhengHei"/>
               </a:rPr>
-              <a:t>on 4 unseen receipts: the tuned rules scored the same as the original rules</a:t>
+              <a:t>will likely need more rule changes and a retest of every receipt</a:t>
             </a:r>
           </a:p>
         </p:txBody>
@@ -11897,7 +11770,7 @@
         </p:nvGraphicFramePr>
         <p:xfrm>
           <a:off x="356616" y="1783080"/>
-          <a:ext cx="11475720" cy="3621024"/>
+          <a:ext cx="11475720" cy="3383280"/>
         </p:xfrm>
         <a:graphic>
           <a:graphicData uri="http://schemas.openxmlformats.org/drawingml/2006/table">
@@ -12020,7 +11893,7 @@
                   </a:tcPr>
                 </a:tc>
               </a:tr>
-              <a:tr h="512064">
+              <a:tr h="566928">
                 <a:tc>
                   <a:txBody>
                     <a:bodyPr wrap="square"/>
@@ -12028,14 +11901,14 @@
                     <a:p>
                       <a:pPr algn="l"/>
                       <a:r>
-                        <a:rPr sz="1350" b="1" i="0">
+                        <a:rPr sz="1400" b="1" i="0">
                           <a:solidFill>
                             <a:srgbClr val="333D47"/>
                           </a:solidFill>
                           <a:latin typeface="Arial"/>
                           <a:ea typeface="Microsoft JhengHei"/>
                         </a:rPr>
-                        <a:t>Accuracy (9 receipts)</a:t>
+                        <a:t>Effort to improve</a:t>
                       </a:r>
                     </a:p>
                   </a:txBody>
@@ -12064,14 +11937,14 @@
                     <a:p>
                       <a:pPr algn="l"/>
                       <a:r>
-                        <a:rPr sz="1350" b="0" i="0">
+                        <a:rPr sz="1400" b="0" i="0">
                           <a:solidFill>
                             <a:srgbClr val="333D47"/>
                           </a:solidFill>
                           <a:latin typeface="Arial"/>
                           <a:ea typeface="Microsoft JhengHei"/>
                         </a:rPr>
-                        <a:t>Not a fair measure: rules tuned on these receipts</a:t>
+                        <a:t>Rules rewritten by hand after reviewing errors on these receipts</a:t>
                       </a:r>
                     </a:p>
                   </a:txBody>
@@ -12100,14 +11973,14 @@
                     <a:p>
                       <a:pPr algn="l"/>
                       <a:r>
-                        <a:rPr sz="1350" b="0" i="0">
+                        <a:rPr sz="1400" b="0" i="0">
                           <a:solidFill>
-                            <a:srgbClr val="D31145"/>
+                            <a:srgbClr val="333D47"/>
                           </a:solidFill>
                           <a:latin typeface="Arial"/>
                           <a:ea typeface="Microsoft JhengHei"/>
                         </a:rPr>
-                        <a:t>88.2% original prompt; 96.1% prompt v2 (development)</a:t>
+                        <a:t>One prompt revision after reviewing errors</a:t>
                       </a:r>
                     </a:p>
                   </a:txBody>
@@ -12130,7 +12003,7 @@
                   </a:tcPr>
                 </a:tc>
               </a:tr>
-              <a:tr h="512064">
+              <a:tr h="566928">
                 <a:tc>
                   <a:txBody>
                     <a:bodyPr wrap="square"/>
@@ -12138,14 +12011,14 @@
                     <a:p>
                       <a:pPr algn="l"/>
                       <a:r>
-                        <a:rPr sz="1350" b="1" i="0">
+                        <a:rPr sz="1400" b="1" i="0">
                           <a:solidFill>
                             <a:srgbClr val="333D47"/>
                           </a:solidFill>
                           <a:latin typeface="Arial"/>
                           <a:ea typeface="Microsoft JhengHei"/>
                         </a:rPr>
-                        <a:t>Effort to get there</a:t>
+                        <a:t>What a change looks like</a:t>
                       </a:r>
                     </a:p>
                   </a:txBody>
@@ -12174,14 +12047,14 @@
                     <a:p>
                       <a:pPr algn="l"/>
                       <a:r>
-                        <a:rPr sz="1350" b="0" i="0">
+                        <a:rPr sz="1400" b="0" i="0">
                           <a:solidFill>
                             <a:srgbClr val="333D47"/>
                           </a:solidFill>
                           <a:latin typeface="Arial"/>
                           <a:ea typeface="Microsoft JhengHei"/>
                         </a:rPr>
-                        <a:t>Rules rewritten by hand after reviewing errors on these receipts</a:t>
+                        <a:t>Code and label lists (69 → 225 phrases)</a:t>
                       </a:r>
                     </a:p>
                   </a:txBody>
@@ -12210,14 +12083,14 @@
                     <a:p>
                       <a:pPr algn="l"/>
                       <a:r>
-                        <a:rPr sz="1350" b="0" i="0">
+                        <a:rPr sz="1400" b="0" i="0">
                           <a:solidFill>
                             <a:srgbClr val="333D47"/>
                           </a:solidFill>
                           <a:latin typeface="Arial"/>
                           <a:ea typeface="Microsoft JhengHei"/>
                         </a:rPr>
-                        <a:t>None for the original prompt; one revision for prompt v2</a:t>
+                        <a:t>Prompt wording and a few general checks</a:t>
                       </a:r>
                     </a:p>
                   </a:txBody>
@@ -12240,7 +12113,7 @@
                   </a:tcPr>
                 </a:tc>
               </a:tr>
-              <a:tr h="512064">
+              <a:tr h="566928">
                 <a:tc>
                   <a:txBody>
                     <a:bodyPr wrap="square"/>
@@ -12248,14 +12121,14 @@
                     <a:p>
                       <a:pPr algn="l"/>
                       <a:r>
-                        <a:rPr sz="1350" b="1" i="0">
+                        <a:rPr sz="1400" b="1" i="0">
                           <a:solidFill>
                             <a:srgbClr val="333D47"/>
                           </a:solidFill>
                           <a:latin typeface="Arial"/>
                           <a:ea typeface="Microsoft JhengHei"/>
                         </a:rPr>
-                        <a:t>Extraction logic</a:t>
+                        <a:t>Side effects seen</a:t>
                       </a:r>
                     </a:p>
                   </a:txBody>
@@ -12284,14 +12157,14 @@
                     <a:p>
                       <a:pPr algn="l"/>
                       <a:r>
-                        <a:rPr sz="1350" b="0" i="0">
+                        <a:rPr sz="1400" b="0" i="0">
                           <a:solidFill>
                             <a:srgbClr val="333D47"/>
                           </a:solidFill>
                           <a:latin typeface="Arial"/>
                           <a:ea typeface="Microsoft JhengHei"/>
                         </a:rPr>
-                        <a:t>69 → 225 label phrases to maintain</a:t>
+                        <a:t>1 correct field broken by the rule changes</a:t>
                       </a:r>
                     </a:p>
                   </a:txBody>
@@ -12320,14 +12193,14 @@
                     <a:p>
                       <a:pPr algn="l"/>
                       <a:r>
-                        <a:rPr sz="1350" b="0" i="0">
+                        <a:rPr sz="1400" b="0" i="0">
                           <a:solidFill>
                             <a:srgbClr val="333D47"/>
                           </a:solidFill>
                           <a:latin typeface="Arial"/>
                           <a:ea typeface="Microsoft JhengHei"/>
                         </a:rPr>
-                        <a:t>One prompt and a few general checks</a:t>
+                        <a:t>0 correct fields broken by the prompt revision</a:t>
                       </a:r>
                     </a:p>
                   </a:txBody>
@@ -12350,7 +12223,7 @@
                   </a:tcPr>
                 </a:tc>
               </a:tr>
-              <a:tr h="512064">
+              <a:tr h="566928">
                 <a:tc>
                   <a:txBody>
                     <a:bodyPr wrap="square"/>
@@ -12358,14 +12231,14 @@
                     <a:p>
                       <a:pPr algn="l"/>
                       <a:r>
-                        <a:rPr sz="1350" b="1" i="0">
+                        <a:rPr sz="1400" b="1" i="0">
                           <a:solidFill>
                             <a:srgbClr val="333D47"/>
                           </a:solidFill>
                           <a:latin typeface="Arial"/>
                           <a:ea typeface="Microsoft JhengHei"/>
                         </a:rPr>
-                        <a:t>Unseen receipts</a:t>
+                        <a:t>New receipt layouts</a:t>
                       </a:r>
                     </a:p>
                   </a:txBody>
@@ -12394,14 +12267,14 @@
                     <a:p>
                       <a:pPr algn="l"/>
                       <a:r>
-                        <a:rPr sz="1350" b="0" i="0">
+                        <a:rPr sz="1400" b="0" i="0">
                           <a:solidFill>
                             <a:srgbClr val="333D47"/>
                           </a:solidFill>
                           <a:latin typeface="Arial"/>
                           <a:ea typeface="Microsoft JhengHei"/>
                         </a:rPr>
-                        <a:t>Tuning gave no gain (4 receipts)</a:t>
+                        <a:t>Likely more rule updates and a regression test of every receipt</a:t>
                       </a:r>
                     </a:p>
                   </a:txBody>
@@ -12430,14 +12303,14 @@
                     <a:p>
                       <a:pPr algn="l"/>
                       <a:r>
-                        <a:rPr sz="1350" b="0" i="0">
+                        <a:rPr sz="1400" b="0" i="0">
                           <a:solidFill>
                             <a:srgbClr val="333D47"/>
                           </a:solidFill>
                           <a:latin typeface="Arial"/>
                           <a:ea typeface="Microsoft JhengHei"/>
                         </a:rPr>
-                        <a:t>Prompt v2 gave no gain (6 receipts)</a:t>
+                        <a:t>Possibly no change; not yet tested</a:t>
                       </a:r>
                     </a:p>
                   </a:txBody>
@@ -12460,7 +12333,7 @@
                   </a:tcPr>
                 </a:tc>
               </a:tr>
-              <a:tr h="512064">
+              <a:tr h="566928">
                 <a:tc>
                   <a:txBody>
                     <a:bodyPr wrap="square"/>
@@ -12468,14 +12341,14 @@
                     <a:p>
                       <a:pPr algn="l"/>
                       <a:r>
-                        <a:rPr sz="1350" b="1" i="0">
+                        <a:rPr sz="1400" b="1" i="0">
                           <a:solidFill>
                             <a:srgbClr val="333D47"/>
                           </a:solidFill>
                           <a:latin typeface="Arial"/>
                           <a:ea typeface="Microsoft JhengHei"/>
                         </a:rPr>
-                        <a:t>Errors seen</a:t>
+                        <a:t>Time and running cost</a:t>
                       </a:r>
                     </a:p>
                   </a:txBody>
@@ -12504,14 +12377,14 @@
                     <a:p>
                       <a:pPr algn="l"/>
                       <a:r>
-                        <a:rPr sz="1350" b="0" i="0">
+                        <a:rPr sz="1400" b="0" i="0">
                           <a:solidFill>
                             <a:srgbClr val="333D47"/>
                           </a:solidFill>
                           <a:latin typeface="Arial"/>
                           <a:ea typeface="Microsoft JhengHei"/>
                         </a:rPr>
-                        <a:t>A rule change broke a receipt that was already correct</a:t>
+                        <a:t>13.9 s, own compute, no API fee</a:t>
                       </a:r>
                     </a:p>
                   </a:txBody>
@@ -12540,117 +12413,7 @@
                     <a:p>
                       <a:pPr algn="l"/>
                       <a:r>
-                        <a:rPr sz="1350" b="0" i="0">
-                          <a:solidFill>
-                            <a:srgbClr val="333D47"/>
-                          </a:solidFill>
-                          <a:latin typeface="Arial"/>
-                          <a:ea typeface="Microsoft JhengHei"/>
-                        </a:rPr>
-                        <a:t>6 of 51 fields wrong (original prompt), e.g. a total</a:t>
-                      </a:r>
-                    </a:p>
-                  </a:txBody>
-                  <a:tcPr marL="91440" marR="91440" marT="45720" marB="45720" anchor="ctr">
-                    <a:lnL w="0">
-                      <a:noFill/>
-                    </a:lnL>
-                    <a:lnR w="0">
-                      <a:noFill/>
-                    </a:lnR>
-                    <a:lnT w="0">
-                      <a:noFill/>
-                    </a:lnT>
-                    <a:lnB w="9525" cmpd="sng">
-                      <a:solidFill>
-                        <a:srgbClr val="BFBFBF"/>
-                      </a:solidFill>
-                    </a:lnB>
-                    <a:noFill/>
-                  </a:tcPr>
-                </a:tc>
-              </a:tr>
-              <a:tr h="512064">
-                <a:tc>
-                  <a:txBody>
-                    <a:bodyPr wrap="square"/>
-                    <a:lstStyle/>
-                    <a:p>
-                      <a:pPr algn="l"/>
-                      <a:r>
-                        <a:rPr sz="1350" b="1" i="0">
-                          <a:solidFill>
-                            <a:srgbClr val="333D47"/>
-                          </a:solidFill>
-                          <a:latin typeface="Arial"/>
-                          <a:ea typeface="Microsoft JhengHei"/>
-                        </a:rPr>
-                        <a:t>Time and running cost</a:t>
-                      </a:r>
-                    </a:p>
-                  </a:txBody>
-                  <a:tcPr marL="91440" marR="91440" marT="45720" marB="45720" anchor="ctr">
-                    <a:lnL w="0">
-                      <a:noFill/>
-                    </a:lnL>
-                    <a:lnR w="0">
-                      <a:noFill/>
-                    </a:lnR>
-                    <a:lnT w="0">
-                      <a:noFill/>
-                    </a:lnT>
-                    <a:lnB w="9525" cmpd="sng">
-                      <a:solidFill>
-                        <a:srgbClr val="BFBFBF"/>
-                      </a:solidFill>
-                    </a:lnB>
-                    <a:noFill/>
-                  </a:tcPr>
-                </a:tc>
-                <a:tc>
-                  <a:txBody>
-                    <a:bodyPr wrap="square"/>
-                    <a:lstStyle/>
-                    <a:p>
-                      <a:pPr algn="l"/>
-                      <a:r>
-                        <a:rPr sz="1350" b="0" i="0">
-                          <a:solidFill>
-                            <a:srgbClr val="333D47"/>
-                          </a:solidFill>
-                          <a:latin typeface="Arial"/>
-                          <a:ea typeface="Microsoft JhengHei"/>
-                        </a:rPr>
-                        <a:t>13.9 s, own compute, no API fee</a:t>
-                      </a:r>
-                    </a:p>
-                  </a:txBody>
-                  <a:tcPr marL="91440" marR="91440" marT="45720" marB="45720" anchor="ctr">
-                    <a:lnL w="0">
-                      <a:noFill/>
-                    </a:lnL>
-                    <a:lnR w="0">
-                      <a:noFill/>
-                    </a:lnR>
-                    <a:lnT w="0">
-                      <a:noFill/>
-                    </a:lnT>
-                    <a:lnB w="9525" cmpd="sng">
-                      <a:solidFill>
-                        <a:srgbClr val="BFBFBF"/>
-                      </a:solidFill>
-                    </a:lnB>
-                    <a:noFill/>
-                  </a:tcPr>
-                </a:tc>
-                <a:tc>
-                  <a:txBody>
-                    <a:bodyPr wrap="square"/>
-                    <a:lstStyle/>
-                    <a:p>
-                      <a:pPr algn="l"/>
-                      <a:r>
-                        <a:rPr sz="1350" b="0" i="0">
+                        <a:rPr sz="1400" b="0" i="0">
                           <a:solidFill>
                             <a:srgbClr val="333D47"/>
                           </a:solidFill>
@@ -12692,7 +12455,7 @@
         </p:nvSpPr>
         <p:spPr>
           <a:xfrm>
-            <a:off x="356616" y="5440680"/>
+            <a:off x="356616" y="5349240"/>
             <a:ext cx="10972800" cy="320040"/>
           </a:xfrm>
           <a:prstGeom prst="rect">
@@ -13171,7 +12934,7 @@
                 <a:latin typeface="Arial"/>
                 <a:ea typeface="Microsoft JhengHei"/>
               </a:rPr>
-              <a:t>69 → 225 label phrases; no gain on unseen receipts.</a:t>
+              <a:t>69 → 225 label phrases added by hand.</a:t>
             </a:r>
           </a:p>
         </p:txBody>
@@ -13327,7 +13090,7 @@
                 <a:latin typeface="Arial"/>
                 <a:ea typeface="Microsoft JhengHei"/>
               </a:rPr>
-              <a:t>88.2% with a prompt written before these receipts.</a:t>
+              <a:t>highest accuracy before any tuning on these receipts.</a:t>
             </a:r>
           </a:p>
           <a:p>
@@ -13448,7 +13211,7 @@
                 <a:latin typeface="Arial"/>
                 <a:ea typeface="Microsoft JhengHei"/>
               </a:rPr>
-              <a:t>still wrong on 6 of 51 fields, e.g. a total.</a:t>
+              <a:t>still makes mistakes, e.g. a sub total taken as the total.</a:t>
             </a:r>
           </a:p>
           <a:p>

--- a/ppt/ocr_benchmark/current/OCR_Benchmark_V3.pptx
+++ b/ppt/ocr_benchmark/current/OCR_Benchmark_V3.pptx
@@ -21,6 +21,8 @@
     <p:sldId id="263" r:id="rId15"/>
     <p:sldId id="264" r:id="rId16"/>
     <p:sldId id="265" r:id="rId17"/>
+    <p:sldId id="266" r:id="rId18"/>
+    <p:sldId id="267" r:id="rId19"/>
   </p:sldIdLst>
   <p:sldSz cx="12192000" cy="6858000"/>
   <p:notesSz cx="6858000" cy="9144000"/>
@@ -772,6 +774,146 @@
           <a:lstStyle/>
           <a:p>
             <a:r>
+              <a:t>Effort: the rules were rewritten by hand after reviewing the errors on these receipts (label phrases 69 to 225); the AOAI prompt was revised once. Side effects on these receipts: the rule changes broke 1 correct field on PaddleOCR Light text, the prompt revision broke 0. Lower maintenance for AOAI on new layouts is the key implication of this benchmark, not a result proven in production. Running cost: DI page plus about 602 input / 263 output gpt-5-mini tokens per receipt (original prompt); prices are not yet confirmed. Source: python/receipt_ocr_benchmark/results/v2/scores_improved and scores_aoai_improved (summary.csv, detail.csv), results/v1_heldout, and extraction JSON.</a:t>
+            </a:r>
+          </a:p>
+        </p:txBody>
+      </p:sp>
+      <p:sp>
+        <p:nvSpPr>
+          <p:cNvPr id="4" name="Slide Number Placeholder 3"/>
+          <p:cNvSpPr>
+            <a:spLocks noGrp="1"/>
+          </p:cNvSpPr>
+          <p:nvPr>
+            <p:ph type="sldNum" idx="5" sz="quarter"/>
+          </p:nvPr>
+        </p:nvSpPr>
+        <p:spPr/>
+      </p:sp>
+    </p:spTree>
+  </p:cSld>
+  <p:clrMapOvr>
+    <a:masterClrMapping/>
+  </p:clrMapOvr>
+</p:notes>
+</file>
+
+<file path=ppt/notesSlides/notesSlide11.xml><?xml version="1.0" encoding="utf-8"?>
+<p:notes xmlns:a="http://schemas.openxmlformats.org/drawingml/2006/main" xmlns:p="http://schemas.openxmlformats.org/presentationml/2006/main" xmlns:r="http://schemas.openxmlformats.org/officeDocument/2006/relationships">
+  <p:cSld>
+    <p:spTree>
+      <p:nvGrpSpPr>
+        <p:cNvPr id="1" name=""/>
+        <p:cNvGrpSpPr/>
+        <p:nvPr/>
+      </p:nvGrpSpPr>
+      <p:grpSpPr>
+        <a:xfrm>
+          <a:off x="0" y="0"/>
+          <a:ext cx="0" cy="0"/>
+          <a:chOff x="0" y="0"/>
+          <a:chExt cx="0" cy="0"/>
+        </a:xfrm>
+      </p:grpSpPr>
+      <p:sp>
+        <p:nvSpPr>
+          <p:cNvPr id="2" name="Slide Image Placeholder 1"/>
+          <p:cNvSpPr>
+            <a:spLocks noGrp="1"/>
+          </p:cNvSpPr>
+          <p:nvPr>
+            <p:ph type="sldImg" idx="2"/>
+          </p:nvPr>
+        </p:nvSpPr>
+        <p:spPr/>
+      </p:sp>
+      <p:sp>
+        <p:nvSpPr>
+          <p:cNvPr id="3" name="Notes Placeholder 2"/>
+          <p:cNvSpPr>
+            <a:spLocks noGrp="1"/>
+          </p:cNvSpPr>
+          <p:nvPr>
+            <p:ph type="body" idx="3" sz="quarter"/>
+          </p:nvPr>
+        </p:nvSpPr>
+        <p:spPr/>
+        <p:txBody>
+          <a:bodyPr/>
+          <a:lstStyle/>
+          <a:p>
+            <a:r>
+              <a:t>Measured: rules grew from 69 to 225 label phrases while being tuned on these 9 receipts; vet invoice receipt number 369303 correct before tuning, 380048 after. Azure DI + AOAI had the highest accuracy before any tuning; it still made mistakes, e.g. vet invoice total 1361.5 although the Azure DI text contains the correct 1361.00; 6.2 s vs 13.9 s per receipt. Expected, not measured: that new formats need rule updates, that AOAI needs less rule maintenance, control, API fees and the upkeep AOAI still needs (validation, monitoring, prompt). AOAI is not maintenance free. Prices are not yet confirmed. Source: python/receipt_ocr_benchmark/results/v2/scores_improved and scores_aoai_improved (summary.csv, detail.csv), results/v1_heldout, and extraction JSON.</a:t>
+            </a:r>
+          </a:p>
+        </p:txBody>
+      </p:sp>
+      <p:sp>
+        <p:nvSpPr>
+          <p:cNvPr id="4" name="Slide Number Placeholder 3"/>
+          <p:cNvSpPr>
+            <a:spLocks noGrp="1"/>
+          </p:cNvSpPr>
+          <p:nvPr>
+            <p:ph type="sldNum" idx="5" sz="quarter"/>
+          </p:nvPr>
+        </p:nvSpPr>
+        <p:spPr/>
+      </p:sp>
+    </p:spTree>
+  </p:cSld>
+  <p:clrMapOvr>
+    <a:masterClrMapping/>
+  </p:clrMapOvr>
+</p:notes>
+</file>
+
+<file path=ppt/notesSlides/notesSlide12.xml><?xml version="1.0" encoding="utf-8"?>
+<p:notes xmlns:a="http://schemas.openxmlformats.org/drawingml/2006/main" xmlns:p="http://schemas.openxmlformats.org/presentationml/2006/main" xmlns:r="http://schemas.openxmlformats.org/officeDocument/2006/relationships">
+  <p:cSld>
+    <p:spTree>
+      <p:nvGrpSpPr>
+        <p:cNvPr id="1" name=""/>
+        <p:cNvGrpSpPr/>
+        <p:nvPr/>
+      </p:nvGrpSpPr>
+      <p:grpSpPr>
+        <a:xfrm>
+          <a:off x="0" y="0"/>
+          <a:ext cx="0" cy="0"/>
+          <a:chOff x="0" y="0"/>
+          <a:chExt cx="0" cy="0"/>
+        </a:xfrm>
+      </p:grpSpPr>
+      <p:sp>
+        <p:nvSpPr>
+          <p:cNvPr id="2" name="Slide Image Placeholder 1"/>
+          <p:cNvSpPr>
+            <a:spLocks noGrp="1"/>
+          </p:cNvSpPr>
+          <p:nvPr>
+            <p:ph type="sldImg" idx="2"/>
+          </p:nvPr>
+        </p:nvSpPr>
+        <p:spPr/>
+      </p:sp>
+      <p:sp>
+        <p:nvSpPr>
+          <p:cNvPr id="3" name="Notes Placeholder 2"/>
+          <p:cNvSpPr>
+            <a:spLocks noGrp="1"/>
+          </p:cNvSpPr>
+          <p:nvPr>
+            <p:ph type="body" idx="3" sz="quarter"/>
+          </p:nvPr>
+        </p:nvSpPr>
+        <p:spPr/>
+        <p:txBody>
+          <a:bodyPr/>
+          <a:lstStyle/>
+          <a:p>
+            <a:r>
               <a:t>Initial implementations: Azure DI + AOAI 88.2%, rules 37.3% and 41.2%, the gap mostly from missing Chinese support in the rules. After reviewing these receipts: rules 88.2% and 86.3%, AOAI prompt v2 96.1%, all development results. The benchmark is small (9 receipts), so this is not a production decision. A small held-out check on Version 1 receipts (4-6 receipts, mostly handwritten) is too small to say whether either approach generalises better, so it is not shown on the slides. Source: python/receipt_ocr_benchmark/results/v2/scores_improved and scores_aoai_improved (summary.csv, detail.csv), results/v1_heldout, and extraction JSON.</a:t>
             </a:r>
           </a:p>
@@ -982,7 +1124,7 @@
           <a:lstStyle/>
           <a:p>
             <a:r>
-              <a:t>All changes were made after reviewing the errors on these 9 receipts, so the scores are development results, not independent validation. Rules: rewritten by hand (label phrases 69 to 225: Chinese and bilingual labels, distractor labels, layout handling); on PaddleOCR Light text this fixed 27 fields and broke 1, on Azure DI text it fixed 24 and broke 1. AOAI: prompt v2 with clearer field definitions, DI text grouped into page rows and a few general checks; it fixed 4 fields and broke 0. A small held-out check on Version 1 receipts (4-6 receipts, mostly handwritten) is too small to say whether either approach generalises better, so it is not shown on the slides. Source: python/receipt_ocr_benchmark/results/v2/scores_improved and scores_aoai_improved (summary.csv, detail.csv), results/v1_heldout, and extraction JSON.</a:t>
+              <a:t>All changes were made after reviewing the errors on these 9 receipts, so the scores are development results, not independent validation. Rules: rewritten by hand (label phrases 69 to 225: Chinese and bilingual labels, distractor labels, layout handling); on PaddleOCR Light text this fixed 27 fields and broke 1, on Azure DI text it fixed 24 and broke 1. AOAI: prompt v2 with clearer field definitions fixed 4 fields and broke 0. The row layout and Python checks added at the same time changed no result (see the prompt v2 slide). A small held-out check on Version 1 receipts (4-6 receipts, mostly handwritten) is too small to say whether either approach generalises better, so it is not shown on the slides. Source: python/receipt_ocr_benchmark/results/v2/scores_improved and scores_aoai_improved (summary.csv, detail.csv), results/v1_heldout, and extraction JSON.</a:t>
             </a:r>
           </a:p>
         </p:txBody>
@@ -1052,7 +1194,7 @@
           <a:lstStyle/>
           <a:p>
             <a:r>
-              <a:t>Receipt 8 (medical centre). Both OCR engines read the patient name and the doctor's name (checked in the raw OCR). The original rules matched 'Patient' and took the Chinese half of the label, 病人, as the name. The improved rules needed bilingual labels added by hand. AOAI, with its original prompt, read the fields correctly (6 of 6 fields on this receipt). Values: rules on PaddleOCR Light text; detail.csv, checked against the extraction JSON. Source: python/receipt_ocr_benchmark/results/v2/scores_improved and scores_aoai_improved (summary.csv, detail.csv), results/v1_heldout, and extraction JSON.</a:t>
+              <a:t>Development results after tuning on these 9 receipts, not independent validation. Counts from results/v2/scores_aoai_improved/detail.csv, checked against the per-field percentages in summary.csv. Registration number is printed on 6 of the 9 receipts, so it has 6 applicable receipts; every other field has 9. All three approaches miss the vet invoice's doctor (two practitioners, and the OCR misread the signature) and the pharmacy receipt's service date (print date vs item date, an open ground-truth question). The rules also miss patient and receipt number on the vet invoice and the pharmacy receipt (an OCR artefact on the label, a payment receipt number, no labels); Azure DI + rules also misses one total. Source: python/receipt_ocr_benchmark/results/v2/scores_improved and scores_aoai_improved (summary.csv, detail.csv), results/v1_heldout, and extraction JSON.</a:t>
             </a:r>
           </a:p>
         </p:txBody>
@@ -1122,7 +1264,7 @@
           <a:lstStyle/>
           <a:p>
             <a:r>
-              <a:t>Receipt 4 (Chinese medicine): the OCR read every value, but the original rules only knew English labels (0 of 6 fields). After adding Chinese labels by hand: 6 of 6. DI + AOAI with its original prompt: 6 of 6. The label vocabulary grew from 69 to 225 phrases (counted in extraction_general.py and extraction_improved.py). On the vet invoice (receipt 9) the original rules found receipt number 369303; after the changes they return 380048. Whether AOAI needs less maintenance on new layouts has not been tested yet. Source: python/receipt_ocr_benchmark/results/v2/scores_improved and scores_aoai_improved (summary.csv, detail.csv), results/v1_heldout, and extraction JSON.</a:t>
+              <a:t>Original prompt 88.2% (45/51); prompt v2 96.1% (49/51), a development result because prompt v2 was written after reviewing these errors. The four fixes are in the model's own reply (before any Python check) in all three prompt v2 runs. Credit: prompt wording only. The Python checks changed 0 values; plain-text OCR input (49/51) scores the same as the row layout (49/51); attaching the photo also scores 49/51. Remaining errors: the vet invoice doctor (two practitioners; OCR misread the signature) and the pharmacy service date (open ground-truth question). Prompt text: receipt_bench/di_aoai.py (SYSTEM_PROMPT and SYSTEM_PROMPT_V2, commit 034d7d5). Source: python/receipt_ocr_benchmark/results/v2/scores_improved and scores_aoai_improved (summary.csv, detail.csv), results/v1_heldout, and extraction JSON.</a:t>
             </a:r>
           </a:p>
         </p:txBody>
@@ -1192,7 +1334,7 @@
           <a:lstStyle/>
           <a:p>
             <a:r>
-              <a:t>Receipt 9 (vet invoice). The improved rules now take the payment table's 'Receipt #' (380048) instead of the invoice number. Both OCR engines read 'FPatient:' (a stray mark merged into the label), so no rule matched the patient label; AOAI still found the name. AOAI with the original prompt chose the sub total (1361.50) instead of the total (1361.00). Prompt v2 returns the correct total, but it was written after reviewing this error. Values: detail.csv, checked against the extraction JSON. Source: python/receipt_ocr_benchmark/results/v2/scores_improved and scores_aoai_improved (summary.csv, detail.csv), results/v1_heldout, and extraction JSON.</a:t>
+              <a:t>Receipt 8 (medical centre). Both OCR engines read the patient name and the doctor's name (checked in the raw OCR). The original rules matched 'Patient' and took the Chinese half of the label, 病人, as the name. The improved rules needed bilingual labels added by hand. AOAI, with its original prompt, read the fields correctly (6 of 6 fields on this receipt). Values: rules on PaddleOCR Light text; detail.csv, checked against the extraction JSON. Source: python/receipt_ocr_benchmark/results/v2/scores_improved and scores_aoai_improved (summary.csv, detail.csv), results/v1_heldout, and extraction JSON.</a:t>
             </a:r>
           </a:p>
         </p:txBody>
@@ -1262,7 +1404,7 @@
           <a:lstStyle/>
           <a:p>
             <a:r>
-              <a:t>Effort: the rules were rewritten by hand after reviewing the errors on these receipts (label phrases 69 to 225); the AOAI prompt was revised once. Side effects on these receipts: the rule changes broke 1 correct field on PaddleOCR Light text, the prompt revision broke 0. Lower maintenance for AOAI on new layouts is the key implication of this benchmark, not a result proven in production. Running cost: DI page plus about 602 input / 263 output gpt-5-mini tokens per receipt (original prompt); prices are not yet confirmed. Source: python/receipt_ocr_benchmark/results/v2/scores_improved and scores_aoai_improved (summary.csv, detail.csv), results/v1_heldout, and extraction JSON.</a:t>
+              <a:t>Receipt 4 (Chinese medicine): the OCR read every value, but the original rules only knew English labels (0 of 6 fields). After adding Chinese labels by hand: 6 of 6. DI + AOAI with its original prompt: 6 of 6. The label vocabulary grew from 69 to 225 phrases (counted in extraction_general.py and extraction_improved.py). On the vet invoice (receipt 9) the original rules found receipt number 369303; after the changes they return 380048. Whether AOAI needs less maintenance on new layouts has not been tested yet. Source: python/receipt_ocr_benchmark/results/v2/scores_improved and scores_aoai_improved (summary.csv, detail.csv), results/v1_heldout, and extraction JSON.</a:t>
             </a:r>
           </a:p>
         </p:txBody>
@@ -1332,7 +1474,7 @@
           <a:lstStyle/>
           <a:p>
             <a:r>
-              <a:t>Measured: rules grew from 69 to 225 label phrases while being tuned on these 9 receipts; vet invoice receipt number 369303 correct before tuning, 380048 after. Azure DI + AOAI had the highest accuracy before any tuning; it still made mistakes, e.g. vet invoice total 1361.5 although the Azure DI text contains the correct 1361.00; 6.2 s vs 13.9 s per receipt. Expected, not measured: that new formats need rule updates, that AOAI needs less rule maintenance, control, API fees and the upkeep AOAI still needs (validation, monitoring, prompt). AOAI is not maintenance free. Prices are not yet confirmed. Source: python/receipt_ocr_benchmark/results/v2/scores_improved and scores_aoai_improved (summary.csv, detail.csv), results/v1_heldout, and extraction JSON.</a:t>
+              <a:t>Receipt 9 (vet invoice). The improved rules now take the payment table's 'Receipt #' (380048) instead of the invoice number. Both OCR engines read 'FPatient:' (a stray mark merged into the label), so no rule matched the patient label; AOAI still found the name. AOAI with the original prompt chose the sub total (1361.50) instead of the total (1361.00). Prompt v2 returns the correct total, but it was written after reviewing this error. Values: detail.csv, checked against the extraction JSON. Source: python/receipt_ocr_benchmark/results/v2/scores_improved and scores_aoai_improved (summary.csv, detail.csv), results/v1_heldout, and extraction JSON.</a:t>
             </a:r>
           </a:p>
         </p:txBody>
@@ -6081,6 +6223,1692 @@
                 <a:latin typeface="Arial"/>
                 <a:ea typeface="Microsoft JhengHei"/>
               </a:rPr>
+              <a:t>Development Effort and Maintenance</a:t>
+            </a:r>
+          </a:p>
+        </p:txBody>
+      </p:sp>
+      <p:sp>
+        <p:nvSpPr>
+          <p:cNvPr id="10" name="Slide Number Placeholder 5">
+            <a:extLst>
+              <a:ext uri="{FF2B5EF4-FFF2-40B4-BE49-F238E27FC236}">
+                <a16:creationId xmlns:a16="http://schemas.microsoft.com/office/drawing/2014/main" id="{3E493E1F-F28C-FD47-B996-3EBF17D328AE}"/>
+              </a:ext>
+            </a:extLst>
+          </p:cNvPr>
+          <p:cNvSpPr>
+            <a:spLocks noGrp="1"/>
+          </p:cNvSpPr>
+          <p:nvPr>
+            <p:ph type="sldNum" sz="quarter" idx="4"/>
+          </p:nvPr>
+        </p:nvSpPr>
+        <p:spPr>
+          <a:xfrm>
+            <a:off x="359999" y="6264872"/>
+            <a:ext cx="360000" cy="360000"/>
+          </a:xfrm>
+          <a:prstGeom prst="rect">
+            <a:avLst/>
+          </a:prstGeom>
+        </p:spPr>
+        <p:txBody>
+          <a:bodyPr vert="horz" lIns="91440" tIns="45720" rIns="91440" bIns="45720" rtlCol="0" anchor="ctr"/>
+          <a:lstStyle>
+            <a:lvl1pPr algn="l">
+              <a:defRPr sz="800" b="0" i="0">
+                <a:solidFill>
+                  <a:schemeClr val="tx1"/>
+                </a:solidFill>
+                <a:latin typeface="Arial" panose="020B0604020202020204" pitchFamily="34" charset="0"/>
+                <a:cs typeface="Arial" panose="020B0604020202020204" pitchFamily="34" charset="0"/>
+              </a:defRPr>
+            </a:lvl1pPr>
+          </a:lstStyle>
+          <a:p>
+            <a:fld id="{18A41853-EF22-D446-BDBC-A7CF3FE93503}" type="slidenum">
+              <a:rPr lang="en-US" smtClean="0"/>
+              <a:pPr/>
+              <a:t>‹#›</a:t>
+            </a:fld>
+            <a:endParaRPr lang="en-US" dirty="0"/>
+          </a:p>
+        </p:txBody>
+      </p:sp>
+      <p:sp>
+        <p:nvSpPr>
+          <p:cNvPr id="11" name="TextBox 10"/>
+          <p:cNvSpPr txBox="1"/>
+          <p:nvPr/>
+        </p:nvSpPr>
+        <p:spPr>
+          <a:xfrm>
+            <a:off x="356616" y="1115568"/>
+            <a:ext cx="11475720" cy="457200"/>
+          </a:xfrm>
+          <a:prstGeom prst="rect">
+            <a:avLst/>
+          </a:prstGeom>
+          <a:noFill/>
+        </p:spPr>
+        <p:txBody>
+          <a:bodyPr wrap="square" lIns="0" rIns="0" tIns="0" bIns="0" anchor="t"/>
+          <a:lstStyle/>
+          <a:p>
+            <a:pPr marL="0" indent="0" algn="l">
+              <a:spcAft>
+                <a:spcPts val="0"/>
+              </a:spcAft>
+              <a:buNone/>
+            </a:pPr>
+            <a:r>
+              <a:rPr sz="1700" b="0" i="0">
+                <a:solidFill>
+                  <a:srgbClr val="D31145"/>
+                </a:solidFill>
+                <a:latin typeface="Arial"/>
+                <a:ea typeface="Microsoft JhengHei"/>
+              </a:rPr>
+              <a:t>The difference is the manual work to handle each layout, and to keep it working.</a:t>
+            </a:r>
+          </a:p>
+        </p:txBody>
+      </p:sp>
+      <p:graphicFrame>
+        <p:nvGraphicFramePr>
+          <p:cNvPr id="12" name="Table 11"/>
+          <p:cNvGraphicFramePr>
+            <a:graphicFrameLocks noGrp="1"/>
+          </p:cNvGraphicFramePr>
+          <p:nvPr/>
+        </p:nvGraphicFramePr>
+        <p:xfrm>
+          <a:off x="356616" y="1783080"/>
+          <a:ext cx="11475720" cy="3383280"/>
+        </p:xfrm>
+        <a:graphic>
+          <a:graphicData uri="http://schemas.openxmlformats.org/drawingml/2006/table">
+            <a:tbl>
+              <a:tblPr firstRow="0" bandRow="0">
+                <a:tableStyleId>{2D5ABB26-0587-4C30-8999-92F81FD0307C}</a:tableStyleId>
+              </a:tblPr>
+              <a:tblGrid>
+                <a:gridCol w="2743200"/>
+                <a:gridCol w="4343400"/>
+                <a:gridCol w="4389120"/>
+              </a:tblGrid>
+              <a:tr h="548640">
+                <a:tc>
+                  <a:txBody>
+                    <a:bodyPr wrap="square"/>
+                    <a:lstStyle/>
+                    <a:p>
+                      <a:pPr algn="l"/>
+                      <a:r>
+                        <a:rPr sz="1500" b="1" i="0">
+                          <a:solidFill>
+                            <a:srgbClr val="FFFFFF"/>
+                          </a:solidFill>
+                          <a:latin typeface="Arial"/>
+                          <a:ea typeface="Microsoft JhengHei"/>
+                        </a:rPr>
+                        <a:t/>
+                      </a:r>
+                    </a:p>
+                  </a:txBody>
+                  <a:tcPr marL="91440" marR="91440" marT="45720" marB="45720" anchor="ctr">
+                    <a:lnL w="0">
+                      <a:noFill/>
+                    </a:lnL>
+                    <a:lnR w="0">
+                      <a:noFill/>
+                    </a:lnR>
+                    <a:lnT w="0">
+                      <a:noFill/>
+                    </a:lnT>
+                    <a:lnB w="0">
+                      <a:noFill/>
+                    </a:lnB>
+                    <a:solidFill>
+                      <a:srgbClr val="333D47"/>
+                    </a:solidFill>
+                  </a:tcPr>
+                </a:tc>
+                <a:tc>
+                  <a:txBody>
+                    <a:bodyPr wrap="square"/>
+                    <a:lstStyle/>
+                    <a:p>
+                      <a:pPr algn="l"/>
+                      <a:r>
+                        <a:rPr sz="1500" b="1" i="0">
+                          <a:solidFill>
+                            <a:srgbClr val="FFFFFF"/>
+                          </a:solidFill>
+                          <a:latin typeface="Arial"/>
+                          <a:ea typeface="Microsoft JhengHei"/>
+                        </a:rPr>
+                        <a:t>PaddleOCR Light + rules</a:t>
+                      </a:r>
+                    </a:p>
+                  </a:txBody>
+                  <a:tcPr marL="91440" marR="91440" marT="45720" marB="45720" anchor="ctr">
+                    <a:lnL w="0">
+                      <a:noFill/>
+                    </a:lnL>
+                    <a:lnR w="0">
+                      <a:noFill/>
+                    </a:lnR>
+                    <a:lnT w="0">
+                      <a:noFill/>
+                    </a:lnT>
+                    <a:lnB w="0">
+                      <a:noFill/>
+                    </a:lnB>
+                    <a:solidFill>
+                      <a:srgbClr val="333D47"/>
+                    </a:solidFill>
+                  </a:tcPr>
+                </a:tc>
+                <a:tc>
+                  <a:txBody>
+                    <a:bodyPr wrap="square"/>
+                    <a:lstStyle/>
+                    <a:p>
+                      <a:pPr algn="l"/>
+                      <a:r>
+                        <a:rPr sz="1500" b="1" i="0">
+                          <a:solidFill>
+                            <a:srgbClr val="FFFFFF"/>
+                          </a:solidFill>
+                          <a:latin typeface="Arial"/>
+                          <a:ea typeface="Microsoft JhengHei"/>
+                        </a:rPr>
+                        <a:t>Azure DI + AOAI</a:t>
+                      </a:r>
+                    </a:p>
+                  </a:txBody>
+                  <a:tcPr marL="91440" marR="91440" marT="45720" marB="45720" anchor="ctr">
+                    <a:lnL w="0">
+                      <a:noFill/>
+                    </a:lnL>
+                    <a:lnR w="0">
+                      <a:noFill/>
+                    </a:lnR>
+                    <a:lnT w="0">
+                      <a:noFill/>
+                    </a:lnT>
+                    <a:lnB w="0">
+                      <a:noFill/>
+                    </a:lnB>
+                    <a:solidFill>
+                      <a:srgbClr val="333D47"/>
+                    </a:solidFill>
+                  </a:tcPr>
+                </a:tc>
+              </a:tr>
+              <a:tr h="566928">
+                <a:tc>
+                  <a:txBody>
+                    <a:bodyPr wrap="square"/>
+                    <a:lstStyle/>
+                    <a:p>
+                      <a:pPr algn="l"/>
+                      <a:r>
+                        <a:rPr sz="1400" b="1" i="0">
+                          <a:solidFill>
+                            <a:srgbClr val="333D47"/>
+                          </a:solidFill>
+                          <a:latin typeface="Arial"/>
+                          <a:ea typeface="Microsoft JhengHei"/>
+                        </a:rPr>
+                        <a:t>Effort to improve</a:t>
+                      </a:r>
+                    </a:p>
+                  </a:txBody>
+                  <a:tcPr marL="91440" marR="91440" marT="45720" marB="45720" anchor="ctr">
+                    <a:lnL w="0">
+                      <a:noFill/>
+                    </a:lnL>
+                    <a:lnR w="0">
+                      <a:noFill/>
+                    </a:lnR>
+                    <a:lnT w="0">
+                      <a:noFill/>
+                    </a:lnT>
+                    <a:lnB w="9525" cmpd="sng">
+                      <a:solidFill>
+                        <a:srgbClr val="BFBFBF"/>
+                      </a:solidFill>
+                    </a:lnB>
+                    <a:noFill/>
+                  </a:tcPr>
+                </a:tc>
+                <a:tc>
+                  <a:txBody>
+                    <a:bodyPr wrap="square"/>
+                    <a:lstStyle/>
+                    <a:p>
+                      <a:pPr algn="l"/>
+                      <a:r>
+                        <a:rPr sz="1400" b="0" i="0">
+                          <a:solidFill>
+                            <a:srgbClr val="333D47"/>
+                          </a:solidFill>
+                          <a:latin typeface="Arial"/>
+                          <a:ea typeface="Microsoft JhengHei"/>
+                        </a:rPr>
+                        <a:t>Rules rewritten by hand after reviewing errors on these receipts</a:t>
+                      </a:r>
+                    </a:p>
+                  </a:txBody>
+                  <a:tcPr marL="91440" marR="91440" marT="45720" marB="45720" anchor="ctr">
+                    <a:lnL w="0">
+                      <a:noFill/>
+                    </a:lnL>
+                    <a:lnR w="0">
+                      <a:noFill/>
+                    </a:lnR>
+                    <a:lnT w="0">
+                      <a:noFill/>
+                    </a:lnT>
+                    <a:lnB w="9525" cmpd="sng">
+                      <a:solidFill>
+                        <a:srgbClr val="BFBFBF"/>
+                      </a:solidFill>
+                    </a:lnB>
+                    <a:noFill/>
+                  </a:tcPr>
+                </a:tc>
+                <a:tc>
+                  <a:txBody>
+                    <a:bodyPr wrap="square"/>
+                    <a:lstStyle/>
+                    <a:p>
+                      <a:pPr algn="l"/>
+                      <a:r>
+                        <a:rPr sz="1400" b="0" i="0">
+                          <a:solidFill>
+                            <a:srgbClr val="333D47"/>
+                          </a:solidFill>
+                          <a:latin typeface="Arial"/>
+                          <a:ea typeface="Microsoft JhengHei"/>
+                        </a:rPr>
+                        <a:t>One prompt revision after reviewing errors</a:t>
+                      </a:r>
+                    </a:p>
+                  </a:txBody>
+                  <a:tcPr marL="91440" marR="91440" marT="45720" marB="45720" anchor="ctr">
+                    <a:lnL w="0">
+                      <a:noFill/>
+                    </a:lnL>
+                    <a:lnR w="0">
+                      <a:noFill/>
+                    </a:lnR>
+                    <a:lnT w="0">
+                      <a:noFill/>
+                    </a:lnT>
+                    <a:lnB w="9525" cmpd="sng">
+                      <a:solidFill>
+                        <a:srgbClr val="BFBFBF"/>
+                      </a:solidFill>
+                    </a:lnB>
+                    <a:noFill/>
+                  </a:tcPr>
+                </a:tc>
+              </a:tr>
+              <a:tr h="566928">
+                <a:tc>
+                  <a:txBody>
+                    <a:bodyPr wrap="square"/>
+                    <a:lstStyle/>
+                    <a:p>
+                      <a:pPr algn="l"/>
+                      <a:r>
+                        <a:rPr sz="1400" b="1" i="0">
+                          <a:solidFill>
+                            <a:srgbClr val="333D47"/>
+                          </a:solidFill>
+                          <a:latin typeface="Arial"/>
+                          <a:ea typeface="Microsoft JhengHei"/>
+                        </a:rPr>
+                        <a:t>What a change looks like</a:t>
+                      </a:r>
+                    </a:p>
+                  </a:txBody>
+                  <a:tcPr marL="91440" marR="91440" marT="45720" marB="45720" anchor="ctr">
+                    <a:lnL w="0">
+                      <a:noFill/>
+                    </a:lnL>
+                    <a:lnR w="0">
+                      <a:noFill/>
+                    </a:lnR>
+                    <a:lnT w="0">
+                      <a:noFill/>
+                    </a:lnT>
+                    <a:lnB w="9525" cmpd="sng">
+                      <a:solidFill>
+                        <a:srgbClr val="BFBFBF"/>
+                      </a:solidFill>
+                    </a:lnB>
+                    <a:noFill/>
+                  </a:tcPr>
+                </a:tc>
+                <a:tc>
+                  <a:txBody>
+                    <a:bodyPr wrap="square"/>
+                    <a:lstStyle/>
+                    <a:p>
+                      <a:pPr algn="l"/>
+                      <a:r>
+                        <a:rPr sz="1400" b="0" i="0">
+                          <a:solidFill>
+                            <a:srgbClr val="333D47"/>
+                          </a:solidFill>
+                          <a:latin typeface="Arial"/>
+                          <a:ea typeface="Microsoft JhengHei"/>
+                        </a:rPr>
+                        <a:t>Code and label lists (69 → 225 phrases)</a:t>
+                      </a:r>
+                    </a:p>
+                  </a:txBody>
+                  <a:tcPr marL="91440" marR="91440" marT="45720" marB="45720" anchor="ctr">
+                    <a:lnL w="0">
+                      <a:noFill/>
+                    </a:lnL>
+                    <a:lnR w="0">
+                      <a:noFill/>
+                    </a:lnR>
+                    <a:lnT w="0">
+                      <a:noFill/>
+                    </a:lnT>
+                    <a:lnB w="9525" cmpd="sng">
+                      <a:solidFill>
+                        <a:srgbClr val="BFBFBF"/>
+                      </a:solidFill>
+                    </a:lnB>
+                    <a:noFill/>
+                  </a:tcPr>
+                </a:tc>
+                <a:tc>
+                  <a:txBody>
+                    <a:bodyPr wrap="square"/>
+                    <a:lstStyle/>
+                    <a:p>
+                      <a:pPr algn="l"/>
+                      <a:r>
+                        <a:rPr sz="1400" b="0" i="0">
+                          <a:solidFill>
+                            <a:srgbClr val="333D47"/>
+                          </a:solidFill>
+                          <a:latin typeface="Arial"/>
+                          <a:ea typeface="Microsoft JhengHei"/>
+                        </a:rPr>
+                        <a:t>Prompt wording and a few general checks</a:t>
+                      </a:r>
+                    </a:p>
+                  </a:txBody>
+                  <a:tcPr marL="91440" marR="91440" marT="45720" marB="45720" anchor="ctr">
+                    <a:lnL w="0">
+                      <a:noFill/>
+                    </a:lnL>
+                    <a:lnR w="0">
+                      <a:noFill/>
+                    </a:lnR>
+                    <a:lnT w="0">
+                      <a:noFill/>
+                    </a:lnT>
+                    <a:lnB w="9525" cmpd="sng">
+                      <a:solidFill>
+                        <a:srgbClr val="BFBFBF"/>
+                      </a:solidFill>
+                    </a:lnB>
+                    <a:noFill/>
+                  </a:tcPr>
+                </a:tc>
+              </a:tr>
+              <a:tr h="566928">
+                <a:tc>
+                  <a:txBody>
+                    <a:bodyPr wrap="square"/>
+                    <a:lstStyle/>
+                    <a:p>
+                      <a:pPr algn="l"/>
+                      <a:r>
+                        <a:rPr sz="1400" b="1" i="0">
+                          <a:solidFill>
+                            <a:srgbClr val="333D47"/>
+                          </a:solidFill>
+                          <a:latin typeface="Arial"/>
+                          <a:ea typeface="Microsoft JhengHei"/>
+                        </a:rPr>
+                        <a:t>Side effects seen</a:t>
+                      </a:r>
+                    </a:p>
+                  </a:txBody>
+                  <a:tcPr marL="91440" marR="91440" marT="45720" marB="45720" anchor="ctr">
+                    <a:lnL w="0">
+                      <a:noFill/>
+                    </a:lnL>
+                    <a:lnR w="0">
+                      <a:noFill/>
+                    </a:lnR>
+                    <a:lnT w="0">
+                      <a:noFill/>
+                    </a:lnT>
+                    <a:lnB w="9525" cmpd="sng">
+                      <a:solidFill>
+                        <a:srgbClr val="BFBFBF"/>
+                      </a:solidFill>
+                    </a:lnB>
+                    <a:noFill/>
+                  </a:tcPr>
+                </a:tc>
+                <a:tc>
+                  <a:txBody>
+                    <a:bodyPr wrap="square"/>
+                    <a:lstStyle/>
+                    <a:p>
+                      <a:pPr algn="l"/>
+                      <a:r>
+                        <a:rPr sz="1400" b="0" i="0">
+                          <a:solidFill>
+                            <a:srgbClr val="333D47"/>
+                          </a:solidFill>
+                          <a:latin typeface="Arial"/>
+                          <a:ea typeface="Microsoft JhengHei"/>
+                        </a:rPr>
+                        <a:t>1 correct field broken by the rule changes</a:t>
+                      </a:r>
+                    </a:p>
+                  </a:txBody>
+                  <a:tcPr marL="91440" marR="91440" marT="45720" marB="45720" anchor="ctr">
+                    <a:lnL w="0">
+                      <a:noFill/>
+                    </a:lnL>
+                    <a:lnR w="0">
+                      <a:noFill/>
+                    </a:lnR>
+                    <a:lnT w="0">
+                      <a:noFill/>
+                    </a:lnT>
+                    <a:lnB w="9525" cmpd="sng">
+                      <a:solidFill>
+                        <a:srgbClr val="BFBFBF"/>
+                      </a:solidFill>
+                    </a:lnB>
+                    <a:noFill/>
+                  </a:tcPr>
+                </a:tc>
+                <a:tc>
+                  <a:txBody>
+                    <a:bodyPr wrap="square"/>
+                    <a:lstStyle/>
+                    <a:p>
+                      <a:pPr algn="l"/>
+                      <a:r>
+                        <a:rPr sz="1400" b="0" i="0">
+                          <a:solidFill>
+                            <a:srgbClr val="333D47"/>
+                          </a:solidFill>
+                          <a:latin typeface="Arial"/>
+                          <a:ea typeface="Microsoft JhengHei"/>
+                        </a:rPr>
+                        <a:t>0 correct fields broken by the prompt revision</a:t>
+                      </a:r>
+                    </a:p>
+                  </a:txBody>
+                  <a:tcPr marL="91440" marR="91440" marT="45720" marB="45720" anchor="ctr">
+                    <a:lnL w="0">
+                      <a:noFill/>
+                    </a:lnL>
+                    <a:lnR w="0">
+                      <a:noFill/>
+                    </a:lnR>
+                    <a:lnT w="0">
+                      <a:noFill/>
+                    </a:lnT>
+                    <a:lnB w="9525" cmpd="sng">
+                      <a:solidFill>
+                        <a:srgbClr val="BFBFBF"/>
+                      </a:solidFill>
+                    </a:lnB>
+                    <a:noFill/>
+                  </a:tcPr>
+                </a:tc>
+              </a:tr>
+              <a:tr h="566928">
+                <a:tc>
+                  <a:txBody>
+                    <a:bodyPr wrap="square"/>
+                    <a:lstStyle/>
+                    <a:p>
+                      <a:pPr algn="l"/>
+                      <a:r>
+                        <a:rPr sz="1400" b="1" i="0">
+                          <a:solidFill>
+                            <a:srgbClr val="333D47"/>
+                          </a:solidFill>
+                          <a:latin typeface="Arial"/>
+                          <a:ea typeface="Microsoft JhengHei"/>
+                        </a:rPr>
+                        <a:t>New receipt layouts</a:t>
+                      </a:r>
+                    </a:p>
+                  </a:txBody>
+                  <a:tcPr marL="91440" marR="91440" marT="45720" marB="45720" anchor="ctr">
+                    <a:lnL w="0">
+                      <a:noFill/>
+                    </a:lnL>
+                    <a:lnR w="0">
+                      <a:noFill/>
+                    </a:lnR>
+                    <a:lnT w="0">
+                      <a:noFill/>
+                    </a:lnT>
+                    <a:lnB w="9525" cmpd="sng">
+                      <a:solidFill>
+                        <a:srgbClr val="BFBFBF"/>
+                      </a:solidFill>
+                    </a:lnB>
+                    <a:noFill/>
+                  </a:tcPr>
+                </a:tc>
+                <a:tc>
+                  <a:txBody>
+                    <a:bodyPr wrap="square"/>
+                    <a:lstStyle/>
+                    <a:p>
+                      <a:pPr algn="l"/>
+                      <a:r>
+                        <a:rPr sz="1400" b="0" i="0">
+                          <a:solidFill>
+                            <a:srgbClr val="333D47"/>
+                          </a:solidFill>
+                          <a:latin typeface="Arial"/>
+                          <a:ea typeface="Microsoft JhengHei"/>
+                        </a:rPr>
+                        <a:t>Likely more rule updates and a regression test of every receipt</a:t>
+                      </a:r>
+                    </a:p>
+                  </a:txBody>
+                  <a:tcPr marL="91440" marR="91440" marT="45720" marB="45720" anchor="ctr">
+                    <a:lnL w="0">
+                      <a:noFill/>
+                    </a:lnL>
+                    <a:lnR w="0">
+                      <a:noFill/>
+                    </a:lnR>
+                    <a:lnT w="0">
+                      <a:noFill/>
+                    </a:lnT>
+                    <a:lnB w="9525" cmpd="sng">
+                      <a:solidFill>
+                        <a:srgbClr val="BFBFBF"/>
+                      </a:solidFill>
+                    </a:lnB>
+                    <a:noFill/>
+                  </a:tcPr>
+                </a:tc>
+                <a:tc>
+                  <a:txBody>
+                    <a:bodyPr wrap="square"/>
+                    <a:lstStyle/>
+                    <a:p>
+                      <a:pPr algn="l"/>
+                      <a:r>
+                        <a:rPr sz="1400" b="0" i="0">
+                          <a:solidFill>
+                            <a:srgbClr val="333D47"/>
+                          </a:solidFill>
+                          <a:latin typeface="Arial"/>
+                          <a:ea typeface="Microsoft JhengHei"/>
+                        </a:rPr>
+                        <a:t>Possibly no change; not yet tested</a:t>
+                      </a:r>
+                    </a:p>
+                  </a:txBody>
+                  <a:tcPr marL="91440" marR="91440" marT="45720" marB="45720" anchor="ctr">
+                    <a:lnL w="0">
+                      <a:noFill/>
+                    </a:lnL>
+                    <a:lnR w="0">
+                      <a:noFill/>
+                    </a:lnR>
+                    <a:lnT w="0">
+                      <a:noFill/>
+                    </a:lnT>
+                    <a:lnB w="9525" cmpd="sng">
+                      <a:solidFill>
+                        <a:srgbClr val="BFBFBF"/>
+                      </a:solidFill>
+                    </a:lnB>
+                    <a:noFill/>
+                  </a:tcPr>
+                </a:tc>
+              </a:tr>
+              <a:tr h="566928">
+                <a:tc>
+                  <a:txBody>
+                    <a:bodyPr wrap="square"/>
+                    <a:lstStyle/>
+                    <a:p>
+                      <a:pPr algn="l"/>
+                      <a:r>
+                        <a:rPr sz="1400" b="1" i="0">
+                          <a:solidFill>
+                            <a:srgbClr val="333D47"/>
+                          </a:solidFill>
+                          <a:latin typeface="Arial"/>
+                          <a:ea typeface="Microsoft JhengHei"/>
+                        </a:rPr>
+                        <a:t>Time and running cost</a:t>
+                      </a:r>
+                    </a:p>
+                  </a:txBody>
+                  <a:tcPr marL="91440" marR="91440" marT="45720" marB="45720" anchor="ctr">
+                    <a:lnL w="0">
+                      <a:noFill/>
+                    </a:lnL>
+                    <a:lnR w="0">
+                      <a:noFill/>
+                    </a:lnR>
+                    <a:lnT w="0">
+                      <a:noFill/>
+                    </a:lnT>
+                    <a:lnB w="9525" cmpd="sng">
+                      <a:solidFill>
+                        <a:srgbClr val="BFBFBF"/>
+                      </a:solidFill>
+                    </a:lnB>
+                    <a:noFill/>
+                  </a:tcPr>
+                </a:tc>
+                <a:tc>
+                  <a:txBody>
+                    <a:bodyPr wrap="square"/>
+                    <a:lstStyle/>
+                    <a:p>
+                      <a:pPr algn="l"/>
+                      <a:r>
+                        <a:rPr sz="1400" b="0" i="0">
+                          <a:solidFill>
+                            <a:srgbClr val="333D47"/>
+                          </a:solidFill>
+                          <a:latin typeface="Arial"/>
+                          <a:ea typeface="Microsoft JhengHei"/>
+                        </a:rPr>
+                        <a:t>13.9 s, own compute, no API fee</a:t>
+                      </a:r>
+                    </a:p>
+                  </a:txBody>
+                  <a:tcPr marL="91440" marR="91440" marT="45720" marB="45720" anchor="ctr">
+                    <a:lnL w="0">
+                      <a:noFill/>
+                    </a:lnL>
+                    <a:lnR w="0">
+                      <a:noFill/>
+                    </a:lnR>
+                    <a:lnT w="0">
+                      <a:noFill/>
+                    </a:lnT>
+                    <a:lnB w="9525" cmpd="sng">
+                      <a:solidFill>
+                        <a:srgbClr val="BFBFBF"/>
+                      </a:solidFill>
+                    </a:lnB>
+                    <a:noFill/>
+                  </a:tcPr>
+                </a:tc>
+                <a:tc>
+                  <a:txBody>
+                    <a:bodyPr wrap="square"/>
+                    <a:lstStyle/>
+                    <a:p>
+                      <a:pPr algn="l"/>
+                      <a:r>
+                        <a:rPr sz="1400" b="0" i="0">
+                          <a:solidFill>
+                            <a:srgbClr val="333D47"/>
+                          </a:solidFill>
+                          <a:latin typeface="Arial"/>
+                          <a:ea typeface="Microsoft JhengHei"/>
+                        </a:rPr>
+                        <a:t>6.2 s, Azure fees per receipt (to confirm)</a:t>
+                      </a:r>
+                    </a:p>
+                  </a:txBody>
+                  <a:tcPr marL="91440" marR="91440" marT="45720" marB="45720" anchor="ctr">
+                    <a:lnL w="0">
+                      <a:noFill/>
+                    </a:lnL>
+                    <a:lnR w="0">
+                      <a:noFill/>
+                    </a:lnR>
+                    <a:lnT w="0">
+                      <a:noFill/>
+                    </a:lnT>
+                    <a:lnB w="9525" cmpd="sng">
+                      <a:solidFill>
+                        <a:srgbClr val="BFBFBF"/>
+                      </a:solidFill>
+                    </a:lnB>
+                    <a:noFill/>
+                  </a:tcPr>
+                </a:tc>
+              </a:tr>
+            </a:tbl>
+          </a:graphicData>
+        </a:graphic>
+      </p:graphicFrame>
+      <p:sp>
+        <p:nvSpPr>
+          <p:cNvPr id="13" name="TextBox 12"/>
+          <p:cNvSpPr txBox="1"/>
+          <p:nvPr/>
+        </p:nvSpPr>
+        <p:spPr>
+          <a:xfrm>
+            <a:off x="356616" y="5349240"/>
+            <a:ext cx="10972800" cy="320040"/>
+          </a:xfrm>
+          <a:prstGeom prst="rect">
+            <a:avLst/>
+          </a:prstGeom>
+          <a:noFill/>
+        </p:spPr>
+        <p:txBody>
+          <a:bodyPr wrap="square" lIns="0" rIns="0" tIns="0" bIns="0" anchor="t"/>
+          <a:lstStyle/>
+          <a:p>
+            <a:pPr marL="0" indent="0" algn="l">
+              <a:spcAft>
+                <a:spcPts val="0"/>
+              </a:spcAft>
+              <a:buNone/>
+            </a:pPr>
+            <a:r>
+              <a:rPr sz="1100" b="0" i="1">
+                <a:solidFill>
+                  <a:srgbClr val="5F6770"/>
+                </a:solidFill>
+                <a:latin typeface="Arial"/>
+                <a:ea typeface="Microsoft JhengHei"/>
+              </a:rPr>
+              <a:t>The main question is not API price but who maintains the extraction logic as layouts change. Lower maintenance for AOAI is implied by this benchmark, not yet proven.</a:t>
+            </a:r>
+          </a:p>
+        </p:txBody>
+      </p:sp>
+    </p:spTree>
+  </p:cSld>
+  <p:clrMapOvr>
+    <a:masterClrMapping/>
+  </p:clrMapOvr>
+</p:sld>
+</file>
+
+<file path=ppt/slides/slide11.xml><?xml version="1.0" encoding="utf-8"?>
+<p:sld xmlns:a="http://schemas.openxmlformats.org/drawingml/2006/main" xmlns:p="http://schemas.openxmlformats.org/presentationml/2006/main" xmlns:r="http://schemas.openxmlformats.org/officeDocument/2006/relationships">
+  <p:cSld>
+    <p:spTree>
+      <p:nvGrpSpPr>
+        <p:cNvPr id="1" name=""/>
+        <p:cNvGrpSpPr/>
+        <p:nvPr/>
+      </p:nvGrpSpPr>
+      <p:grpSpPr/>
+      <p:sp>
+        <p:nvSpPr>
+          <p:cNvPr id="4" name="Text Placeholder 3"/>
+          <p:cNvSpPr>
+            <a:spLocks noGrp="1"/>
+          </p:cNvSpPr>
+          <p:nvPr>
+            <p:ph type="body" idx="10" sz="quarter"/>
+          </p:nvPr>
+        </p:nvSpPr>
+        <p:spPr>
+          <a:xfrm>
+            <a:off x="356616" y="502920"/>
+            <a:ext cx="11155680" cy="566928"/>
+          </a:xfrm>
+        </p:spPr>
+        <p:txBody>
+          <a:bodyPr lIns="0"/>
+          <a:lstStyle/>
+          <a:p>
+            <a:r>
+              <a:rPr sz="2800" b="1">
+                <a:solidFill>
+                  <a:srgbClr val="333D47"/>
+                </a:solidFill>
+                <a:latin typeface="Arial"/>
+                <a:ea typeface="Microsoft JhengHei"/>
+              </a:rPr>
+              <a:t>Manual Rules vs. AI Extraction: Pros and Cons</a:t>
+            </a:r>
+          </a:p>
+        </p:txBody>
+      </p:sp>
+      <p:sp>
+        <p:nvSpPr>
+          <p:cNvPr id="10" name="Slide Number Placeholder 5">
+            <a:extLst>
+              <a:ext uri="{FF2B5EF4-FFF2-40B4-BE49-F238E27FC236}">
+                <a16:creationId xmlns:a16="http://schemas.microsoft.com/office/drawing/2014/main" id="{3E493E1F-F28C-FD47-B996-3EBF17D328AE}"/>
+              </a:ext>
+            </a:extLst>
+          </p:cNvPr>
+          <p:cNvSpPr>
+            <a:spLocks noGrp="1"/>
+          </p:cNvSpPr>
+          <p:nvPr>
+            <p:ph type="sldNum" sz="quarter" idx="4"/>
+          </p:nvPr>
+        </p:nvSpPr>
+        <p:spPr>
+          <a:xfrm>
+            <a:off x="359999" y="6264872"/>
+            <a:ext cx="360000" cy="360000"/>
+          </a:xfrm>
+          <a:prstGeom prst="rect">
+            <a:avLst/>
+          </a:prstGeom>
+        </p:spPr>
+        <p:txBody>
+          <a:bodyPr vert="horz" lIns="91440" tIns="45720" rIns="91440" bIns="45720" rtlCol="0" anchor="ctr"/>
+          <a:lstStyle>
+            <a:lvl1pPr algn="l">
+              <a:defRPr sz="800" b="0" i="0">
+                <a:solidFill>
+                  <a:schemeClr val="tx1"/>
+                </a:solidFill>
+                <a:latin typeface="Arial" panose="020B0604020202020204" pitchFamily="34" charset="0"/>
+                <a:cs typeface="Arial" panose="020B0604020202020204" pitchFamily="34" charset="0"/>
+              </a:defRPr>
+            </a:lvl1pPr>
+          </a:lstStyle>
+          <a:p>
+            <a:fld id="{18A41853-EF22-D446-BDBC-A7CF3FE93503}" type="slidenum">
+              <a:rPr lang="en-US" smtClean="0"/>
+              <a:pPr/>
+              <a:t>‹#›</a:t>
+            </a:fld>
+            <a:endParaRPr lang="en-US" dirty="0"/>
+          </a:p>
+        </p:txBody>
+      </p:sp>
+      <p:sp>
+        <p:nvSpPr>
+          <p:cNvPr id="11" name="TextBox 10"/>
+          <p:cNvSpPr txBox="1"/>
+          <p:nvPr/>
+        </p:nvSpPr>
+        <p:spPr>
+          <a:xfrm>
+            <a:off x="356616" y="1115568"/>
+            <a:ext cx="11475720" cy="457200"/>
+          </a:xfrm>
+          <a:prstGeom prst="rect">
+            <a:avLst/>
+          </a:prstGeom>
+          <a:noFill/>
+        </p:spPr>
+        <p:txBody>
+          <a:bodyPr wrap="square" lIns="0" rIns="0" tIns="0" bIns="0" anchor="t"/>
+          <a:lstStyle/>
+          <a:p>
+            <a:pPr marL="0" indent="0" algn="l">
+              <a:spcAft>
+                <a:spcPts val="0"/>
+              </a:spcAft>
+              <a:buNone/>
+            </a:pPr>
+            <a:r>
+              <a:rPr sz="1700" b="0" i="0">
+                <a:solidFill>
+                  <a:srgbClr val="D31145"/>
+                </a:solidFill>
+                <a:latin typeface="Arial"/>
+                <a:ea typeface="Microsoft JhengHei"/>
+              </a:rPr>
+              <a:t>"Measured" = this benchmark; the rest is expected.</a:t>
+            </a:r>
+          </a:p>
+        </p:txBody>
+      </p:sp>
+      <p:sp>
+        <p:nvSpPr>
+          <p:cNvPr id="12" name="Rectangle 11"/>
+          <p:cNvSpPr/>
+          <p:nvPr/>
+        </p:nvSpPr>
+        <p:spPr>
+          <a:xfrm>
+            <a:off x="356616" y="1783080"/>
+            <a:ext cx="5600700" cy="411480"/>
+          </a:xfrm>
+          <a:prstGeom prst="rect">
+            <a:avLst/>
+          </a:prstGeom>
+          <a:solidFill>
+            <a:srgbClr val="333D47"/>
+          </a:solidFill>
+          <a:ln>
+            <a:noFill/>
+          </a:ln>
+        </p:spPr>
+        <p:txBody>
+          <a:bodyPr rtlCol="0" anchor="ctr" wrap="square" lIns="164592" rIns="164592" tIns="109728" bIns="109728"/>
+          <a:lstStyle/>
+          <a:p>
+            <a:pPr algn="l" marL="0" indent="0">
+              <a:spcAft>
+                <a:spcPts val="0"/>
+              </a:spcAft>
+              <a:buNone/>
+            </a:pPr>
+            <a:r>
+              <a:rPr sz="1600" b="1" i="0">
+                <a:solidFill>
+                  <a:srgbClr val="FFFFFF"/>
+                </a:solidFill>
+                <a:latin typeface="Arial"/>
+                <a:ea typeface="Microsoft JhengHei"/>
+              </a:rPr>
+              <a:t>Manual extraction rules (PaddleOCR Light)</a:t>
+            </a:r>
+          </a:p>
+        </p:txBody>
+      </p:sp>
+      <p:sp>
+        <p:nvSpPr>
+          <p:cNvPr id="13" name="TextBox 12"/>
+          <p:cNvSpPr txBox="1"/>
+          <p:nvPr/>
+        </p:nvSpPr>
+        <p:spPr>
+          <a:xfrm>
+            <a:off x="356616" y="2267712"/>
+            <a:ext cx="5600700" cy="566928"/>
+          </a:xfrm>
+          <a:prstGeom prst="rect">
+            <a:avLst/>
+          </a:prstGeom>
+          <a:noFill/>
+        </p:spPr>
+        <p:txBody>
+          <a:bodyPr wrap="square" lIns="0" rIns="0" tIns="0" bIns="0" anchor="ctr"/>
+          <a:lstStyle/>
+          <a:p>
+            <a:pPr marL="0" indent="0" algn="l">
+              <a:spcAft>
+                <a:spcPts val="0"/>
+              </a:spcAft>
+              <a:buNone/>
+            </a:pPr>
+            <a:r>
+              <a:rPr sz="1300" b="1" i="0">
+                <a:solidFill>
+                  <a:srgbClr val="333D47"/>
+                </a:solidFill>
+                <a:latin typeface="Arial"/>
+                <a:ea typeface="Microsoft JhengHei"/>
+              </a:rPr>
+              <a:t>New formats need manual rule updates, which can break working cases and add maintenance and testing.</a:t>
+            </a:r>
+          </a:p>
+        </p:txBody>
+      </p:sp>
+      <p:sp>
+        <p:nvSpPr>
+          <p:cNvPr id="14" name="Rectangle 13"/>
+          <p:cNvSpPr/>
+          <p:nvPr/>
+        </p:nvSpPr>
+        <p:spPr>
+          <a:xfrm>
+            <a:off x="356616" y="2907792"/>
+            <a:ext cx="5600700" cy="1225296"/>
+          </a:xfrm>
+          <a:prstGeom prst="rect">
+            <a:avLst/>
+          </a:prstGeom>
+          <a:solidFill>
+            <a:srgbClr val="E6F2EA"/>
+          </a:solidFill>
+          <a:ln>
+            <a:noFill/>
+          </a:ln>
+        </p:spPr>
+        <p:txBody>
+          <a:bodyPr rtlCol="0" anchor="t" wrap="square" lIns="164592" rIns="164592" tIns="109728" bIns="109728"/>
+          <a:lstStyle/>
+          <a:p>
+            <a:pPr algn="l" marL="0" indent="0">
+              <a:spcAft>
+                <a:spcPts val="400"/>
+              </a:spcAft>
+              <a:buNone/>
+            </a:pPr>
+            <a:r>
+              <a:rPr sz="1500" b="1" i="0">
+                <a:solidFill>
+                  <a:srgbClr val="1E7B4A"/>
+                </a:solidFill>
+                <a:latin typeface="Arial"/>
+                <a:ea typeface="Microsoft JhengHei"/>
+              </a:rPr>
+              <a:t>Pros</a:t>
+            </a:r>
+          </a:p>
+          <a:p>
+            <a:pPr marL="182880" indent="-182880" algn="l">
+              <a:spcAft>
+                <a:spcPts val="300"/>
+              </a:spcAft>
+              <a:buFont typeface="Arial"/>
+              <a:buChar char="•"/>
+            </a:pPr>
+            <a:r>
+              <a:rPr sz="1300" b="0" i="0">
+                <a:solidFill>
+                  <a:srgbClr val="333D47"/>
+                </a:solidFill>
+                <a:latin typeface="Arial"/>
+                <a:ea typeface="Microsoft JhengHei"/>
+              </a:rPr>
+              <a:t>Full control; transparent and predictable on formats the rules know.</a:t>
+            </a:r>
+          </a:p>
+          <a:p>
+            <a:pPr marL="182880" indent="-182880" algn="l">
+              <a:spcAft>
+                <a:spcPts val="300"/>
+              </a:spcAft>
+              <a:buFont typeface="Arial"/>
+              <a:buChar char="•"/>
+            </a:pPr>
+            <a:r>
+              <a:rPr sz="1300" b="0" i="0">
+                <a:solidFill>
+                  <a:srgbClr val="333D47"/>
+                </a:solidFill>
+                <a:latin typeface="Arial"/>
+                <a:ea typeface="Microsoft JhengHei"/>
+              </a:rPr>
+              <a:t>No API fees: open-source OCR on our own compute.</a:t>
+            </a:r>
+          </a:p>
+          <a:p>
+            <a:pPr marL="182880" indent="-182880" algn="l">
+              <a:spcAft>
+                <a:spcPts val="0"/>
+              </a:spcAft>
+              <a:buFont typeface="Arial"/>
+              <a:buChar char="•"/>
+            </a:pPr>
+            <a:r>
+              <a:rPr sz="1300" b="1" i="0">
+                <a:solidFill>
+                  <a:srgbClr val="333D47"/>
+                </a:solidFill>
+                <a:latin typeface="Arial"/>
+                <a:ea typeface="Microsoft JhengHei"/>
+              </a:rPr>
+              <a:t>Measured: </a:t>
+            </a:r>
+            <a:r>
+              <a:rPr sz="1300" b="0" i="0">
+                <a:solidFill>
+                  <a:srgbClr val="333D47"/>
+                </a:solidFill>
+                <a:latin typeface="Arial"/>
+                <a:ea typeface="Microsoft JhengHei"/>
+              </a:rPr>
+              <a:t>the OCR read the values; the misses were missing labels.</a:t>
+            </a:r>
+          </a:p>
+        </p:txBody>
+      </p:sp>
+      <p:sp>
+        <p:nvSpPr>
+          <p:cNvPr id="15" name="Rectangle 14"/>
+          <p:cNvSpPr/>
+          <p:nvPr/>
+        </p:nvSpPr>
+        <p:spPr>
+          <a:xfrm>
+            <a:off x="356616" y="4206240"/>
+            <a:ext cx="5600700" cy="1225296"/>
+          </a:xfrm>
+          <a:prstGeom prst="rect">
+            <a:avLst/>
+          </a:prstGeom>
+          <a:solidFill>
+            <a:srgbClr val="FBE7EC"/>
+          </a:solidFill>
+          <a:ln>
+            <a:noFill/>
+          </a:ln>
+        </p:spPr>
+        <p:txBody>
+          <a:bodyPr rtlCol="0" anchor="t" wrap="square" lIns="164592" rIns="164592" tIns="109728" bIns="109728"/>
+          <a:lstStyle/>
+          <a:p>
+            <a:pPr algn="l" marL="0" indent="0">
+              <a:spcAft>
+                <a:spcPts val="400"/>
+              </a:spcAft>
+              <a:buNone/>
+            </a:pPr>
+            <a:r>
+              <a:rPr sz="1500" b="1" i="0">
+                <a:solidFill>
+                  <a:srgbClr val="D31145"/>
+                </a:solidFill>
+                <a:latin typeface="Arial"/>
+                <a:ea typeface="Microsoft JhengHei"/>
+              </a:rPr>
+              <a:t>Cons</a:t>
+            </a:r>
+          </a:p>
+          <a:p>
+            <a:pPr marL="182880" indent="-182880" algn="l">
+              <a:spcAft>
+                <a:spcPts val="300"/>
+              </a:spcAft>
+              <a:buFont typeface="Arial"/>
+              <a:buChar char="•"/>
+            </a:pPr>
+            <a:r>
+              <a:rPr sz="1300" b="0" i="0">
+                <a:solidFill>
+                  <a:srgbClr val="333D47"/>
+                </a:solidFill>
+                <a:latin typeface="Arial"/>
+                <a:ea typeface="Microsoft JhengHei"/>
+              </a:rPr>
+              <a:t>Each new format or language needs rule updates by hand.</a:t>
+            </a:r>
+          </a:p>
+          <a:p>
+            <a:pPr marL="182880" indent="-182880" algn="l">
+              <a:spcAft>
+                <a:spcPts val="300"/>
+              </a:spcAft>
+              <a:buFont typeface="Arial"/>
+              <a:buChar char="•"/>
+            </a:pPr>
+            <a:r>
+              <a:rPr sz="1300" b="1" i="0">
+                <a:solidFill>
+                  <a:srgbClr val="333D47"/>
+                </a:solidFill>
+                <a:latin typeface="Arial"/>
+                <a:ea typeface="Microsoft JhengHei"/>
+              </a:rPr>
+              <a:t>Measured: </a:t>
+            </a:r>
+            <a:r>
+              <a:rPr sz="1300" b="0" i="0">
+                <a:solidFill>
+                  <a:srgbClr val="333D47"/>
+                </a:solidFill>
+                <a:latin typeface="Arial"/>
+                <a:ea typeface="Microsoft JhengHei"/>
+              </a:rPr>
+              <a:t>a rule change broke a receipt that was already correct.</a:t>
+            </a:r>
+          </a:p>
+          <a:p>
+            <a:pPr marL="182880" indent="-182880" algn="l">
+              <a:spcAft>
+                <a:spcPts val="0"/>
+              </a:spcAft>
+              <a:buFont typeface="Arial"/>
+              <a:buChar char="•"/>
+            </a:pPr>
+            <a:r>
+              <a:rPr sz="1300" b="1" i="0">
+                <a:solidFill>
+                  <a:srgbClr val="333D47"/>
+                </a:solidFill>
+                <a:latin typeface="Arial"/>
+                <a:ea typeface="Microsoft JhengHei"/>
+              </a:rPr>
+              <a:t>Measured: </a:t>
+            </a:r>
+            <a:r>
+              <a:rPr sz="1300" b="0" i="0">
+                <a:solidFill>
+                  <a:srgbClr val="333D47"/>
+                </a:solidFill>
+                <a:latin typeface="Arial"/>
+                <a:ea typeface="Microsoft JhengHei"/>
+              </a:rPr>
+              <a:t>69 → 225 label phrases added by hand.</a:t>
+            </a:r>
+          </a:p>
+        </p:txBody>
+      </p:sp>
+      <p:sp>
+        <p:nvSpPr>
+          <p:cNvPr id="16" name="Rectangle 15"/>
+          <p:cNvSpPr/>
+          <p:nvPr/>
+        </p:nvSpPr>
+        <p:spPr>
+          <a:xfrm>
+            <a:off x="6231636" y="1783080"/>
+            <a:ext cx="5600700" cy="411480"/>
+          </a:xfrm>
+          <a:prstGeom prst="rect">
+            <a:avLst/>
+          </a:prstGeom>
+          <a:solidFill>
+            <a:srgbClr val="333D47"/>
+          </a:solidFill>
+          <a:ln>
+            <a:noFill/>
+          </a:ln>
+        </p:spPr>
+        <p:txBody>
+          <a:bodyPr rtlCol="0" anchor="ctr" wrap="square" lIns="164592" rIns="164592" tIns="109728" bIns="109728"/>
+          <a:lstStyle/>
+          <a:p>
+            <a:pPr algn="l" marL="0" indent="0">
+              <a:spcAft>
+                <a:spcPts val="0"/>
+              </a:spcAft>
+              <a:buNone/>
+            </a:pPr>
+            <a:r>
+              <a:rPr sz="1600" b="1" i="0">
+                <a:solidFill>
+                  <a:srgbClr val="FFFFFF"/>
+                </a:solidFill>
+                <a:latin typeface="Arial"/>
+                <a:ea typeface="Microsoft JhengHei"/>
+              </a:rPr>
+              <a:t>AI extraction (Azure DI + AOAI)</a:t>
+            </a:r>
+          </a:p>
+        </p:txBody>
+      </p:sp>
+      <p:sp>
+        <p:nvSpPr>
+          <p:cNvPr id="17" name="TextBox 16"/>
+          <p:cNvSpPr txBox="1"/>
+          <p:nvPr/>
+        </p:nvSpPr>
+        <p:spPr>
+          <a:xfrm>
+            <a:off x="6231636" y="2267712"/>
+            <a:ext cx="5600700" cy="566928"/>
+          </a:xfrm>
+          <a:prstGeom prst="rect">
+            <a:avLst/>
+          </a:prstGeom>
+          <a:noFill/>
+        </p:spPr>
+        <p:txBody>
+          <a:bodyPr wrap="square" lIns="0" rIns="0" tIns="0" bIns="0" anchor="ctr"/>
+          <a:lstStyle/>
+          <a:p>
+            <a:pPr marL="0" indent="0" algn="l">
+              <a:spcAft>
+                <a:spcPts val="0"/>
+              </a:spcAft>
+              <a:buNone/>
+            </a:pPr>
+            <a:r>
+              <a:rPr sz="1300" b="1" i="0">
+                <a:solidFill>
+                  <a:srgbClr val="333D47"/>
+                </a:solidFill>
+                <a:latin typeface="Arial"/>
+                <a:ea typeface="Microsoft JhengHei"/>
+              </a:rPr>
+              <a:t>Less rule maintenance expected: accuracy depends mainly on the AI model, OCR output and prompt.</a:t>
+            </a:r>
+          </a:p>
+        </p:txBody>
+      </p:sp>
+      <p:sp>
+        <p:nvSpPr>
+          <p:cNvPr id="18" name="Rectangle 17"/>
+          <p:cNvSpPr/>
+          <p:nvPr/>
+        </p:nvSpPr>
+        <p:spPr>
+          <a:xfrm>
+            <a:off x="6231636" y="2907792"/>
+            <a:ext cx="5600700" cy="1225296"/>
+          </a:xfrm>
+          <a:prstGeom prst="rect">
+            <a:avLst/>
+          </a:prstGeom>
+          <a:solidFill>
+            <a:srgbClr val="E6F2EA"/>
+          </a:solidFill>
+          <a:ln>
+            <a:noFill/>
+          </a:ln>
+        </p:spPr>
+        <p:txBody>
+          <a:bodyPr rtlCol="0" anchor="t" wrap="square" lIns="164592" rIns="164592" tIns="109728" bIns="109728"/>
+          <a:lstStyle/>
+          <a:p>
+            <a:pPr algn="l" marL="0" indent="0">
+              <a:spcAft>
+                <a:spcPts val="400"/>
+              </a:spcAft>
+              <a:buNone/>
+            </a:pPr>
+            <a:r>
+              <a:rPr sz="1500" b="1" i="0">
+                <a:solidFill>
+                  <a:srgbClr val="1E7B4A"/>
+                </a:solidFill>
+                <a:latin typeface="Arial"/>
+                <a:ea typeface="Microsoft JhengHei"/>
+              </a:rPr>
+              <a:t>Pros</a:t>
+            </a:r>
+          </a:p>
+          <a:p>
+            <a:pPr marL="182880" indent="-182880" algn="l">
+              <a:spcAft>
+                <a:spcPts val="300"/>
+              </a:spcAft>
+              <a:buFont typeface="Arial"/>
+              <a:buChar char="•"/>
+            </a:pPr>
+            <a:r>
+              <a:rPr sz="1300" b="1" i="0">
+                <a:solidFill>
+                  <a:srgbClr val="333D47"/>
+                </a:solidFill>
+                <a:latin typeface="Arial"/>
+                <a:ea typeface="Microsoft JhengHei"/>
+              </a:rPr>
+              <a:t>Measured: </a:t>
+            </a:r>
+            <a:r>
+              <a:rPr sz="1300" b="0" i="0">
+                <a:solidFill>
+                  <a:srgbClr val="333D47"/>
+                </a:solidFill>
+                <a:latin typeface="Arial"/>
+                <a:ea typeface="Microsoft JhengHei"/>
+              </a:rPr>
+              <a:t>highest accuracy before any tuning on these receipts.</a:t>
+            </a:r>
+          </a:p>
+          <a:p>
+            <a:pPr marL="182880" indent="-182880" algn="l">
+              <a:spcAft>
+                <a:spcPts val="300"/>
+              </a:spcAft>
+              <a:buFont typeface="Arial"/>
+              <a:buChar char="•"/>
+            </a:pPr>
+            <a:r>
+              <a:rPr sz="1300" b="0" i="0">
+                <a:solidFill>
+                  <a:srgbClr val="333D47"/>
+                </a:solidFill>
+                <a:latin typeface="Arial"/>
+                <a:ea typeface="Microsoft JhengHei"/>
+              </a:rPr>
+              <a:t>Reads varied formats using existing model capabilities.</a:t>
+            </a:r>
+          </a:p>
+          <a:p>
+            <a:pPr marL="182880" indent="-182880" algn="l">
+              <a:spcAft>
+                <a:spcPts val="0"/>
+              </a:spcAft>
+              <a:buFont typeface="Arial"/>
+              <a:buChar char="•"/>
+            </a:pPr>
+            <a:r>
+              <a:rPr sz="1300" b="1" i="0">
+                <a:solidFill>
+                  <a:srgbClr val="333D47"/>
+                </a:solidFill>
+                <a:latin typeface="Arial"/>
+                <a:ea typeface="Microsoft JhengHei"/>
+              </a:rPr>
+              <a:t>Measured: </a:t>
+            </a:r>
+            <a:r>
+              <a:rPr sz="1300" b="0" i="0">
+                <a:solidFill>
+                  <a:srgbClr val="333D47"/>
+                </a:solidFill>
+                <a:latin typeface="Arial"/>
+                <a:ea typeface="Microsoft JhengHei"/>
+              </a:rPr>
+              <a:t>faster, 6.2 s vs 13.9 s per receipt.</a:t>
+            </a:r>
+          </a:p>
+        </p:txBody>
+      </p:sp>
+      <p:sp>
+        <p:nvSpPr>
+          <p:cNvPr id="19" name="Rectangle 18"/>
+          <p:cNvSpPr/>
+          <p:nvPr/>
+        </p:nvSpPr>
+        <p:spPr>
+          <a:xfrm>
+            <a:off x="6231636" y="4206240"/>
+            <a:ext cx="5600700" cy="1225296"/>
+          </a:xfrm>
+          <a:prstGeom prst="rect">
+            <a:avLst/>
+          </a:prstGeom>
+          <a:solidFill>
+            <a:srgbClr val="FBE7EC"/>
+          </a:solidFill>
+          <a:ln>
+            <a:noFill/>
+          </a:ln>
+        </p:spPr>
+        <p:txBody>
+          <a:bodyPr rtlCol="0" anchor="t" wrap="square" lIns="164592" rIns="164592" tIns="109728" bIns="109728"/>
+          <a:lstStyle/>
+          <a:p>
+            <a:pPr algn="l" marL="0" indent="0">
+              <a:spcAft>
+                <a:spcPts val="400"/>
+              </a:spcAft>
+              <a:buNone/>
+            </a:pPr>
+            <a:r>
+              <a:rPr sz="1500" b="1" i="0">
+                <a:solidFill>
+                  <a:srgbClr val="D31145"/>
+                </a:solidFill>
+                <a:latin typeface="Arial"/>
+                <a:ea typeface="Microsoft JhengHei"/>
+              </a:rPr>
+              <a:t>Cons</a:t>
+            </a:r>
+          </a:p>
+          <a:p>
+            <a:pPr marL="182880" indent="-182880" algn="l">
+              <a:spcAft>
+                <a:spcPts val="300"/>
+              </a:spcAft>
+              <a:buFont typeface="Arial"/>
+              <a:buChar char="•"/>
+            </a:pPr>
+            <a:r>
+              <a:rPr sz="1300" b="1" i="0">
+                <a:solidFill>
+                  <a:srgbClr val="333D47"/>
+                </a:solidFill>
+                <a:latin typeface="Arial"/>
+                <a:ea typeface="Microsoft JhengHei"/>
+              </a:rPr>
+              <a:t>Measured: </a:t>
+            </a:r>
+            <a:r>
+              <a:rPr sz="1300" b="0" i="0">
+                <a:solidFill>
+                  <a:srgbClr val="333D47"/>
+                </a:solidFill>
+                <a:latin typeface="Arial"/>
+                <a:ea typeface="Microsoft JhengHei"/>
+              </a:rPr>
+              <a:t>still makes mistakes, e.g. a sub total taken as the total.</a:t>
+            </a:r>
+          </a:p>
+          <a:p>
+            <a:pPr marL="182880" indent="-182880" algn="l">
+              <a:spcAft>
+                <a:spcPts val="300"/>
+              </a:spcAft>
+              <a:buFont typeface="Arial"/>
+              <a:buChar char="•"/>
+            </a:pPr>
+            <a:r>
+              <a:rPr sz="1300" b="0" i="0">
+                <a:solidFill>
+                  <a:srgbClr val="333D47"/>
+                </a:solidFill>
+                <a:latin typeface="Arial"/>
+                <a:ea typeface="Microsoft JhengHei"/>
+              </a:rPr>
+              <a:t>Less direct control: results depend on model, OCR, prompt.</a:t>
+            </a:r>
+          </a:p>
+          <a:p>
+            <a:pPr marL="182880" indent="-182880" algn="l">
+              <a:spcAft>
+                <a:spcPts val="0"/>
+              </a:spcAft>
+              <a:buFont typeface="Arial"/>
+              <a:buChar char="•"/>
+            </a:pPr>
+            <a:r>
+              <a:rPr sz="1300" b="0" i="0">
+                <a:solidFill>
+                  <a:srgbClr val="333D47"/>
+                </a:solidFill>
+                <a:latin typeface="Arial"/>
+                <a:ea typeface="Microsoft JhengHei"/>
+              </a:rPr>
+              <a:t>API fees; needs validation, monitoring and prompt upkeep.</a:t>
+            </a:r>
+          </a:p>
+        </p:txBody>
+      </p:sp>
+      <p:sp>
+        <p:nvSpPr>
+          <p:cNvPr id="20" name="Rectangle 19"/>
+          <p:cNvSpPr/>
+          <p:nvPr/>
+        </p:nvSpPr>
+        <p:spPr>
+          <a:xfrm>
+            <a:off x="356616" y="5486400"/>
+            <a:ext cx="10607040" cy="411480"/>
+          </a:xfrm>
+          <a:prstGeom prst="rect">
+            <a:avLst/>
+          </a:prstGeom>
+          <a:solidFill>
+            <a:srgbClr val="F2F2F2"/>
+          </a:solidFill>
+          <a:ln>
+            <a:noFill/>
+          </a:ln>
+        </p:spPr>
+        <p:txBody>
+          <a:bodyPr rtlCol="0" anchor="ctr" wrap="square" lIns="164592" rIns="164592" tIns="109728" bIns="109728"/>
+          <a:lstStyle/>
+          <a:p>
+            <a:pPr algn="l" marL="0" indent="0">
+              <a:spcAft>
+                <a:spcPts val="0"/>
+              </a:spcAft>
+              <a:buNone/>
+            </a:pPr>
+            <a:r>
+              <a:rPr sz="1400" b="1" i="0">
+                <a:solidFill>
+                  <a:srgbClr val="333D47"/>
+                </a:solidFill>
+                <a:latin typeface="Arial"/>
+                <a:ea typeface="Microsoft JhengHei"/>
+              </a:rPr>
+              <a:t>Neither is maintenance free. </a:t>
+            </a:r>
+            <a:r>
+              <a:rPr sz="1400" b="0" i="0">
+                <a:solidFill>
+                  <a:srgbClr val="333D47"/>
+                </a:solidFill>
+                <a:latin typeface="Arial"/>
+                <a:ea typeface="Microsoft JhengHei"/>
+              </a:rPr>
+              <a:t>The difference is where the effort sits: rules for every layout, or one prompt plus validation.</a:t>
+            </a:r>
+          </a:p>
+        </p:txBody>
+      </p:sp>
+    </p:spTree>
+  </p:cSld>
+  <p:clrMapOvr>
+    <a:masterClrMapping/>
+  </p:clrMapOvr>
+</p:sld>
+</file>
+
+<file path=ppt/slides/slide12.xml><?xml version="1.0" encoding="utf-8"?>
+<p:sld xmlns:a="http://schemas.openxmlformats.org/drawingml/2006/main" xmlns:p="http://schemas.openxmlformats.org/presentationml/2006/main" xmlns:r="http://schemas.openxmlformats.org/officeDocument/2006/relationships">
+  <p:cSld>
+    <p:spTree>
+      <p:nvGrpSpPr>
+        <p:cNvPr id="1" name=""/>
+        <p:cNvGrpSpPr/>
+        <p:nvPr/>
+      </p:nvGrpSpPr>
+      <p:grpSpPr/>
+      <p:sp>
+        <p:nvSpPr>
+          <p:cNvPr id="4" name="Text Placeholder 3"/>
+          <p:cNvSpPr>
+            <a:spLocks noGrp="1"/>
+          </p:cNvSpPr>
+          <p:nvPr>
+            <p:ph type="body" idx="10" sz="quarter"/>
+          </p:nvPr>
+        </p:nvSpPr>
+        <p:spPr>
+          <a:xfrm>
+            <a:off x="356616" y="502920"/>
+            <a:ext cx="11155680" cy="566928"/>
+          </a:xfrm>
+        </p:spPr>
+        <p:txBody>
+          <a:bodyPr lIns="0"/>
+          <a:lstStyle/>
+          <a:p>
+            <a:r>
+              <a:rPr sz="2800" b="1">
+                <a:solidFill>
+                  <a:srgbClr val="333D47"/>
+                </a:solidFill>
+                <a:latin typeface="Arial"/>
+                <a:ea typeface="Microsoft JhengHei"/>
+              </a:rPr>
               <a:t>Conclusion and Next Steps</a:t>
             </a:r>
           </a:p>
@@ -8823,7 +10651,7 @@
                           <a:latin typeface="Arial"/>
                           <a:ea typeface="Microsoft JhengHei"/>
                         </a:rPr>
-                        <a:t>Revised the prompt: clearer field definitions, text kept in page rows, a few general checks</a:t>
+                        <a:t>Revised the prompt wording: clearer definitions of each field</a:t>
                       </a:r>
                     </a:p>
                   </a:txBody>
@@ -9130,6 +10958,3013 @@
 </file>
 
 <file path=ppt/slides/slide5.xml><?xml version="1.0" encoding="utf-8"?>
+<p:sld xmlns:a="http://schemas.openxmlformats.org/drawingml/2006/main" xmlns:p="http://schemas.openxmlformats.org/presentationml/2006/main" xmlns:r="http://schemas.openxmlformats.org/officeDocument/2006/relationships">
+  <p:cSld>
+    <p:spTree>
+      <p:nvGrpSpPr>
+        <p:cNvPr id="1" name=""/>
+        <p:cNvGrpSpPr/>
+        <p:nvPr/>
+      </p:nvGrpSpPr>
+      <p:grpSpPr/>
+      <p:sp>
+        <p:nvSpPr>
+          <p:cNvPr id="4" name="Text Placeholder 3"/>
+          <p:cNvSpPr>
+            <a:spLocks noGrp="1"/>
+          </p:cNvSpPr>
+          <p:nvPr>
+            <p:ph type="body" idx="10" sz="quarter"/>
+          </p:nvPr>
+        </p:nvSpPr>
+        <p:spPr>
+          <a:xfrm>
+            <a:off x="356616" y="502920"/>
+            <a:ext cx="11155680" cy="566928"/>
+          </a:xfrm>
+        </p:spPr>
+        <p:txBody>
+          <a:bodyPr lIns="0"/>
+          <a:lstStyle/>
+          <a:p>
+            <a:r>
+              <a:rPr sz="2800" b="1">
+                <a:solidFill>
+                  <a:srgbClr val="333D47"/>
+                </a:solidFill>
+                <a:latin typeface="Arial"/>
+                <a:ea typeface="Microsoft JhengHei"/>
+              </a:rPr>
+              <a:t>Accuracy by Field (Development Results)</a:t>
+            </a:r>
+          </a:p>
+        </p:txBody>
+      </p:sp>
+      <p:sp>
+        <p:nvSpPr>
+          <p:cNvPr id="10" name="Slide Number Placeholder 5">
+            <a:extLst>
+              <a:ext uri="{FF2B5EF4-FFF2-40B4-BE49-F238E27FC236}">
+                <a16:creationId xmlns:a16="http://schemas.microsoft.com/office/drawing/2014/main" id="{3E493E1F-F28C-FD47-B996-3EBF17D328AE}"/>
+              </a:ext>
+            </a:extLst>
+          </p:cNvPr>
+          <p:cNvSpPr>
+            <a:spLocks noGrp="1"/>
+          </p:cNvSpPr>
+          <p:nvPr>
+            <p:ph type="sldNum" sz="quarter" idx="4"/>
+          </p:nvPr>
+        </p:nvSpPr>
+        <p:spPr>
+          <a:xfrm>
+            <a:off x="359999" y="6264872"/>
+            <a:ext cx="360000" cy="360000"/>
+          </a:xfrm>
+          <a:prstGeom prst="rect">
+            <a:avLst/>
+          </a:prstGeom>
+        </p:spPr>
+        <p:txBody>
+          <a:bodyPr vert="horz" lIns="91440" tIns="45720" rIns="91440" bIns="45720" rtlCol="0" anchor="ctr"/>
+          <a:lstStyle>
+            <a:lvl1pPr algn="l">
+              <a:defRPr sz="800" b="0" i="0">
+                <a:solidFill>
+                  <a:schemeClr val="tx1"/>
+                </a:solidFill>
+                <a:latin typeface="Arial" panose="020B0604020202020204" pitchFamily="34" charset="0"/>
+                <a:cs typeface="Arial" panose="020B0604020202020204" pitchFamily="34" charset="0"/>
+              </a:defRPr>
+            </a:lvl1pPr>
+          </a:lstStyle>
+          <a:p>
+            <a:fld id="{18A41853-EF22-D446-BDBC-A7CF3FE93503}" type="slidenum">
+              <a:rPr lang="en-US" smtClean="0"/>
+              <a:pPr/>
+              <a:t>‹#›</a:t>
+            </a:fld>
+            <a:endParaRPr lang="en-US" dirty="0"/>
+          </a:p>
+        </p:txBody>
+      </p:sp>
+      <p:sp>
+        <p:nvSpPr>
+          <p:cNvPr id="11" name="TextBox 10"/>
+          <p:cNvSpPr txBox="1"/>
+          <p:nvPr/>
+        </p:nvSpPr>
+        <p:spPr>
+          <a:xfrm>
+            <a:off x="356616" y="1115568"/>
+            <a:ext cx="11475720" cy="457200"/>
+          </a:xfrm>
+          <a:prstGeom prst="rect">
+            <a:avLst/>
+          </a:prstGeom>
+          <a:noFill/>
+        </p:spPr>
+        <p:txBody>
+          <a:bodyPr wrap="square" lIns="0" rIns="0" tIns="0" bIns="0" anchor="t"/>
+          <a:lstStyle/>
+          <a:p>
+            <a:pPr marL="0" indent="0" algn="l">
+              <a:spcAft>
+                <a:spcPts val="0"/>
+              </a:spcAft>
+              <a:buNone/>
+            </a:pPr>
+            <a:r>
+              <a:rPr sz="1700" b="0" i="0">
+                <a:solidFill>
+                  <a:srgbClr val="D31145"/>
+                </a:solidFill>
+                <a:latin typeface="Arial"/>
+                <a:ea typeface="Microsoft JhengHei"/>
+              </a:rPr>
+              <a:t>After tuning, all three approaches miss the same two fields; the rules also miss patient and receipt numbers.</a:t>
+            </a:r>
+          </a:p>
+        </p:txBody>
+      </p:sp>
+      <p:graphicFrame>
+        <p:nvGraphicFramePr>
+          <p:cNvPr id="12" name="Table 11"/>
+          <p:cNvGraphicFramePr>
+            <a:graphicFrameLocks noGrp="1"/>
+          </p:cNvGraphicFramePr>
+          <p:nvPr/>
+        </p:nvGraphicFramePr>
+        <p:xfrm>
+          <a:off x="356616" y="1783080"/>
+          <a:ext cx="11475720" cy="3310128"/>
+        </p:xfrm>
+        <a:graphic>
+          <a:graphicData uri="http://schemas.openxmlformats.org/drawingml/2006/table">
+            <a:tbl>
+              <a:tblPr firstRow="0" bandRow="0">
+                <a:tableStyleId>{2D5ABB26-0587-4C30-8999-92F81FD0307C}</a:tableStyleId>
+              </a:tblPr>
+              <a:tblGrid>
+                <a:gridCol w="2514600"/>
+                <a:gridCol w="1417320"/>
+                <a:gridCol w="2514600"/>
+                <a:gridCol w="2514600"/>
+                <a:gridCol w="2514600"/>
+              </a:tblGrid>
+              <a:tr h="566928">
+                <a:tc>
+                  <a:txBody>
+                    <a:bodyPr wrap="square"/>
+                    <a:lstStyle/>
+                    <a:p>
+                      <a:pPr algn="l"/>
+                      <a:r>
+                        <a:rPr sz="1300" b="1" i="0">
+                          <a:solidFill>
+                            <a:srgbClr val="FFFFFF"/>
+                          </a:solidFill>
+                          <a:latin typeface="Arial"/>
+                          <a:ea typeface="Microsoft JhengHei"/>
+                        </a:rPr>
+                        <a:t>Field</a:t>
+                      </a:r>
+                    </a:p>
+                  </a:txBody>
+                  <a:tcPr marL="91440" marR="91440" marT="45720" marB="45720" anchor="ctr">
+                    <a:lnL w="0">
+                      <a:noFill/>
+                    </a:lnL>
+                    <a:lnR w="0">
+                      <a:noFill/>
+                    </a:lnR>
+                    <a:lnT w="0">
+                      <a:noFill/>
+                    </a:lnT>
+                    <a:lnB w="0">
+                      <a:noFill/>
+                    </a:lnB>
+                    <a:solidFill>
+                      <a:srgbClr val="333D47"/>
+                    </a:solidFill>
+                  </a:tcPr>
+                </a:tc>
+                <a:tc>
+                  <a:txBody>
+                    <a:bodyPr wrap="square"/>
+                    <a:lstStyle/>
+                    <a:p>
+                      <a:pPr algn="ctr"/>
+                      <a:r>
+                        <a:rPr sz="1300" b="1" i="0">
+                          <a:solidFill>
+                            <a:srgbClr val="FFFFFF"/>
+                          </a:solidFill>
+                          <a:latin typeface="Arial"/>
+                          <a:ea typeface="Microsoft JhengHei"/>
+                        </a:rPr>
+                        <a:t>Receipts</a:t>
+                      </a:r>
+                    </a:p>
+                  </a:txBody>
+                  <a:tcPr marL="91440" marR="91440" marT="45720" marB="45720" anchor="ctr">
+                    <a:lnL w="0">
+                      <a:noFill/>
+                    </a:lnL>
+                    <a:lnR w="0">
+                      <a:noFill/>
+                    </a:lnR>
+                    <a:lnT w="0">
+                      <a:noFill/>
+                    </a:lnT>
+                    <a:lnB w="0">
+                      <a:noFill/>
+                    </a:lnB>
+                    <a:solidFill>
+                      <a:srgbClr val="333D47"/>
+                    </a:solidFill>
+                  </a:tcPr>
+                </a:tc>
+                <a:tc>
+                  <a:txBody>
+                    <a:bodyPr wrap="square"/>
+                    <a:lstStyle/>
+                    <a:p>
+                      <a:pPr algn="ctr"/>
+                      <a:r>
+                        <a:rPr sz="1300" b="1" i="0">
+                          <a:solidFill>
+                            <a:srgbClr val="FFFFFF"/>
+                          </a:solidFill>
+                          <a:latin typeface="Arial"/>
+                          <a:ea typeface="Microsoft JhengHei"/>
+                        </a:rPr>
+                        <a:t>PaddleOCR Light + rules</a:t>
+                      </a:r>
+                    </a:p>
+                  </a:txBody>
+                  <a:tcPr marL="91440" marR="91440" marT="45720" marB="45720" anchor="ctr">
+                    <a:lnL w="0">
+                      <a:noFill/>
+                    </a:lnL>
+                    <a:lnR w="0">
+                      <a:noFill/>
+                    </a:lnR>
+                    <a:lnT w="0">
+                      <a:noFill/>
+                    </a:lnT>
+                    <a:lnB w="0">
+                      <a:noFill/>
+                    </a:lnB>
+                    <a:solidFill>
+                      <a:srgbClr val="333D47"/>
+                    </a:solidFill>
+                  </a:tcPr>
+                </a:tc>
+                <a:tc>
+                  <a:txBody>
+                    <a:bodyPr wrap="square"/>
+                    <a:lstStyle/>
+                    <a:p>
+                      <a:pPr algn="ctr"/>
+                      <a:r>
+                        <a:rPr sz="1300" b="1" i="0">
+                          <a:solidFill>
+                            <a:srgbClr val="FFFFFF"/>
+                          </a:solidFill>
+                          <a:latin typeface="Arial"/>
+                          <a:ea typeface="Microsoft JhengHei"/>
+                        </a:rPr>
+                        <a:t>Azure DI + rules</a:t>
+                      </a:r>
+                    </a:p>
+                  </a:txBody>
+                  <a:tcPr marL="91440" marR="91440" marT="45720" marB="45720" anchor="ctr">
+                    <a:lnL w="0">
+                      <a:noFill/>
+                    </a:lnL>
+                    <a:lnR w="0">
+                      <a:noFill/>
+                    </a:lnR>
+                    <a:lnT w="0">
+                      <a:noFill/>
+                    </a:lnT>
+                    <a:lnB w="0">
+                      <a:noFill/>
+                    </a:lnB>
+                    <a:solidFill>
+                      <a:srgbClr val="333D47"/>
+                    </a:solidFill>
+                  </a:tcPr>
+                </a:tc>
+                <a:tc>
+                  <a:txBody>
+                    <a:bodyPr wrap="square"/>
+                    <a:lstStyle/>
+                    <a:p>
+                      <a:pPr algn="ctr"/>
+                      <a:r>
+                        <a:rPr sz="1300" b="1" i="0">
+                          <a:solidFill>
+                            <a:srgbClr val="FFFFFF"/>
+                          </a:solidFill>
+                          <a:latin typeface="Arial"/>
+                          <a:ea typeface="Microsoft JhengHei"/>
+                        </a:rPr>
+                        <a:t>Azure DI + AOAI, prompt v2</a:t>
+                      </a:r>
+                    </a:p>
+                  </a:txBody>
+                  <a:tcPr marL="91440" marR="91440" marT="45720" marB="45720" anchor="ctr">
+                    <a:lnL w="0">
+                      <a:noFill/>
+                    </a:lnL>
+                    <a:lnR w="0">
+                      <a:noFill/>
+                    </a:lnR>
+                    <a:lnT w="0">
+                      <a:noFill/>
+                    </a:lnT>
+                    <a:lnB w="0">
+                      <a:noFill/>
+                    </a:lnB>
+                    <a:solidFill>
+                      <a:srgbClr val="333D47"/>
+                    </a:solidFill>
+                  </a:tcPr>
+                </a:tc>
+              </a:tr>
+              <a:tr h="457200">
+                <a:tc>
+                  <a:txBody>
+                    <a:bodyPr wrap="square"/>
+                    <a:lstStyle/>
+                    <a:p>
+                      <a:pPr algn="l"/>
+                      <a:r>
+                        <a:rPr sz="1400" b="1" i="0">
+                          <a:solidFill>
+                            <a:srgbClr val="333D47"/>
+                          </a:solidFill>
+                          <a:latin typeface="Arial"/>
+                          <a:ea typeface="Microsoft JhengHei"/>
+                        </a:rPr>
+                        <a:t>Doctor</a:t>
+                      </a:r>
+                    </a:p>
+                  </a:txBody>
+                  <a:tcPr marL="91440" marR="91440" marT="45720" marB="45720" anchor="ctr">
+                    <a:lnL w="0">
+                      <a:noFill/>
+                    </a:lnL>
+                    <a:lnR w="0">
+                      <a:noFill/>
+                    </a:lnR>
+                    <a:lnT w="0">
+                      <a:noFill/>
+                    </a:lnT>
+                    <a:lnB w="9525" cmpd="sng">
+                      <a:solidFill>
+                        <a:srgbClr val="BFBFBF"/>
+                      </a:solidFill>
+                    </a:lnB>
+                    <a:noFill/>
+                  </a:tcPr>
+                </a:tc>
+                <a:tc>
+                  <a:txBody>
+                    <a:bodyPr wrap="square"/>
+                    <a:lstStyle/>
+                    <a:p>
+                      <a:pPr algn="ctr"/>
+                      <a:r>
+                        <a:rPr sz="1400" b="0" i="0">
+                          <a:solidFill>
+                            <a:srgbClr val="5F6770"/>
+                          </a:solidFill>
+                          <a:latin typeface="Arial"/>
+                          <a:ea typeface="Microsoft JhengHei"/>
+                        </a:rPr>
+                        <a:t>9</a:t>
+                      </a:r>
+                    </a:p>
+                  </a:txBody>
+                  <a:tcPr marL="91440" marR="91440" marT="45720" marB="45720" anchor="ctr">
+                    <a:lnL w="0">
+                      <a:noFill/>
+                    </a:lnL>
+                    <a:lnR w="0">
+                      <a:noFill/>
+                    </a:lnR>
+                    <a:lnT w="0">
+                      <a:noFill/>
+                    </a:lnT>
+                    <a:lnB w="9525" cmpd="sng">
+                      <a:solidFill>
+                        <a:srgbClr val="BFBFBF"/>
+                      </a:solidFill>
+                    </a:lnB>
+                    <a:noFill/>
+                  </a:tcPr>
+                </a:tc>
+                <a:tc>
+                  <a:txBody>
+                    <a:bodyPr wrap="square"/>
+                    <a:lstStyle/>
+                    <a:p>
+                      <a:pPr algn="ctr"/>
+                      <a:r>
+                        <a:rPr sz="1600" b="0" i="0">
+                          <a:solidFill>
+                            <a:srgbClr val="333D47"/>
+                          </a:solidFill>
+                          <a:latin typeface="Arial"/>
+                          <a:ea typeface="Microsoft JhengHei"/>
+                        </a:rPr>
+                        <a:t>88.9%</a:t>
+                      </a:r>
+                      <a:r>
+                        <a:rPr sz="1100" b="0" i="0">
+                          <a:solidFill>
+                            <a:srgbClr val="5F6770"/>
+                          </a:solidFill>
+                          <a:latin typeface="Arial"/>
+                          <a:ea typeface="Microsoft JhengHei"/>
+                        </a:rPr>
+                        <a:t>  (8/9)</a:t>
+                      </a:r>
+                    </a:p>
+                  </a:txBody>
+                  <a:tcPr marL="91440" marR="91440" marT="45720" marB="45720" anchor="ctr">
+                    <a:lnL w="0">
+                      <a:noFill/>
+                    </a:lnL>
+                    <a:lnR w="0">
+                      <a:noFill/>
+                    </a:lnR>
+                    <a:lnT w="0">
+                      <a:noFill/>
+                    </a:lnT>
+                    <a:lnB w="9525" cmpd="sng">
+                      <a:solidFill>
+                        <a:srgbClr val="BFBFBF"/>
+                      </a:solidFill>
+                    </a:lnB>
+                    <a:noFill/>
+                  </a:tcPr>
+                </a:tc>
+                <a:tc>
+                  <a:txBody>
+                    <a:bodyPr wrap="square"/>
+                    <a:lstStyle/>
+                    <a:p>
+                      <a:pPr algn="ctr"/>
+                      <a:r>
+                        <a:rPr sz="1600" b="0" i="0">
+                          <a:solidFill>
+                            <a:srgbClr val="333D47"/>
+                          </a:solidFill>
+                          <a:latin typeface="Arial"/>
+                          <a:ea typeface="Microsoft JhengHei"/>
+                        </a:rPr>
+                        <a:t>88.9%</a:t>
+                      </a:r>
+                      <a:r>
+                        <a:rPr sz="1100" b="0" i="0">
+                          <a:solidFill>
+                            <a:srgbClr val="5F6770"/>
+                          </a:solidFill>
+                          <a:latin typeface="Arial"/>
+                          <a:ea typeface="Microsoft JhengHei"/>
+                        </a:rPr>
+                        <a:t>  (8/9)</a:t>
+                      </a:r>
+                    </a:p>
+                  </a:txBody>
+                  <a:tcPr marL="91440" marR="91440" marT="45720" marB="45720" anchor="ctr">
+                    <a:lnL w="0">
+                      <a:noFill/>
+                    </a:lnL>
+                    <a:lnR w="0">
+                      <a:noFill/>
+                    </a:lnR>
+                    <a:lnT w="0">
+                      <a:noFill/>
+                    </a:lnT>
+                    <a:lnB w="9525" cmpd="sng">
+                      <a:solidFill>
+                        <a:srgbClr val="BFBFBF"/>
+                      </a:solidFill>
+                    </a:lnB>
+                    <a:noFill/>
+                  </a:tcPr>
+                </a:tc>
+                <a:tc>
+                  <a:txBody>
+                    <a:bodyPr wrap="square"/>
+                    <a:lstStyle/>
+                    <a:p>
+                      <a:pPr algn="ctr"/>
+                      <a:r>
+                        <a:rPr sz="1600" b="0" i="0">
+                          <a:solidFill>
+                            <a:srgbClr val="333D47"/>
+                          </a:solidFill>
+                          <a:latin typeface="Arial"/>
+                          <a:ea typeface="Microsoft JhengHei"/>
+                        </a:rPr>
+                        <a:t>88.9%</a:t>
+                      </a:r>
+                      <a:r>
+                        <a:rPr sz="1100" b="0" i="0">
+                          <a:solidFill>
+                            <a:srgbClr val="5F6770"/>
+                          </a:solidFill>
+                          <a:latin typeface="Arial"/>
+                          <a:ea typeface="Microsoft JhengHei"/>
+                        </a:rPr>
+                        <a:t>  (8/9)</a:t>
+                      </a:r>
+                    </a:p>
+                  </a:txBody>
+                  <a:tcPr marL="91440" marR="91440" marT="45720" marB="45720" anchor="ctr">
+                    <a:lnL w="0">
+                      <a:noFill/>
+                    </a:lnL>
+                    <a:lnR w="0">
+                      <a:noFill/>
+                    </a:lnR>
+                    <a:lnT w="0">
+                      <a:noFill/>
+                    </a:lnT>
+                    <a:lnB w="9525" cmpd="sng">
+                      <a:solidFill>
+                        <a:srgbClr val="BFBFBF"/>
+                      </a:solidFill>
+                    </a:lnB>
+                    <a:noFill/>
+                  </a:tcPr>
+                </a:tc>
+              </a:tr>
+              <a:tr h="457200">
+                <a:tc>
+                  <a:txBody>
+                    <a:bodyPr wrap="square"/>
+                    <a:lstStyle/>
+                    <a:p>
+                      <a:pPr algn="l"/>
+                      <a:r>
+                        <a:rPr sz="1400" b="1" i="0">
+                          <a:solidFill>
+                            <a:srgbClr val="333D47"/>
+                          </a:solidFill>
+                          <a:latin typeface="Arial"/>
+                          <a:ea typeface="Microsoft JhengHei"/>
+                        </a:rPr>
+                        <a:t>Registration no.</a:t>
+                      </a:r>
+                    </a:p>
+                  </a:txBody>
+                  <a:tcPr marL="91440" marR="91440" marT="45720" marB="45720" anchor="ctr">
+                    <a:lnL w="0">
+                      <a:noFill/>
+                    </a:lnL>
+                    <a:lnR w="0">
+                      <a:noFill/>
+                    </a:lnR>
+                    <a:lnT w="0">
+                      <a:noFill/>
+                    </a:lnT>
+                    <a:lnB w="9525" cmpd="sng">
+                      <a:solidFill>
+                        <a:srgbClr val="BFBFBF"/>
+                      </a:solidFill>
+                    </a:lnB>
+                    <a:noFill/>
+                  </a:tcPr>
+                </a:tc>
+                <a:tc>
+                  <a:txBody>
+                    <a:bodyPr wrap="square"/>
+                    <a:lstStyle/>
+                    <a:p>
+                      <a:pPr algn="ctr"/>
+                      <a:r>
+                        <a:rPr sz="1400" b="0" i="0">
+                          <a:solidFill>
+                            <a:srgbClr val="5F6770"/>
+                          </a:solidFill>
+                          <a:latin typeface="Arial"/>
+                          <a:ea typeface="Microsoft JhengHei"/>
+                        </a:rPr>
+                        <a:t>6*</a:t>
+                      </a:r>
+                    </a:p>
+                  </a:txBody>
+                  <a:tcPr marL="91440" marR="91440" marT="45720" marB="45720" anchor="ctr">
+                    <a:lnL w="0">
+                      <a:noFill/>
+                    </a:lnL>
+                    <a:lnR w="0">
+                      <a:noFill/>
+                    </a:lnR>
+                    <a:lnT w="0">
+                      <a:noFill/>
+                    </a:lnT>
+                    <a:lnB w="9525" cmpd="sng">
+                      <a:solidFill>
+                        <a:srgbClr val="BFBFBF"/>
+                      </a:solidFill>
+                    </a:lnB>
+                    <a:noFill/>
+                  </a:tcPr>
+                </a:tc>
+                <a:tc>
+                  <a:txBody>
+                    <a:bodyPr wrap="square"/>
+                    <a:lstStyle/>
+                    <a:p>
+                      <a:pPr algn="ctr"/>
+                      <a:r>
+                        <a:rPr sz="1600" b="1" i="0">
+                          <a:solidFill>
+                            <a:srgbClr val="1E7B4A"/>
+                          </a:solidFill>
+                          <a:latin typeface="Arial"/>
+                          <a:ea typeface="Microsoft JhengHei"/>
+                        </a:rPr>
+                        <a:t>100.0%</a:t>
+                      </a:r>
+                      <a:r>
+                        <a:rPr sz="1100" b="0" i="0">
+                          <a:solidFill>
+                            <a:srgbClr val="5F6770"/>
+                          </a:solidFill>
+                          <a:latin typeface="Arial"/>
+                          <a:ea typeface="Microsoft JhengHei"/>
+                        </a:rPr>
+                        <a:t>  (6/6)</a:t>
+                      </a:r>
+                    </a:p>
+                  </a:txBody>
+                  <a:tcPr marL="91440" marR="91440" marT="45720" marB="45720" anchor="ctr">
+                    <a:lnL w="0">
+                      <a:noFill/>
+                    </a:lnL>
+                    <a:lnR w="0">
+                      <a:noFill/>
+                    </a:lnR>
+                    <a:lnT w="0">
+                      <a:noFill/>
+                    </a:lnT>
+                    <a:lnB w="9525" cmpd="sng">
+                      <a:solidFill>
+                        <a:srgbClr val="BFBFBF"/>
+                      </a:solidFill>
+                    </a:lnB>
+                    <a:solidFill>
+                      <a:srgbClr val="E6F2EA"/>
+                    </a:solidFill>
+                  </a:tcPr>
+                </a:tc>
+                <a:tc>
+                  <a:txBody>
+                    <a:bodyPr wrap="square"/>
+                    <a:lstStyle/>
+                    <a:p>
+                      <a:pPr algn="ctr"/>
+                      <a:r>
+                        <a:rPr sz="1600" b="1" i="0">
+                          <a:solidFill>
+                            <a:srgbClr val="1E7B4A"/>
+                          </a:solidFill>
+                          <a:latin typeface="Arial"/>
+                          <a:ea typeface="Microsoft JhengHei"/>
+                        </a:rPr>
+                        <a:t>100.0%</a:t>
+                      </a:r>
+                      <a:r>
+                        <a:rPr sz="1100" b="0" i="0">
+                          <a:solidFill>
+                            <a:srgbClr val="5F6770"/>
+                          </a:solidFill>
+                          <a:latin typeface="Arial"/>
+                          <a:ea typeface="Microsoft JhengHei"/>
+                        </a:rPr>
+                        <a:t>  (6/6)</a:t>
+                      </a:r>
+                    </a:p>
+                  </a:txBody>
+                  <a:tcPr marL="91440" marR="91440" marT="45720" marB="45720" anchor="ctr">
+                    <a:lnL w="0">
+                      <a:noFill/>
+                    </a:lnL>
+                    <a:lnR w="0">
+                      <a:noFill/>
+                    </a:lnR>
+                    <a:lnT w="0">
+                      <a:noFill/>
+                    </a:lnT>
+                    <a:lnB w="9525" cmpd="sng">
+                      <a:solidFill>
+                        <a:srgbClr val="BFBFBF"/>
+                      </a:solidFill>
+                    </a:lnB>
+                    <a:solidFill>
+                      <a:srgbClr val="E6F2EA"/>
+                    </a:solidFill>
+                  </a:tcPr>
+                </a:tc>
+                <a:tc>
+                  <a:txBody>
+                    <a:bodyPr wrap="square"/>
+                    <a:lstStyle/>
+                    <a:p>
+                      <a:pPr algn="ctr"/>
+                      <a:r>
+                        <a:rPr sz="1600" b="1" i="0">
+                          <a:solidFill>
+                            <a:srgbClr val="1E7B4A"/>
+                          </a:solidFill>
+                          <a:latin typeface="Arial"/>
+                          <a:ea typeface="Microsoft JhengHei"/>
+                        </a:rPr>
+                        <a:t>100.0%</a:t>
+                      </a:r>
+                      <a:r>
+                        <a:rPr sz="1100" b="0" i="0">
+                          <a:solidFill>
+                            <a:srgbClr val="5F6770"/>
+                          </a:solidFill>
+                          <a:latin typeface="Arial"/>
+                          <a:ea typeface="Microsoft JhengHei"/>
+                        </a:rPr>
+                        <a:t>  (6/6)</a:t>
+                      </a:r>
+                    </a:p>
+                  </a:txBody>
+                  <a:tcPr marL="91440" marR="91440" marT="45720" marB="45720" anchor="ctr">
+                    <a:lnL w="0">
+                      <a:noFill/>
+                    </a:lnL>
+                    <a:lnR w="0">
+                      <a:noFill/>
+                    </a:lnR>
+                    <a:lnT w="0">
+                      <a:noFill/>
+                    </a:lnT>
+                    <a:lnB w="9525" cmpd="sng">
+                      <a:solidFill>
+                        <a:srgbClr val="BFBFBF"/>
+                      </a:solidFill>
+                    </a:lnB>
+                    <a:solidFill>
+                      <a:srgbClr val="E6F2EA"/>
+                    </a:solidFill>
+                  </a:tcPr>
+                </a:tc>
+              </a:tr>
+              <a:tr h="457200">
+                <a:tc>
+                  <a:txBody>
+                    <a:bodyPr wrap="square"/>
+                    <a:lstStyle/>
+                    <a:p>
+                      <a:pPr algn="l"/>
+                      <a:r>
+                        <a:rPr sz="1400" b="1" i="0">
+                          <a:solidFill>
+                            <a:srgbClr val="333D47"/>
+                          </a:solidFill>
+                          <a:latin typeface="Arial"/>
+                          <a:ea typeface="Microsoft JhengHei"/>
+                        </a:rPr>
+                        <a:t>Patient</a:t>
+                      </a:r>
+                    </a:p>
+                  </a:txBody>
+                  <a:tcPr marL="91440" marR="91440" marT="45720" marB="45720" anchor="ctr">
+                    <a:lnL w="0">
+                      <a:noFill/>
+                    </a:lnL>
+                    <a:lnR w="0">
+                      <a:noFill/>
+                    </a:lnR>
+                    <a:lnT w="0">
+                      <a:noFill/>
+                    </a:lnT>
+                    <a:lnB w="9525" cmpd="sng">
+                      <a:solidFill>
+                        <a:srgbClr val="BFBFBF"/>
+                      </a:solidFill>
+                    </a:lnB>
+                    <a:noFill/>
+                  </a:tcPr>
+                </a:tc>
+                <a:tc>
+                  <a:txBody>
+                    <a:bodyPr wrap="square"/>
+                    <a:lstStyle/>
+                    <a:p>
+                      <a:pPr algn="ctr"/>
+                      <a:r>
+                        <a:rPr sz="1400" b="0" i="0">
+                          <a:solidFill>
+                            <a:srgbClr val="5F6770"/>
+                          </a:solidFill>
+                          <a:latin typeface="Arial"/>
+                          <a:ea typeface="Microsoft JhengHei"/>
+                        </a:rPr>
+                        <a:t>9</a:t>
+                      </a:r>
+                    </a:p>
+                  </a:txBody>
+                  <a:tcPr marL="91440" marR="91440" marT="45720" marB="45720" anchor="ctr">
+                    <a:lnL w="0">
+                      <a:noFill/>
+                    </a:lnL>
+                    <a:lnR w="0">
+                      <a:noFill/>
+                    </a:lnR>
+                    <a:lnT w="0">
+                      <a:noFill/>
+                    </a:lnT>
+                    <a:lnB w="9525" cmpd="sng">
+                      <a:solidFill>
+                        <a:srgbClr val="BFBFBF"/>
+                      </a:solidFill>
+                    </a:lnB>
+                    <a:noFill/>
+                  </a:tcPr>
+                </a:tc>
+                <a:tc>
+                  <a:txBody>
+                    <a:bodyPr wrap="square"/>
+                    <a:lstStyle/>
+                    <a:p>
+                      <a:pPr algn="ctr"/>
+                      <a:r>
+                        <a:rPr sz="1600" b="0" i="0">
+                          <a:solidFill>
+                            <a:srgbClr val="333D47"/>
+                          </a:solidFill>
+                          <a:latin typeface="Arial"/>
+                          <a:ea typeface="Microsoft JhengHei"/>
+                        </a:rPr>
+                        <a:t>77.8%</a:t>
+                      </a:r>
+                      <a:r>
+                        <a:rPr sz="1100" b="0" i="0">
+                          <a:solidFill>
+                            <a:srgbClr val="5F6770"/>
+                          </a:solidFill>
+                          <a:latin typeface="Arial"/>
+                          <a:ea typeface="Microsoft JhengHei"/>
+                        </a:rPr>
+                        <a:t>  (7/9)</a:t>
+                      </a:r>
+                    </a:p>
+                  </a:txBody>
+                  <a:tcPr marL="91440" marR="91440" marT="45720" marB="45720" anchor="ctr">
+                    <a:lnL w="0">
+                      <a:noFill/>
+                    </a:lnL>
+                    <a:lnR w="0">
+                      <a:noFill/>
+                    </a:lnR>
+                    <a:lnT w="0">
+                      <a:noFill/>
+                    </a:lnT>
+                    <a:lnB w="9525" cmpd="sng">
+                      <a:solidFill>
+                        <a:srgbClr val="BFBFBF"/>
+                      </a:solidFill>
+                    </a:lnB>
+                    <a:noFill/>
+                  </a:tcPr>
+                </a:tc>
+                <a:tc>
+                  <a:txBody>
+                    <a:bodyPr wrap="square"/>
+                    <a:lstStyle/>
+                    <a:p>
+                      <a:pPr algn="ctr"/>
+                      <a:r>
+                        <a:rPr sz="1600" b="0" i="0">
+                          <a:solidFill>
+                            <a:srgbClr val="333D47"/>
+                          </a:solidFill>
+                          <a:latin typeface="Arial"/>
+                          <a:ea typeface="Microsoft JhengHei"/>
+                        </a:rPr>
+                        <a:t>77.8%</a:t>
+                      </a:r>
+                      <a:r>
+                        <a:rPr sz="1100" b="0" i="0">
+                          <a:solidFill>
+                            <a:srgbClr val="5F6770"/>
+                          </a:solidFill>
+                          <a:latin typeface="Arial"/>
+                          <a:ea typeface="Microsoft JhengHei"/>
+                        </a:rPr>
+                        <a:t>  (7/9)</a:t>
+                      </a:r>
+                    </a:p>
+                  </a:txBody>
+                  <a:tcPr marL="91440" marR="91440" marT="45720" marB="45720" anchor="ctr">
+                    <a:lnL w="0">
+                      <a:noFill/>
+                    </a:lnL>
+                    <a:lnR w="0">
+                      <a:noFill/>
+                    </a:lnR>
+                    <a:lnT w="0">
+                      <a:noFill/>
+                    </a:lnT>
+                    <a:lnB w="9525" cmpd="sng">
+                      <a:solidFill>
+                        <a:srgbClr val="BFBFBF"/>
+                      </a:solidFill>
+                    </a:lnB>
+                    <a:noFill/>
+                  </a:tcPr>
+                </a:tc>
+                <a:tc>
+                  <a:txBody>
+                    <a:bodyPr wrap="square"/>
+                    <a:lstStyle/>
+                    <a:p>
+                      <a:pPr algn="ctr"/>
+                      <a:r>
+                        <a:rPr sz="1600" b="1" i="0">
+                          <a:solidFill>
+                            <a:srgbClr val="1E7B4A"/>
+                          </a:solidFill>
+                          <a:latin typeface="Arial"/>
+                          <a:ea typeface="Microsoft JhengHei"/>
+                        </a:rPr>
+                        <a:t>100.0%</a:t>
+                      </a:r>
+                      <a:r>
+                        <a:rPr sz="1100" b="0" i="0">
+                          <a:solidFill>
+                            <a:srgbClr val="5F6770"/>
+                          </a:solidFill>
+                          <a:latin typeface="Arial"/>
+                          <a:ea typeface="Microsoft JhengHei"/>
+                        </a:rPr>
+                        <a:t>  (9/9)</a:t>
+                      </a:r>
+                    </a:p>
+                  </a:txBody>
+                  <a:tcPr marL="91440" marR="91440" marT="45720" marB="45720" anchor="ctr">
+                    <a:lnL w="0">
+                      <a:noFill/>
+                    </a:lnL>
+                    <a:lnR w="0">
+                      <a:noFill/>
+                    </a:lnR>
+                    <a:lnT w="0">
+                      <a:noFill/>
+                    </a:lnT>
+                    <a:lnB w="9525" cmpd="sng">
+                      <a:solidFill>
+                        <a:srgbClr val="BFBFBF"/>
+                      </a:solidFill>
+                    </a:lnB>
+                    <a:solidFill>
+                      <a:srgbClr val="E6F2EA"/>
+                    </a:solidFill>
+                  </a:tcPr>
+                </a:tc>
+              </a:tr>
+              <a:tr h="457200">
+                <a:tc>
+                  <a:txBody>
+                    <a:bodyPr wrap="square"/>
+                    <a:lstStyle/>
+                    <a:p>
+                      <a:pPr algn="l"/>
+                      <a:r>
+                        <a:rPr sz="1400" b="1" i="0">
+                          <a:solidFill>
+                            <a:srgbClr val="333D47"/>
+                          </a:solidFill>
+                          <a:latin typeface="Arial"/>
+                          <a:ea typeface="Microsoft JhengHei"/>
+                        </a:rPr>
+                        <a:t>Receipt no.</a:t>
+                      </a:r>
+                    </a:p>
+                  </a:txBody>
+                  <a:tcPr marL="91440" marR="91440" marT="45720" marB="45720" anchor="ctr">
+                    <a:lnL w="0">
+                      <a:noFill/>
+                    </a:lnL>
+                    <a:lnR w="0">
+                      <a:noFill/>
+                    </a:lnR>
+                    <a:lnT w="0">
+                      <a:noFill/>
+                    </a:lnT>
+                    <a:lnB w="9525" cmpd="sng">
+                      <a:solidFill>
+                        <a:srgbClr val="BFBFBF"/>
+                      </a:solidFill>
+                    </a:lnB>
+                    <a:noFill/>
+                  </a:tcPr>
+                </a:tc>
+                <a:tc>
+                  <a:txBody>
+                    <a:bodyPr wrap="square"/>
+                    <a:lstStyle/>
+                    <a:p>
+                      <a:pPr algn="ctr"/>
+                      <a:r>
+                        <a:rPr sz="1400" b="0" i="0">
+                          <a:solidFill>
+                            <a:srgbClr val="5F6770"/>
+                          </a:solidFill>
+                          <a:latin typeface="Arial"/>
+                          <a:ea typeface="Microsoft JhengHei"/>
+                        </a:rPr>
+                        <a:t>9</a:t>
+                      </a:r>
+                    </a:p>
+                  </a:txBody>
+                  <a:tcPr marL="91440" marR="91440" marT="45720" marB="45720" anchor="ctr">
+                    <a:lnL w="0">
+                      <a:noFill/>
+                    </a:lnL>
+                    <a:lnR w="0">
+                      <a:noFill/>
+                    </a:lnR>
+                    <a:lnT w="0">
+                      <a:noFill/>
+                    </a:lnT>
+                    <a:lnB w="9525" cmpd="sng">
+                      <a:solidFill>
+                        <a:srgbClr val="BFBFBF"/>
+                      </a:solidFill>
+                    </a:lnB>
+                    <a:noFill/>
+                  </a:tcPr>
+                </a:tc>
+                <a:tc>
+                  <a:txBody>
+                    <a:bodyPr wrap="square"/>
+                    <a:lstStyle/>
+                    <a:p>
+                      <a:pPr algn="ctr"/>
+                      <a:r>
+                        <a:rPr sz="1600" b="0" i="0">
+                          <a:solidFill>
+                            <a:srgbClr val="333D47"/>
+                          </a:solidFill>
+                          <a:latin typeface="Arial"/>
+                          <a:ea typeface="Microsoft JhengHei"/>
+                        </a:rPr>
+                        <a:t>77.8%</a:t>
+                      </a:r>
+                      <a:r>
+                        <a:rPr sz="1100" b="0" i="0">
+                          <a:solidFill>
+                            <a:srgbClr val="5F6770"/>
+                          </a:solidFill>
+                          <a:latin typeface="Arial"/>
+                          <a:ea typeface="Microsoft JhengHei"/>
+                        </a:rPr>
+                        <a:t>  (7/9)</a:t>
+                      </a:r>
+                    </a:p>
+                  </a:txBody>
+                  <a:tcPr marL="91440" marR="91440" marT="45720" marB="45720" anchor="ctr">
+                    <a:lnL w="0">
+                      <a:noFill/>
+                    </a:lnL>
+                    <a:lnR w="0">
+                      <a:noFill/>
+                    </a:lnR>
+                    <a:lnT w="0">
+                      <a:noFill/>
+                    </a:lnT>
+                    <a:lnB w="9525" cmpd="sng">
+                      <a:solidFill>
+                        <a:srgbClr val="BFBFBF"/>
+                      </a:solidFill>
+                    </a:lnB>
+                    <a:noFill/>
+                  </a:tcPr>
+                </a:tc>
+                <a:tc>
+                  <a:txBody>
+                    <a:bodyPr wrap="square"/>
+                    <a:lstStyle/>
+                    <a:p>
+                      <a:pPr algn="ctr"/>
+                      <a:r>
+                        <a:rPr sz="1600" b="0" i="0">
+                          <a:solidFill>
+                            <a:srgbClr val="333D47"/>
+                          </a:solidFill>
+                          <a:latin typeface="Arial"/>
+                          <a:ea typeface="Microsoft JhengHei"/>
+                        </a:rPr>
+                        <a:t>77.8%</a:t>
+                      </a:r>
+                      <a:r>
+                        <a:rPr sz="1100" b="0" i="0">
+                          <a:solidFill>
+                            <a:srgbClr val="5F6770"/>
+                          </a:solidFill>
+                          <a:latin typeface="Arial"/>
+                          <a:ea typeface="Microsoft JhengHei"/>
+                        </a:rPr>
+                        <a:t>  (7/9)</a:t>
+                      </a:r>
+                    </a:p>
+                  </a:txBody>
+                  <a:tcPr marL="91440" marR="91440" marT="45720" marB="45720" anchor="ctr">
+                    <a:lnL w="0">
+                      <a:noFill/>
+                    </a:lnL>
+                    <a:lnR w="0">
+                      <a:noFill/>
+                    </a:lnR>
+                    <a:lnT w="0">
+                      <a:noFill/>
+                    </a:lnT>
+                    <a:lnB w="9525" cmpd="sng">
+                      <a:solidFill>
+                        <a:srgbClr val="BFBFBF"/>
+                      </a:solidFill>
+                    </a:lnB>
+                    <a:noFill/>
+                  </a:tcPr>
+                </a:tc>
+                <a:tc>
+                  <a:txBody>
+                    <a:bodyPr wrap="square"/>
+                    <a:lstStyle/>
+                    <a:p>
+                      <a:pPr algn="ctr"/>
+                      <a:r>
+                        <a:rPr sz="1600" b="1" i="0">
+                          <a:solidFill>
+                            <a:srgbClr val="1E7B4A"/>
+                          </a:solidFill>
+                          <a:latin typeface="Arial"/>
+                          <a:ea typeface="Microsoft JhengHei"/>
+                        </a:rPr>
+                        <a:t>100.0%</a:t>
+                      </a:r>
+                      <a:r>
+                        <a:rPr sz="1100" b="0" i="0">
+                          <a:solidFill>
+                            <a:srgbClr val="5F6770"/>
+                          </a:solidFill>
+                          <a:latin typeface="Arial"/>
+                          <a:ea typeface="Microsoft JhengHei"/>
+                        </a:rPr>
+                        <a:t>  (9/9)</a:t>
+                      </a:r>
+                    </a:p>
+                  </a:txBody>
+                  <a:tcPr marL="91440" marR="91440" marT="45720" marB="45720" anchor="ctr">
+                    <a:lnL w="0">
+                      <a:noFill/>
+                    </a:lnL>
+                    <a:lnR w="0">
+                      <a:noFill/>
+                    </a:lnR>
+                    <a:lnT w="0">
+                      <a:noFill/>
+                    </a:lnT>
+                    <a:lnB w="9525" cmpd="sng">
+                      <a:solidFill>
+                        <a:srgbClr val="BFBFBF"/>
+                      </a:solidFill>
+                    </a:lnB>
+                    <a:solidFill>
+                      <a:srgbClr val="E6F2EA"/>
+                    </a:solidFill>
+                  </a:tcPr>
+                </a:tc>
+              </a:tr>
+              <a:tr h="457200">
+                <a:tc>
+                  <a:txBody>
+                    <a:bodyPr wrap="square"/>
+                    <a:lstStyle/>
+                    <a:p>
+                      <a:pPr algn="l"/>
+                      <a:r>
+                        <a:rPr sz="1400" b="1" i="0">
+                          <a:solidFill>
+                            <a:srgbClr val="333D47"/>
+                          </a:solidFill>
+                          <a:latin typeface="Arial"/>
+                          <a:ea typeface="Microsoft JhengHei"/>
+                        </a:rPr>
+                        <a:t>Service date</a:t>
+                      </a:r>
+                    </a:p>
+                  </a:txBody>
+                  <a:tcPr marL="91440" marR="91440" marT="45720" marB="45720" anchor="ctr">
+                    <a:lnL w="0">
+                      <a:noFill/>
+                    </a:lnL>
+                    <a:lnR w="0">
+                      <a:noFill/>
+                    </a:lnR>
+                    <a:lnT w="0">
+                      <a:noFill/>
+                    </a:lnT>
+                    <a:lnB w="9525" cmpd="sng">
+                      <a:solidFill>
+                        <a:srgbClr val="BFBFBF"/>
+                      </a:solidFill>
+                    </a:lnB>
+                    <a:noFill/>
+                  </a:tcPr>
+                </a:tc>
+                <a:tc>
+                  <a:txBody>
+                    <a:bodyPr wrap="square"/>
+                    <a:lstStyle/>
+                    <a:p>
+                      <a:pPr algn="ctr"/>
+                      <a:r>
+                        <a:rPr sz="1400" b="0" i="0">
+                          <a:solidFill>
+                            <a:srgbClr val="5F6770"/>
+                          </a:solidFill>
+                          <a:latin typeface="Arial"/>
+                          <a:ea typeface="Microsoft JhengHei"/>
+                        </a:rPr>
+                        <a:t>9</a:t>
+                      </a:r>
+                    </a:p>
+                  </a:txBody>
+                  <a:tcPr marL="91440" marR="91440" marT="45720" marB="45720" anchor="ctr">
+                    <a:lnL w="0">
+                      <a:noFill/>
+                    </a:lnL>
+                    <a:lnR w="0">
+                      <a:noFill/>
+                    </a:lnR>
+                    <a:lnT w="0">
+                      <a:noFill/>
+                    </a:lnT>
+                    <a:lnB w="9525" cmpd="sng">
+                      <a:solidFill>
+                        <a:srgbClr val="BFBFBF"/>
+                      </a:solidFill>
+                    </a:lnB>
+                    <a:noFill/>
+                  </a:tcPr>
+                </a:tc>
+                <a:tc>
+                  <a:txBody>
+                    <a:bodyPr wrap="square"/>
+                    <a:lstStyle/>
+                    <a:p>
+                      <a:pPr algn="ctr"/>
+                      <a:r>
+                        <a:rPr sz="1600" b="0" i="0">
+                          <a:solidFill>
+                            <a:srgbClr val="333D47"/>
+                          </a:solidFill>
+                          <a:latin typeface="Arial"/>
+                          <a:ea typeface="Microsoft JhengHei"/>
+                        </a:rPr>
+                        <a:t>88.9%</a:t>
+                      </a:r>
+                      <a:r>
+                        <a:rPr sz="1100" b="0" i="0">
+                          <a:solidFill>
+                            <a:srgbClr val="5F6770"/>
+                          </a:solidFill>
+                          <a:latin typeface="Arial"/>
+                          <a:ea typeface="Microsoft JhengHei"/>
+                        </a:rPr>
+                        <a:t>  (8/9)</a:t>
+                      </a:r>
+                    </a:p>
+                  </a:txBody>
+                  <a:tcPr marL="91440" marR="91440" marT="45720" marB="45720" anchor="ctr">
+                    <a:lnL w="0">
+                      <a:noFill/>
+                    </a:lnL>
+                    <a:lnR w="0">
+                      <a:noFill/>
+                    </a:lnR>
+                    <a:lnT w="0">
+                      <a:noFill/>
+                    </a:lnT>
+                    <a:lnB w="9525" cmpd="sng">
+                      <a:solidFill>
+                        <a:srgbClr val="BFBFBF"/>
+                      </a:solidFill>
+                    </a:lnB>
+                    <a:noFill/>
+                  </a:tcPr>
+                </a:tc>
+                <a:tc>
+                  <a:txBody>
+                    <a:bodyPr wrap="square"/>
+                    <a:lstStyle/>
+                    <a:p>
+                      <a:pPr algn="ctr"/>
+                      <a:r>
+                        <a:rPr sz="1600" b="0" i="0">
+                          <a:solidFill>
+                            <a:srgbClr val="333D47"/>
+                          </a:solidFill>
+                          <a:latin typeface="Arial"/>
+                          <a:ea typeface="Microsoft JhengHei"/>
+                        </a:rPr>
+                        <a:t>88.9%</a:t>
+                      </a:r>
+                      <a:r>
+                        <a:rPr sz="1100" b="0" i="0">
+                          <a:solidFill>
+                            <a:srgbClr val="5F6770"/>
+                          </a:solidFill>
+                          <a:latin typeface="Arial"/>
+                          <a:ea typeface="Microsoft JhengHei"/>
+                        </a:rPr>
+                        <a:t>  (8/9)</a:t>
+                      </a:r>
+                    </a:p>
+                  </a:txBody>
+                  <a:tcPr marL="91440" marR="91440" marT="45720" marB="45720" anchor="ctr">
+                    <a:lnL w="0">
+                      <a:noFill/>
+                    </a:lnL>
+                    <a:lnR w="0">
+                      <a:noFill/>
+                    </a:lnR>
+                    <a:lnT w="0">
+                      <a:noFill/>
+                    </a:lnT>
+                    <a:lnB w="9525" cmpd="sng">
+                      <a:solidFill>
+                        <a:srgbClr val="BFBFBF"/>
+                      </a:solidFill>
+                    </a:lnB>
+                    <a:noFill/>
+                  </a:tcPr>
+                </a:tc>
+                <a:tc>
+                  <a:txBody>
+                    <a:bodyPr wrap="square"/>
+                    <a:lstStyle/>
+                    <a:p>
+                      <a:pPr algn="ctr"/>
+                      <a:r>
+                        <a:rPr sz="1600" b="0" i="0">
+                          <a:solidFill>
+                            <a:srgbClr val="333D47"/>
+                          </a:solidFill>
+                          <a:latin typeface="Arial"/>
+                          <a:ea typeface="Microsoft JhengHei"/>
+                        </a:rPr>
+                        <a:t>88.9%</a:t>
+                      </a:r>
+                      <a:r>
+                        <a:rPr sz="1100" b="0" i="0">
+                          <a:solidFill>
+                            <a:srgbClr val="5F6770"/>
+                          </a:solidFill>
+                          <a:latin typeface="Arial"/>
+                          <a:ea typeface="Microsoft JhengHei"/>
+                        </a:rPr>
+                        <a:t>  (8/9)</a:t>
+                      </a:r>
+                    </a:p>
+                  </a:txBody>
+                  <a:tcPr marL="91440" marR="91440" marT="45720" marB="45720" anchor="ctr">
+                    <a:lnL w="0">
+                      <a:noFill/>
+                    </a:lnL>
+                    <a:lnR w="0">
+                      <a:noFill/>
+                    </a:lnR>
+                    <a:lnT w="0">
+                      <a:noFill/>
+                    </a:lnT>
+                    <a:lnB w="9525" cmpd="sng">
+                      <a:solidFill>
+                        <a:srgbClr val="BFBFBF"/>
+                      </a:solidFill>
+                    </a:lnB>
+                    <a:noFill/>
+                  </a:tcPr>
+                </a:tc>
+              </a:tr>
+              <a:tr h="457200">
+                <a:tc>
+                  <a:txBody>
+                    <a:bodyPr wrap="square"/>
+                    <a:lstStyle/>
+                    <a:p>
+                      <a:pPr algn="l"/>
+                      <a:r>
+                        <a:rPr sz="1400" b="1" i="0">
+                          <a:solidFill>
+                            <a:srgbClr val="333D47"/>
+                          </a:solidFill>
+                          <a:latin typeface="Arial"/>
+                          <a:ea typeface="Microsoft JhengHei"/>
+                        </a:rPr>
+                        <a:t>Total</a:t>
+                      </a:r>
+                    </a:p>
+                  </a:txBody>
+                  <a:tcPr marL="91440" marR="91440" marT="45720" marB="45720" anchor="ctr">
+                    <a:lnL w="0">
+                      <a:noFill/>
+                    </a:lnL>
+                    <a:lnR w="0">
+                      <a:noFill/>
+                    </a:lnR>
+                    <a:lnT w="0">
+                      <a:noFill/>
+                    </a:lnT>
+                    <a:lnB w="9525" cmpd="sng">
+                      <a:solidFill>
+                        <a:srgbClr val="BFBFBF"/>
+                      </a:solidFill>
+                    </a:lnB>
+                    <a:noFill/>
+                  </a:tcPr>
+                </a:tc>
+                <a:tc>
+                  <a:txBody>
+                    <a:bodyPr wrap="square"/>
+                    <a:lstStyle/>
+                    <a:p>
+                      <a:pPr algn="ctr"/>
+                      <a:r>
+                        <a:rPr sz="1400" b="0" i="0">
+                          <a:solidFill>
+                            <a:srgbClr val="5F6770"/>
+                          </a:solidFill>
+                          <a:latin typeface="Arial"/>
+                          <a:ea typeface="Microsoft JhengHei"/>
+                        </a:rPr>
+                        <a:t>9</a:t>
+                      </a:r>
+                    </a:p>
+                  </a:txBody>
+                  <a:tcPr marL="91440" marR="91440" marT="45720" marB="45720" anchor="ctr">
+                    <a:lnL w="0">
+                      <a:noFill/>
+                    </a:lnL>
+                    <a:lnR w="0">
+                      <a:noFill/>
+                    </a:lnR>
+                    <a:lnT w="0">
+                      <a:noFill/>
+                    </a:lnT>
+                    <a:lnB w="9525" cmpd="sng">
+                      <a:solidFill>
+                        <a:srgbClr val="BFBFBF"/>
+                      </a:solidFill>
+                    </a:lnB>
+                    <a:noFill/>
+                  </a:tcPr>
+                </a:tc>
+                <a:tc>
+                  <a:txBody>
+                    <a:bodyPr wrap="square"/>
+                    <a:lstStyle/>
+                    <a:p>
+                      <a:pPr algn="ctr"/>
+                      <a:r>
+                        <a:rPr sz="1600" b="1" i="0">
+                          <a:solidFill>
+                            <a:srgbClr val="1E7B4A"/>
+                          </a:solidFill>
+                          <a:latin typeface="Arial"/>
+                          <a:ea typeface="Microsoft JhengHei"/>
+                        </a:rPr>
+                        <a:t>100.0%</a:t>
+                      </a:r>
+                      <a:r>
+                        <a:rPr sz="1100" b="0" i="0">
+                          <a:solidFill>
+                            <a:srgbClr val="5F6770"/>
+                          </a:solidFill>
+                          <a:latin typeface="Arial"/>
+                          <a:ea typeface="Microsoft JhengHei"/>
+                        </a:rPr>
+                        <a:t>  (9/9)</a:t>
+                      </a:r>
+                    </a:p>
+                  </a:txBody>
+                  <a:tcPr marL="91440" marR="91440" marT="45720" marB="45720" anchor="ctr">
+                    <a:lnL w="0">
+                      <a:noFill/>
+                    </a:lnL>
+                    <a:lnR w="0">
+                      <a:noFill/>
+                    </a:lnR>
+                    <a:lnT w="0">
+                      <a:noFill/>
+                    </a:lnT>
+                    <a:lnB w="9525" cmpd="sng">
+                      <a:solidFill>
+                        <a:srgbClr val="BFBFBF"/>
+                      </a:solidFill>
+                    </a:lnB>
+                    <a:solidFill>
+                      <a:srgbClr val="E6F2EA"/>
+                    </a:solidFill>
+                  </a:tcPr>
+                </a:tc>
+                <a:tc>
+                  <a:txBody>
+                    <a:bodyPr wrap="square"/>
+                    <a:lstStyle/>
+                    <a:p>
+                      <a:pPr algn="ctr"/>
+                      <a:r>
+                        <a:rPr sz="1600" b="0" i="0">
+                          <a:solidFill>
+                            <a:srgbClr val="333D47"/>
+                          </a:solidFill>
+                          <a:latin typeface="Arial"/>
+                          <a:ea typeface="Microsoft JhengHei"/>
+                        </a:rPr>
+                        <a:t>88.9%</a:t>
+                      </a:r>
+                      <a:r>
+                        <a:rPr sz="1100" b="0" i="0">
+                          <a:solidFill>
+                            <a:srgbClr val="5F6770"/>
+                          </a:solidFill>
+                          <a:latin typeface="Arial"/>
+                          <a:ea typeface="Microsoft JhengHei"/>
+                        </a:rPr>
+                        <a:t>  (8/9)</a:t>
+                      </a:r>
+                    </a:p>
+                  </a:txBody>
+                  <a:tcPr marL="91440" marR="91440" marT="45720" marB="45720" anchor="ctr">
+                    <a:lnL w="0">
+                      <a:noFill/>
+                    </a:lnL>
+                    <a:lnR w="0">
+                      <a:noFill/>
+                    </a:lnR>
+                    <a:lnT w="0">
+                      <a:noFill/>
+                    </a:lnT>
+                    <a:lnB w="9525" cmpd="sng">
+                      <a:solidFill>
+                        <a:srgbClr val="BFBFBF"/>
+                      </a:solidFill>
+                    </a:lnB>
+                    <a:noFill/>
+                  </a:tcPr>
+                </a:tc>
+                <a:tc>
+                  <a:txBody>
+                    <a:bodyPr wrap="square"/>
+                    <a:lstStyle/>
+                    <a:p>
+                      <a:pPr algn="ctr"/>
+                      <a:r>
+                        <a:rPr sz="1600" b="1" i="0">
+                          <a:solidFill>
+                            <a:srgbClr val="1E7B4A"/>
+                          </a:solidFill>
+                          <a:latin typeface="Arial"/>
+                          <a:ea typeface="Microsoft JhengHei"/>
+                        </a:rPr>
+                        <a:t>100.0%</a:t>
+                      </a:r>
+                      <a:r>
+                        <a:rPr sz="1100" b="0" i="0">
+                          <a:solidFill>
+                            <a:srgbClr val="5F6770"/>
+                          </a:solidFill>
+                          <a:latin typeface="Arial"/>
+                          <a:ea typeface="Microsoft JhengHei"/>
+                        </a:rPr>
+                        <a:t>  (9/9)</a:t>
+                      </a:r>
+                    </a:p>
+                  </a:txBody>
+                  <a:tcPr marL="91440" marR="91440" marT="45720" marB="45720" anchor="ctr">
+                    <a:lnL w="0">
+                      <a:noFill/>
+                    </a:lnL>
+                    <a:lnR w="0">
+                      <a:noFill/>
+                    </a:lnR>
+                    <a:lnT w="0">
+                      <a:noFill/>
+                    </a:lnT>
+                    <a:lnB w="9525" cmpd="sng">
+                      <a:solidFill>
+                        <a:srgbClr val="BFBFBF"/>
+                      </a:solidFill>
+                    </a:lnB>
+                    <a:solidFill>
+                      <a:srgbClr val="E6F2EA"/>
+                    </a:solidFill>
+                  </a:tcPr>
+                </a:tc>
+              </a:tr>
+            </a:tbl>
+          </a:graphicData>
+        </a:graphic>
+      </p:graphicFrame>
+      <p:sp>
+        <p:nvSpPr>
+          <p:cNvPr id="13" name="TextBox 12"/>
+          <p:cNvSpPr txBox="1"/>
+          <p:nvPr/>
+        </p:nvSpPr>
+        <p:spPr>
+          <a:xfrm>
+            <a:off x="356616" y="5166360"/>
+            <a:ext cx="10972800" cy="320040"/>
+          </a:xfrm>
+          <a:prstGeom prst="rect">
+            <a:avLst/>
+          </a:prstGeom>
+          <a:noFill/>
+        </p:spPr>
+        <p:txBody>
+          <a:bodyPr wrap="square" lIns="0" rIns="0" tIns="0" bIns="0" anchor="t"/>
+          <a:lstStyle/>
+          <a:p>
+            <a:pPr marL="0" indent="0" algn="l">
+              <a:spcAft>
+                <a:spcPts val="0"/>
+              </a:spcAft>
+              <a:buNone/>
+            </a:pPr>
+            <a:r>
+              <a:rPr sz="1100" b="0" i="1">
+                <a:solidFill>
+                  <a:srgbClr val="5F6770"/>
+                </a:solidFill>
+                <a:latin typeface="Arial"/>
+                <a:ea typeface="Microsoft JhengHei"/>
+              </a:rPr>
+              <a:t>Development results after tuning on these 9 receipts, not independent validation. * Registration number is printed on 6 of the 9 receipts; every other field on all 9.</a:t>
+            </a:r>
+          </a:p>
+        </p:txBody>
+      </p:sp>
+    </p:spTree>
+  </p:cSld>
+  <p:clrMapOvr>
+    <a:masterClrMapping/>
+  </p:clrMapOvr>
+</p:sld>
+</file>
+
+<file path=ppt/slides/slide6.xml><?xml version="1.0" encoding="utf-8"?>
+<p:sld xmlns:a="http://schemas.openxmlformats.org/drawingml/2006/main" xmlns:p="http://schemas.openxmlformats.org/presentationml/2006/main" xmlns:r="http://schemas.openxmlformats.org/officeDocument/2006/relationships">
+  <p:cSld>
+    <p:spTree>
+      <p:nvGrpSpPr>
+        <p:cNvPr id="1" name=""/>
+        <p:cNvGrpSpPr/>
+        <p:nvPr/>
+      </p:nvGrpSpPr>
+      <p:grpSpPr/>
+      <p:sp>
+        <p:nvSpPr>
+          <p:cNvPr id="4" name="Text Placeholder 3"/>
+          <p:cNvSpPr>
+            <a:spLocks noGrp="1"/>
+          </p:cNvSpPr>
+          <p:nvPr>
+            <p:ph type="body" idx="10" sz="quarter"/>
+          </p:nvPr>
+        </p:nvSpPr>
+        <p:spPr>
+          <a:xfrm>
+            <a:off x="356616" y="502920"/>
+            <a:ext cx="11155680" cy="566928"/>
+          </a:xfrm>
+        </p:spPr>
+        <p:txBody>
+          <a:bodyPr lIns="0"/>
+          <a:lstStyle/>
+          <a:p>
+            <a:r>
+              <a:rPr sz="2800" b="1">
+                <a:solidFill>
+                  <a:srgbClr val="333D47"/>
+                </a:solidFill>
+                <a:latin typeface="Arial"/>
+                <a:ea typeface="Microsoft JhengHei"/>
+              </a:rPr>
+              <a:t>What Changed in AOAI Prompt V2</a:t>
+            </a:r>
+          </a:p>
+        </p:txBody>
+      </p:sp>
+      <p:sp>
+        <p:nvSpPr>
+          <p:cNvPr id="10" name="Slide Number Placeholder 5">
+            <a:extLst>
+              <a:ext uri="{FF2B5EF4-FFF2-40B4-BE49-F238E27FC236}">
+                <a16:creationId xmlns:a16="http://schemas.microsoft.com/office/drawing/2014/main" id="{3E493E1F-F28C-FD47-B996-3EBF17D328AE}"/>
+              </a:ext>
+            </a:extLst>
+          </p:cNvPr>
+          <p:cNvSpPr>
+            <a:spLocks noGrp="1"/>
+          </p:cNvSpPr>
+          <p:nvPr>
+            <p:ph type="sldNum" sz="quarter" idx="4"/>
+          </p:nvPr>
+        </p:nvSpPr>
+        <p:spPr>
+          <a:xfrm>
+            <a:off x="359999" y="6264872"/>
+            <a:ext cx="360000" cy="360000"/>
+          </a:xfrm>
+          <a:prstGeom prst="rect">
+            <a:avLst/>
+          </a:prstGeom>
+        </p:spPr>
+        <p:txBody>
+          <a:bodyPr vert="horz" lIns="91440" tIns="45720" rIns="91440" bIns="45720" rtlCol="0" anchor="ctr"/>
+          <a:lstStyle>
+            <a:lvl1pPr algn="l">
+              <a:defRPr sz="800" b="0" i="0">
+                <a:solidFill>
+                  <a:schemeClr val="tx1"/>
+                </a:solidFill>
+                <a:latin typeface="Arial" panose="020B0604020202020204" pitchFamily="34" charset="0"/>
+                <a:cs typeface="Arial" panose="020B0604020202020204" pitchFamily="34" charset="0"/>
+              </a:defRPr>
+            </a:lvl1pPr>
+          </a:lstStyle>
+          <a:p>
+            <a:fld id="{18A41853-EF22-D446-BDBC-A7CF3FE93503}" type="slidenum">
+              <a:rPr lang="en-US" smtClean="0"/>
+              <a:pPr/>
+              <a:t>‹#›</a:t>
+            </a:fld>
+            <a:endParaRPr lang="en-US" dirty="0"/>
+          </a:p>
+        </p:txBody>
+      </p:sp>
+      <p:sp>
+        <p:nvSpPr>
+          <p:cNvPr id="11" name="TextBox 10"/>
+          <p:cNvSpPr txBox="1"/>
+          <p:nvPr/>
+        </p:nvSpPr>
+        <p:spPr>
+          <a:xfrm>
+            <a:off x="356616" y="1115568"/>
+            <a:ext cx="11475720" cy="457200"/>
+          </a:xfrm>
+          <a:prstGeom prst="rect">
+            <a:avLst/>
+          </a:prstGeom>
+          <a:noFill/>
+        </p:spPr>
+        <p:txBody>
+          <a:bodyPr wrap="square" lIns="0" rIns="0" tIns="0" bIns="0" anchor="t"/>
+          <a:lstStyle/>
+          <a:p>
+            <a:pPr marL="0" indent="0" algn="l">
+              <a:spcAft>
+                <a:spcPts val="0"/>
+              </a:spcAft>
+              <a:buNone/>
+            </a:pPr>
+            <a:r>
+              <a:rPr sz="1700" b="0" i="0">
+                <a:solidFill>
+                  <a:srgbClr val="D31145"/>
+                </a:solidFill>
+                <a:latin typeface="Arial"/>
+                <a:ea typeface="Microsoft JhengHei"/>
+              </a:rPr>
+              <a:t>88.2% → 96.1%: four fields fixed, all by clearer prompt wording. Nothing else changed a result.</a:t>
+            </a:r>
+          </a:p>
+        </p:txBody>
+      </p:sp>
+      <p:graphicFrame>
+        <p:nvGraphicFramePr>
+          <p:cNvPr id="12" name="Table 11"/>
+          <p:cNvGraphicFramePr>
+            <a:graphicFrameLocks noGrp="1"/>
+          </p:cNvGraphicFramePr>
+          <p:nvPr/>
+        </p:nvGraphicFramePr>
+        <p:xfrm>
+          <a:off x="356616" y="1783080"/>
+          <a:ext cx="11475719" cy="2770632"/>
+        </p:xfrm>
+        <a:graphic>
+          <a:graphicData uri="http://schemas.openxmlformats.org/drawingml/2006/table">
+            <a:tbl>
+              <a:tblPr firstRow="0" bandRow="0">
+                <a:tableStyleId>{2D5ABB26-0587-4C30-8999-92F81FD0307C}</a:tableStyleId>
+              </a:tblPr>
+              <a:tblGrid>
+                <a:gridCol w="1828800"/>
+                <a:gridCol w="3520440"/>
+                <a:gridCol w="3749039"/>
+                <a:gridCol w="2377440"/>
+              </a:tblGrid>
+              <a:tr h="502920">
+                <a:tc>
+                  <a:txBody>
+                    <a:bodyPr wrap="square"/>
+                    <a:lstStyle/>
+                    <a:p>
+                      <a:pPr algn="l"/>
+                      <a:r>
+                        <a:rPr sz="1300" b="1" i="0">
+                          <a:solidFill>
+                            <a:srgbClr val="FFFFFF"/>
+                          </a:solidFill>
+                          <a:latin typeface="Arial"/>
+                          <a:ea typeface="Microsoft JhengHei"/>
+                        </a:rPr>
+                        <a:t>Field fixed</a:t>
+                      </a:r>
+                    </a:p>
+                  </a:txBody>
+                  <a:tcPr marL="91440" marR="91440" marT="45720" marB="45720" anchor="ctr">
+                    <a:lnL w="0">
+                      <a:noFill/>
+                    </a:lnL>
+                    <a:lnR w="0">
+                      <a:noFill/>
+                    </a:lnR>
+                    <a:lnT w="0">
+                      <a:noFill/>
+                    </a:lnT>
+                    <a:lnB w="0">
+                      <a:noFill/>
+                    </a:lnB>
+                    <a:solidFill>
+                      <a:srgbClr val="333D47"/>
+                    </a:solidFill>
+                  </a:tcPr>
+                </a:tc>
+                <a:tc>
+                  <a:txBody>
+                    <a:bodyPr wrap="square"/>
+                    <a:lstStyle/>
+                    <a:p>
+                      <a:pPr algn="l"/>
+                      <a:r>
+                        <a:rPr sz="1300" b="1" i="0">
+                          <a:solidFill>
+                            <a:srgbClr val="FFFFFF"/>
+                          </a:solidFill>
+                          <a:latin typeface="Arial"/>
+                          <a:ea typeface="Microsoft JhengHei"/>
+                        </a:rPr>
+                        <a:t>Original prompt replied</a:t>
+                      </a:r>
+                    </a:p>
+                  </a:txBody>
+                  <a:tcPr marL="91440" marR="91440" marT="45720" marB="45720" anchor="ctr">
+                    <a:lnL w="0">
+                      <a:noFill/>
+                    </a:lnL>
+                    <a:lnR w="0">
+                      <a:noFill/>
+                    </a:lnR>
+                    <a:lnT w="0">
+                      <a:noFill/>
+                    </a:lnT>
+                    <a:lnB w="0">
+                      <a:noFill/>
+                    </a:lnB>
+                    <a:solidFill>
+                      <a:srgbClr val="333D47"/>
+                    </a:solidFill>
+                  </a:tcPr>
+                </a:tc>
+                <a:tc>
+                  <a:txBody>
+                    <a:bodyPr wrap="square"/>
+                    <a:lstStyle/>
+                    <a:p>
+                      <a:pPr algn="l"/>
+                      <a:r>
+                        <a:rPr sz="1300" b="1" i="0">
+                          <a:solidFill>
+                            <a:srgbClr val="FFFFFF"/>
+                          </a:solidFill>
+                          <a:latin typeface="Arial"/>
+                          <a:ea typeface="Microsoft JhengHei"/>
+                        </a:rPr>
+                        <a:t>Prompt v2 wording added</a:t>
+                      </a:r>
+                    </a:p>
+                  </a:txBody>
+                  <a:tcPr marL="91440" marR="91440" marT="45720" marB="45720" anchor="ctr">
+                    <a:lnL w="0">
+                      <a:noFill/>
+                    </a:lnL>
+                    <a:lnR w="0">
+                      <a:noFill/>
+                    </a:lnR>
+                    <a:lnT w="0">
+                      <a:noFill/>
+                    </a:lnT>
+                    <a:lnB w="0">
+                      <a:noFill/>
+                    </a:lnB>
+                    <a:solidFill>
+                      <a:srgbClr val="333D47"/>
+                    </a:solidFill>
+                  </a:tcPr>
+                </a:tc>
+                <a:tc>
+                  <a:txBody>
+                    <a:bodyPr wrap="square"/>
+                    <a:lstStyle/>
+                    <a:p>
+                      <a:pPr algn="l"/>
+                      <a:r>
+                        <a:rPr sz="1300" b="1" i="0">
+                          <a:solidFill>
+                            <a:srgbClr val="FFFFFF"/>
+                          </a:solidFill>
+                          <a:latin typeface="Arial"/>
+                          <a:ea typeface="Microsoft JhengHei"/>
+                        </a:rPr>
+                        <a:t>Prompt v2 replied</a:t>
+                      </a:r>
+                    </a:p>
+                  </a:txBody>
+                  <a:tcPr marL="91440" marR="91440" marT="45720" marB="45720" anchor="ctr">
+                    <a:lnL w="0">
+                      <a:noFill/>
+                    </a:lnL>
+                    <a:lnR w="0">
+                      <a:noFill/>
+                    </a:lnR>
+                    <a:lnT w="0">
+                      <a:noFill/>
+                    </a:lnT>
+                    <a:lnB w="0">
+                      <a:noFill/>
+                    </a:lnB>
+                    <a:solidFill>
+                      <a:srgbClr val="333D47"/>
+                    </a:solidFill>
+                  </a:tcPr>
+                </a:tc>
+              </a:tr>
+              <a:tr h="566928">
+                <a:tc>
+                  <a:txBody>
+                    <a:bodyPr wrap="square"/>
+                    <a:lstStyle/>
+                    <a:p>
+                      <a:pPr algn="l"/>
+                      <a:r>
+                        <a:rPr sz="1300" b="1" i="0">
+                          <a:solidFill>
+                            <a:srgbClr val="333D47"/>
+                          </a:solidFill>
+                          <a:latin typeface="Arial"/>
+                          <a:ea typeface="Microsoft JhengHei"/>
+                        </a:rPr>
+                        <a:t>Registration no.</a:t>
+                      </a:r>
+                    </a:p>
+                    <a:p>
+                      <a:pPr algn="l"/>
+                      <a:r>
+                        <a:rPr sz="1100" b="0" i="0">
+                          <a:solidFill>
+                            <a:srgbClr val="5F6770"/>
+                          </a:solidFill>
+                          <a:latin typeface="Arial"/>
+                          <a:ea typeface="Microsoft JhengHei"/>
+                        </a:rPr>
+                        <a:t>GP receipt</a:t>
+                      </a:r>
+                    </a:p>
+                  </a:txBody>
+                  <a:tcPr marL="91440" marR="91440" marT="45720" marB="45720" anchor="ctr">
+                    <a:lnL w="0">
+                      <a:noFill/>
+                    </a:lnL>
+                    <a:lnR w="0">
+                      <a:noFill/>
+                    </a:lnR>
+                    <a:lnT w="0">
+                      <a:noFill/>
+                    </a:lnT>
+                    <a:lnB w="19050" cmpd="sng">
+                      <a:solidFill>
+                        <a:srgbClr val="FFFFFF"/>
+                      </a:solidFill>
+                    </a:lnB>
+                    <a:noFill/>
+                  </a:tcPr>
+                </a:tc>
+                <a:tc>
+                  <a:txBody>
+                    <a:bodyPr wrap="square"/>
+                    <a:lstStyle/>
+                    <a:p>
+                      <a:pPr algn="l"/>
+                      <a:r>
+                        <a:rPr sz="1250" b="1" i="0">
+                          <a:solidFill>
+                            <a:srgbClr val="D31145"/>
+                          </a:solidFill>
+                          <a:latin typeface="Arial"/>
+                          <a:ea typeface="Microsoft JhengHei"/>
+                        </a:rPr>
+                        <a:t>✗ </a:t>
+                      </a:r>
+                      <a:r>
+                        <a:rPr sz="1250" b="0" i="0">
+                          <a:solidFill>
+                            <a:srgbClr val="333D47"/>
+                          </a:solidFill>
+                          <a:latin typeface="Arial"/>
+                          <a:ea typeface="Microsoft JhengHei"/>
+                        </a:rPr>
+                        <a:t>MBBS (HK) · Reg. No. M17642</a:t>
+                      </a:r>
+                    </a:p>
+                  </a:txBody>
+                  <a:tcPr marL="91440" marR="91440" marT="45720" marB="45720" anchor="ctr">
+                    <a:lnL w="0">
+                      <a:noFill/>
+                    </a:lnL>
+                    <a:lnR w="0">
+                      <a:noFill/>
+                    </a:lnR>
+                    <a:lnT w="0">
+                      <a:noFill/>
+                    </a:lnT>
+                    <a:lnB w="19050" cmpd="sng">
+                      <a:solidFill>
+                        <a:srgbClr val="FFFFFF"/>
+                      </a:solidFill>
+                    </a:lnB>
+                    <a:solidFill>
+                      <a:srgbClr val="FBE7EC"/>
+                    </a:solidFill>
+                  </a:tcPr>
+                </a:tc>
+                <a:tc>
+                  <a:txBody>
+                    <a:bodyPr wrap="square"/>
+                    <a:lstStyle/>
+                    <a:p>
+                      <a:pPr algn="l"/>
+                      <a:r>
+                        <a:rPr sz="1250" b="0" i="1">
+                          <a:solidFill>
+                            <a:srgbClr val="333D47"/>
+                          </a:solidFill>
+                          <a:latin typeface="Arial"/>
+                          <a:ea typeface="Microsoft JhengHei"/>
+                        </a:rPr>
+                        <a:t>“the identifier only, without its label”</a:t>
+                      </a:r>
+                    </a:p>
+                  </a:txBody>
+                  <a:tcPr marL="91440" marR="91440" marT="45720" marB="45720" anchor="ctr">
+                    <a:lnL w="0">
+                      <a:noFill/>
+                    </a:lnL>
+                    <a:lnR w="0">
+                      <a:noFill/>
+                    </a:lnR>
+                    <a:lnT w="0">
+                      <a:noFill/>
+                    </a:lnT>
+                    <a:lnB w="19050" cmpd="sng">
+                      <a:solidFill>
+                        <a:srgbClr val="FFFFFF"/>
+                      </a:solidFill>
+                    </a:lnB>
+                    <a:noFill/>
+                  </a:tcPr>
+                </a:tc>
+                <a:tc>
+                  <a:txBody>
+                    <a:bodyPr wrap="square"/>
+                    <a:lstStyle/>
+                    <a:p>
+                      <a:pPr algn="l"/>
+                      <a:r>
+                        <a:rPr sz="1250" b="1" i="0">
+                          <a:solidFill>
+                            <a:srgbClr val="1E7B4A"/>
+                          </a:solidFill>
+                          <a:latin typeface="Arial"/>
+                          <a:ea typeface="Microsoft JhengHei"/>
+                        </a:rPr>
+                        <a:t>✓ </a:t>
+                      </a:r>
+                      <a:r>
+                        <a:rPr sz="1250" b="0" i="0">
+                          <a:solidFill>
+                            <a:srgbClr val="333D47"/>
+                          </a:solidFill>
+                          <a:latin typeface="Arial"/>
+                          <a:ea typeface="Microsoft JhengHei"/>
+                        </a:rPr>
+                        <a:t>M17642</a:t>
+                      </a:r>
+                    </a:p>
+                  </a:txBody>
+                  <a:tcPr marL="91440" marR="91440" marT="45720" marB="45720" anchor="ctr">
+                    <a:lnL w="0">
+                      <a:noFill/>
+                    </a:lnL>
+                    <a:lnR w="0">
+                      <a:noFill/>
+                    </a:lnR>
+                    <a:lnT w="0">
+                      <a:noFill/>
+                    </a:lnT>
+                    <a:lnB w="19050" cmpd="sng">
+                      <a:solidFill>
+                        <a:srgbClr val="FFFFFF"/>
+                      </a:solidFill>
+                    </a:lnB>
+                    <a:solidFill>
+                      <a:srgbClr val="E6F2EA"/>
+                    </a:solidFill>
+                  </a:tcPr>
+                </a:tc>
+              </a:tr>
+              <a:tr h="566928">
+                <a:tc>
+                  <a:txBody>
+                    <a:bodyPr wrap="square"/>
+                    <a:lstStyle/>
+                    <a:p>
+                      <a:pPr algn="l"/>
+                      <a:r>
+                        <a:rPr sz="1300" b="1" i="0">
+                          <a:solidFill>
+                            <a:srgbClr val="333D47"/>
+                          </a:solidFill>
+                          <a:latin typeface="Arial"/>
+                          <a:ea typeface="Microsoft JhengHei"/>
+                        </a:rPr>
+                        <a:t>Doctor</a:t>
+                      </a:r>
+                    </a:p>
+                    <a:p>
+                      <a:pPr algn="l"/>
+                      <a:r>
+                        <a:rPr sz="1100" b="0" i="0">
+                          <a:solidFill>
+                            <a:srgbClr val="5F6770"/>
+                          </a:solidFill>
+                          <a:latin typeface="Arial"/>
+                          <a:ea typeface="Microsoft JhengHei"/>
+                        </a:rPr>
+                        <a:t>Dental receipt</a:t>
+                      </a:r>
+                    </a:p>
+                  </a:txBody>
+                  <a:tcPr marL="91440" marR="91440" marT="45720" marB="45720" anchor="ctr">
+                    <a:lnL w="0">
+                      <a:noFill/>
+                    </a:lnL>
+                    <a:lnR w="0">
+                      <a:noFill/>
+                    </a:lnR>
+                    <a:lnT w="0">
+                      <a:noFill/>
+                    </a:lnT>
+                    <a:lnB w="19050" cmpd="sng">
+                      <a:solidFill>
+                        <a:srgbClr val="FFFFFF"/>
+                      </a:solidFill>
+                    </a:lnB>
+                    <a:noFill/>
+                  </a:tcPr>
+                </a:tc>
+                <a:tc>
+                  <a:txBody>
+                    <a:bodyPr wrap="square"/>
+                    <a:lstStyle/>
+                    <a:p>
+                      <a:pPr algn="l"/>
+                      <a:r>
+                        <a:rPr sz="1250" b="1" i="0">
+                          <a:solidFill>
+                            <a:srgbClr val="D31145"/>
+                          </a:solidFill>
+                          <a:latin typeface="Arial"/>
+                          <a:ea typeface="Microsoft JhengHei"/>
+                        </a:rPr>
+                        <a:t>✗ </a:t>
+                      </a:r>
+                      <a:r>
+                        <a:rPr sz="1250" b="0" i="0">
+                          <a:solidFill>
+                            <a:srgbClr val="333D47"/>
+                          </a:solidFill>
+                          <a:latin typeface="Arial"/>
+                          <a:ea typeface="Microsoft JhengHei"/>
+                        </a:rPr>
+                        <a:t>Dr. Ho Ching Yee, BDS (HK)</a:t>
+                      </a:r>
+                    </a:p>
+                  </a:txBody>
+                  <a:tcPr marL="91440" marR="91440" marT="45720" marB="45720" anchor="ctr">
+                    <a:lnL w="0">
+                      <a:noFill/>
+                    </a:lnL>
+                    <a:lnR w="0">
+                      <a:noFill/>
+                    </a:lnR>
+                    <a:lnT w="0">
+                      <a:noFill/>
+                    </a:lnT>
+                    <a:lnB w="19050" cmpd="sng">
+                      <a:solidFill>
+                        <a:srgbClr val="FFFFFF"/>
+                      </a:solidFill>
+                    </a:lnB>
+                    <a:solidFill>
+                      <a:srgbClr val="FBE7EC"/>
+                    </a:solidFill>
+                  </a:tcPr>
+                </a:tc>
+                <a:tc>
+                  <a:txBody>
+                    <a:bodyPr wrap="square"/>
+                    <a:lstStyle/>
+                    <a:p>
+                      <a:pPr algn="l"/>
+                      <a:r>
+                        <a:rPr sz="1250" b="0" i="1">
+                          <a:solidFill>
+                            <a:srgbClr val="333D47"/>
+                          </a:solidFill>
+                          <a:latin typeface="Arial"/>
+                          <a:ea typeface="Microsoft JhengHei"/>
+                        </a:rPr>
+                        <a:t>“Leave out qualifications and post-nominals”</a:t>
+                      </a:r>
+                    </a:p>
+                  </a:txBody>
+                  <a:tcPr marL="91440" marR="91440" marT="45720" marB="45720" anchor="ctr">
+                    <a:lnL w="0">
+                      <a:noFill/>
+                    </a:lnL>
+                    <a:lnR w="0">
+                      <a:noFill/>
+                    </a:lnR>
+                    <a:lnT w="0">
+                      <a:noFill/>
+                    </a:lnT>
+                    <a:lnB w="19050" cmpd="sng">
+                      <a:solidFill>
+                        <a:srgbClr val="FFFFFF"/>
+                      </a:solidFill>
+                    </a:lnB>
+                    <a:noFill/>
+                  </a:tcPr>
+                </a:tc>
+                <a:tc>
+                  <a:txBody>
+                    <a:bodyPr wrap="square"/>
+                    <a:lstStyle/>
+                    <a:p>
+                      <a:pPr algn="l"/>
+                      <a:r>
+                        <a:rPr sz="1250" b="1" i="0">
+                          <a:solidFill>
+                            <a:srgbClr val="1E7B4A"/>
+                          </a:solidFill>
+                          <a:latin typeface="Arial"/>
+                          <a:ea typeface="Microsoft JhengHei"/>
+                        </a:rPr>
+                        <a:t>✓ </a:t>
+                      </a:r>
+                      <a:r>
+                        <a:rPr sz="1250" b="0" i="0">
+                          <a:solidFill>
+                            <a:srgbClr val="333D47"/>
+                          </a:solidFill>
+                          <a:latin typeface="Arial"/>
+                          <a:ea typeface="Microsoft JhengHei"/>
+                        </a:rPr>
+                        <a:t>Dr. Ho Ching Yee</a:t>
+                      </a:r>
+                    </a:p>
+                  </a:txBody>
+                  <a:tcPr marL="91440" marR="91440" marT="45720" marB="45720" anchor="ctr">
+                    <a:lnL w="0">
+                      <a:noFill/>
+                    </a:lnL>
+                    <a:lnR w="0">
+                      <a:noFill/>
+                    </a:lnR>
+                    <a:lnT w="0">
+                      <a:noFill/>
+                    </a:lnT>
+                    <a:lnB w="19050" cmpd="sng">
+                      <a:solidFill>
+                        <a:srgbClr val="FFFFFF"/>
+                      </a:solidFill>
+                    </a:lnB>
+                    <a:solidFill>
+                      <a:srgbClr val="E6F2EA"/>
+                    </a:solidFill>
+                  </a:tcPr>
+                </a:tc>
+              </a:tr>
+              <a:tr h="566928">
+                <a:tc>
+                  <a:txBody>
+                    <a:bodyPr wrap="square"/>
+                    <a:lstStyle/>
+                    <a:p>
+                      <a:pPr algn="l"/>
+                      <a:r>
+                        <a:rPr sz="1300" b="1" i="0">
+                          <a:solidFill>
+                            <a:srgbClr val="333D47"/>
+                          </a:solidFill>
+                          <a:latin typeface="Arial"/>
+                          <a:ea typeface="Microsoft JhengHei"/>
+                        </a:rPr>
+                        <a:t>Doctor</a:t>
+                      </a:r>
+                    </a:p>
+                    <a:p>
+                      <a:pPr algn="l"/>
+                      <a:r>
+                        <a:rPr sz="1100" b="0" i="0">
+                          <a:solidFill>
+                            <a:srgbClr val="5F6770"/>
+                          </a:solidFill>
+                          <a:latin typeface="Arial"/>
+                          <a:ea typeface="Microsoft JhengHei"/>
+                        </a:rPr>
+                        <a:t>Pharmacy receipt</a:t>
+                      </a:r>
+                    </a:p>
+                  </a:txBody>
+                  <a:tcPr marL="91440" marR="91440" marT="45720" marB="45720" anchor="ctr">
+                    <a:lnL w="0">
+                      <a:noFill/>
+                    </a:lnL>
+                    <a:lnR w="0">
+                      <a:noFill/>
+                    </a:lnR>
+                    <a:lnT w="0">
+                      <a:noFill/>
+                    </a:lnT>
+                    <a:lnB w="19050" cmpd="sng">
+                      <a:solidFill>
+                        <a:srgbClr val="FFFFFF"/>
+                      </a:solidFill>
+                    </a:lnB>
+                    <a:noFill/>
+                  </a:tcPr>
+                </a:tc>
+                <a:tc>
+                  <a:txBody>
+                    <a:bodyPr wrap="square"/>
+                    <a:lstStyle/>
+                    <a:p>
+                      <a:pPr algn="l"/>
+                      <a:r>
+                        <a:rPr sz="1250" b="1" i="0">
+                          <a:solidFill>
+                            <a:srgbClr val="D31145"/>
+                          </a:solidFill>
+                          <a:latin typeface="Arial"/>
+                          <a:ea typeface="Microsoft JhengHei"/>
+                        </a:rPr>
+                        <a:t>✗ </a:t>
+                      </a:r>
+                      <a:r>
+                        <a:rPr sz="1250" b="0" i="0">
+                          <a:solidFill>
+                            <a:srgbClr val="333D47"/>
+                          </a:solidFill>
+                          <a:latin typeface="Arial"/>
+                          <a:ea typeface="Microsoft JhengHei"/>
+                        </a:rPr>
+                        <a:t>Dr Jessica Sterenborg Picton Medical Centre</a:t>
+                      </a:r>
+                    </a:p>
+                  </a:txBody>
+                  <a:tcPr marL="91440" marR="91440" marT="45720" marB="45720" anchor="ctr">
+                    <a:lnL w="0">
+                      <a:noFill/>
+                    </a:lnL>
+                    <a:lnR w="0">
+                      <a:noFill/>
+                    </a:lnR>
+                    <a:lnT w="0">
+                      <a:noFill/>
+                    </a:lnT>
+                    <a:lnB w="19050" cmpd="sng">
+                      <a:solidFill>
+                        <a:srgbClr val="FFFFFF"/>
+                      </a:solidFill>
+                    </a:lnB>
+                    <a:solidFill>
+                      <a:srgbClr val="FBE7EC"/>
+                    </a:solidFill>
+                  </a:tcPr>
+                </a:tc>
+                <a:tc>
+                  <a:txBody>
+                    <a:bodyPr wrap="square"/>
+                    <a:lstStyle/>
+                    <a:p>
+                      <a:pPr algn="l"/>
+                      <a:r>
+                        <a:rPr sz="1250" b="0" i="1">
+                          <a:solidFill>
+                            <a:srgbClr val="333D47"/>
+                          </a:solidFill>
+                          <a:latin typeface="Arial"/>
+                          <a:ea typeface="Microsoft JhengHei"/>
+                        </a:rPr>
+                        <a:t>“clinic, hospital or practice names”</a:t>
+                      </a:r>
+                    </a:p>
+                  </a:txBody>
+                  <a:tcPr marL="91440" marR="91440" marT="45720" marB="45720" anchor="ctr">
+                    <a:lnL w="0">
+                      <a:noFill/>
+                    </a:lnL>
+                    <a:lnR w="0">
+                      <a:noFill/>
+                    </a:lnR>
+                    <a:lnT w="0">
+                      <a:noFill/>
+                    </a:lnT>
+                    <a:lnB w="19050" cmpd="sng">
+                      <a:solidFill>
+                        <a:srgbClr val="FFFFFF"/>
+                      </a:solidFill>
+                    </a:lnB>
+                    <a:noFill/>
+                  </a:tcPr>
+                </a:tc>
+                <a:tc>
+                  <a:txBody>
+                    <a:bodyPr wrap="square"/>
+                    <a:lstStyle/>
+                    <a:p>
+                      <a:pPr algn="l"/>
+                      <a:r>
+                        <a:rPr sz="1250" b="1" i="0">
+                          <a:solidFill>
+                            <a:srgbClr val="1E7B4A"/>
+                          </a:solidFill>
+                          <a:latin typeface="Arial"/>
+                          <a:ea typeface="Microsoft JhengHei"/>
+                        </a:rPr>
+                        <a:t>✓ </a:t>
+                      </a:r>
+                      <a:r>
+                        <a:rPr sz="1250" b="0" i="0">
+                          <a:solidFill>
+                            <a:srgbClr val="333D47"/>
+                          </a:solidFill>
+                          <a:latin typeface="Arial"/>
+                          <a:ea typeface="Microsoft JhengHei"/>
+                        </a:rPr>
+                        <a:t>Dr Jessica Sterenborg</a:t>
+                      </a:r>
+                    </a:p>
+                  </a:txBody>
+                  <a:tcPr marL="91440" marR="91440" marT="45720" marB="45720" anchor="ctr">
+                    <a:lnL w="0">
+                      <a:noFill/>
+                    </a:lnL>
+                    <a:lnR w="0">
+                      <a:noFill/>
+                    </a:lnR>
+                    <a:lnT w="0">
+                      <a:noFill/>
+                    </a:lnT>
+                    <a:lnB w="19050" cmpd="sng">
+                      <a:solidFill>
+                        <a:srgbClr val="FFFFFF"/>
+                      </a:solidFill>
+                    </a:lnB>
+                    <a:solidFill>
+                      <a:srgbClr val="E6F2EA"/>
+                    </a:solidFill>
+                  </a:tcPr>
+                </a:tc>
+              </a:tr>
+              <a:tr h="566928">
+                <a:tc>
+                  <a:txBody>
+                    <a:bodyPr wrap="square"/>
+                    <a:lstStyle/>
+                    <a:p>
+                      <a:pPr algn="l"/>
+                      <a:r>
+                        <a:rPr sz="1300" b="1" i="0">
+                          <a:solidFill>
+                            <a:srgbClr val="333D47"/>
+                          </a:solidFill>
+                          <a:latin typeface="Arial"/>
+                          <a:ea typeface="Microsoft JhengHei"/>
+                        </a:rPr>
+                        <a:t>Total</a:t>
+                      </a:r>
+                    </a:p>
+                    <a:p>
+                      <a:pPr algn="l"/>
+                      <a:r>
+                        <a:rPr sz="1100" b="0" i="0">
+                          <a:solidFill>
+                            <a:srgbClr val="5F6770"/>
+                          </a:solidFill>
+                          <a:latin typeface="Arial"/>
+                          <a:ea typeface="Microsoft JhengHei"/>
+                        </a:rPr>
+                        <a:t>Vet invoice</a:t>
+                      </a:r>
+                    </a:p>
+                  </a:txBody>
+                  <a:tcPr marL="91440" marR="91440" marT="45720" marB="45720" anchor="ctr">
+                    <a:lnL w="0">
+                      <a:noFill/>
+                    </a:lnL>
+                    <a:lnR w="0">
+                      <a:noFill/>
+                    </a:lnR>
+                    <a:lnT w="0">
+                      <a:noFill/>
+                    </a:lnT>
+                    <a:lnB w="19050" cmpd="sng">
+                      <a:solidFill>
+                        <a:srgbClr val="FFFFFF"/>
+                      </a:solidFill>
+                    </a:lnB>
+                    <a:noFill/>
+                  </a:tcPr>
+                </a:tc>
+                <a:tc>
+                  <a:txBody>
+                    <a:bodyPr wrap="square"/>
+                    <a:lstStyle/>
+                    <a:p>
+                      <a:pPr algn="l"/>
+                      <a:r>
+                        <a:rPr sz="1250" b="1" i="0">
+                          <a:solidFill>
+                            <a:srgbClr val="D31145"/>
+                          </a:solidFill>
+                          <a:latin typeface="Arial"/>
+                          <a:ea typeface="Microsoft JhengHei"/>
+                        </a:rPr>
+                        <a:t>✗ </a:t>
+                      </a:r>
+                      <a:r>
+                        <a:rPr sz="1250" b="0" i="0">
+                          <a:solidFill>
+                            <a:srgbClr val="333D47"/>
+                          </a:solidFill>
+                          <a:latin typeface="Arial"/>
+                          <a:ea typeface="Microsoft JhengHei"/>
+                        </a:rPr>
+                        <a:t>HKD 1361.50</a:t>
+                      </a:r>
+                    </a:p>
+                  </a:txBody>
+                  <a:tcPr marL="91440" marR="91440" marT="45720" marB="45720" anchor="ctr">
+                    <a:lnL w="0">
+                      <a:noFill/>
+                    </a:lnL>
+                    <a:lnR w="0">
+                      <a:noFill/>
+                    </a:lnR>
+                    <a:lnT w="0">
+                      <a:noFill/>
+                    </a:lnT>
+                    <a:lnB w="19050" cmpd="sng">
+                      <a:solidFill>
+                        <a:srgbClr val="FFFFFF"/>
+                      </a:solidFill>
+                    </a:lnB>
+                    <a:solidFill>
+                      <a:srgbClr val="FBE7EC"/>
+                    </a:solidFill>
+                  </a:tcPr>
+                </a:tc>
+                <a:tc>
+                  <a:txBody>
+                    <a:bodyPr wrap="square"/>
+                    <a:lstStyle/>
+                    <a:p>
+                      <a:pPr algn="l"/>
+                      <a:r>
+                        <a:rPr sz="1250" b="0" i="1">
+                          <a:solidFill>
+                            <a:srgbClr val="333D47"/>
+                          </a:solidFill>
+                          <a:latin typeface="Arial"/>
+                          <a:ea typeface="Microsoft JhengHei"/>
+                        </a:rPr>
+                        <a:t>“after any discounts, rounding or other adjustments”</a:t>
+                      </a:r>
+                    </a:p>
+                  </a:txBody>
+                  <a:tcPr marL="91440" marR="91440" marT="45720" marB="45720" anchor="ctr">
+                    <a:lnL w="0">
+                      <a:noFill/>
+                    </a:lnL>
+                    <a:lnR w="0">
+                      <a:noFill/>
+                    </a:lnR>
+                    <a:lnT w="0">
+                      <a:noFill/>
+                    </a:lnT>
+                    <a:lnB w="19050" cmpd="sng">
+                      <a:solidFill>
+                        <a:srgbClr val="FFFFFF"/>
+                      </a:solidFill>
+                    </a:lnB>
+                    <a:noFill/>
+                  </a:tcPr>
+                </a:tc>
+                <a:tc>
+                  <a:txBody>
+                    <a:bodyPr wrap="square"/>
+                    <a:lstStyle/>
+                    <a:p>
+                      <a:pPr algn="l"/>
+                      <a:r>
+                        <a:rPr sz="1250" b="1" i="0">
+                          <a:solidFill>
+                            <a:srgbClr val="1E7B4A"/>
+                          </a:solidFill>
+                          <a:latin typeface="Arial"/>
+                          <a:ea typeface="Microsoft JhengHei"/>
+                        </a:rPr>
+                        <a:t>✓ </a:t>
+                      </a:r>
+                      <a:r>
+                        <a:rPr sz="1250" b="0" i="0">
+                          <a:solidFill>
+                            <a:srgbClr val="333D47"/>
+                          </a:solidFill>
+                          <a:latin typeface="Arial"/>
+                          <a:ea typeface="Microsoft JhengHei"/>
+                        </a:rPr>
+                        <a:t>HKD 1361.00</a:t>
+                      </a:r>
+                    </a:p>
+                  </a:txBody>
+                  <a:tcPr marL="91440" marR="91440" marT="45720" marB="45720" anchor="ctr">
+                    <a:lnL w="0">
+                      <a:noFill/>
+                    </a:lnL>
+                    <a:lnR w="0">
+                      <a:noFill/>
+                    </a:lnR>
+                    <a:lnT w="0">
+                      <a:noFill/>
+                    </a:lnT>
+                    <a:lnB w="19050" cmpd="sng">
+                      <a:solidFill>
+                        <a:srgbClr val="FFFFFF"/>
+                      </a:solidFill>
+                    </a:lnB>
+                    <a:solidFill>
+                      <a:srgbClr val="E6F2EA"/>
+                    </a:solidFill>
+                  </a:tcPr>
+                </a:tc>
+              </a:tr>
+            </a:tbl>
+          </a:graphicData>
+        </a:graphic>
+      </p:graphicFrame>
+      <p:sp>
+        <p:nvSpPr>
+          <p:cNvPr id="13" name="Rectangle 12"/>
+          <p:cNvSpPr/>
+          <p:nvPr/>
+        </p:nvSpPr>
+        <p:spPr>
+          <a:xfrm>
+            <a:off x="356616" y="4709160"/>
+            <a:ext cx="2731770" cy="685800"/>
+          </a:xfrm>
+          <a:prstGeom prst="rect">
+            <a:avLst/>
+          </a:prstGeom>
+          <a:solidFill>
+            <a:srgbClr val="FFFFFF"/>
+          </a:solidFill>
+          <a:ln w="25400">
+            <a:solidFill>
+              <a:srgbClr val="D31145"/>
+            </a:solidFill>
+          </a:ln>
+        </p:spPr>
+        <p:txBody>
+          <a:bodyPr rtlCol="0" anchor="ctr" wrap="square" lIns="146304" rIns="146304" tIns="109728" bIns="109728"/>
+          <a:lstStyle/>
+          <a:p>
+            <a:pPr algn="l" marL="0" indent="0">
+              <a:spcAft>
+                <a:spcPts val="200"/>
+              </a:spcAft>
+              <a:buNone/>
+            </a:pPr>
+            <a:r>
+              <a:rPr sz="1400" b="1" i="0">
+                <a:solidFill>
+                  <a:srgbClr val="D31145"/>
+                </a:solidFill>
+                <a:latin typeface="Arial"/>
+                <a:ea typeface="Microsoft JhengHei"/>
+              </a:rPr>
+              <a:t>Prompt wording</a:t>
+            </a:r>
+          </a:p>
+          <a:p>
+            <a:pPr marL="0" indent="0" algn="l">
+              <a:spcAft>
+                <a:spcPts val="0"/>
+              </a:spcAft>
+              <a:buNone/>
+            </a:pPr>
+            <a:r>
+              <a:rPr sz="1250" b="0" i="0">
+                <a:solidFill>
+                  <a:srgbClr val="333D47"/>
+                </a:solidFill>
+                <a:latin typeface="Arial"/>
+                <a:ea typeface="Microsoft JhengHei"/>
+              </a:rPr>
+              <a:t>4 fields fixed</a:t>
+            </a:r>
+          </a:p>
+        </p:txBody>
+      </p:sp>
+      <p:sp>
+        <p:nvSpPr>
+          <p:cNvPr id="14" name="Rectangle 13"/>
+          <p:cNvSpPr/>
+          <p:nvPr/>
+        </p:nvSpPr>
+        <p:spPr>
+          <a:xfrm>
+            <a:off x="3271266" y="4709160"/>
+            <a:ext cx="2731770" cy="685800"/>
+          </a:xfrm>
+          <a:prstGeom prst="rect">
+            <a:avLst/>
+          </a:prstGeom>
+          <a:solidFill>
+            <a:srgbClr val="F2F2F2"/>
+          </a:solidFill>
+          <a:ln>
+            <a:noFill/>
+          </a:ln>
+        </p:spPr>
+        <p:txBody>
+          <a:bodyPr rtlCol="0" anchor="ctr" wrap="square" lIns="146304" rIns="146304" tIns="109728" bIns="109728"/>
+          <a:lstStyle/>
+          <a:p>
+            <a:pPr algn="l" marL="0" indent="0">
+              <a:spcAft>
+                <a:spcPts val="200"/>
+              </a:spcAft>
+              <a:buNone/>
+            </a:pPr>
+            <a:r>
+              <a:rPr sz="1400" b="1" i="0">
+                <a:solidFill>
+                  <a:srgbClr val="333D47"/>
+                </a:solidFill>
+                <a:latin typeface="Arial"/>
+                <a:ea typeface="Microsoft JhengHei"/>
+              </a:rPr>
+              <a:t>Python checks</a:t>
+            </a:r>
+          </a:p>
+          <a:p>
+            <a:pPr marL="0" indent="0" algn="l">
+              <a:spcAft>
+                <a:spcPts val="0"/>
+              </a:spcAft>
+              <a:buNone/>
+            </a:pPr>
+            <a:r>
+              <a:rPr sz="1250" b="0" i="0">
+                <a:solidFill>
+                  <a:srgbClr val="5F6770"/>
+                </a:solidFill>
+                <a:latin typeface="Arial"/>
+                <a:ea typeface="Microsoft JhengHei"/>
+              </a:rPr>
+              <a:t>changed 0 values</a:t>
+            </a:r>
+          </a:p>
+        </p:txBody>
+      </p:sp>
+      <p:sp>
+        <p:nvSpPr>
+          <p:cNvPr id="15" name="Rectangle 14"/>
+          <p:cNvSpPr/>
+          <p:nvPr/>
+        </p:nvSpPr>
+        <p:spPr>
+          <a:xfrm>
+            <a:off x="6185916" y="4709160"/>
+            <a:ext cx="2731770" cy="685800"/>
+          </a:xfrm>
+          <a:prstGeom prst="rect">
+            <a:avLst/>
+          </a:prstGeom>
+          <a:solidFill>
+            <a:srgbClr val="F2F2F2"/>
+          </a:solidFill>
+          <a:ln>
+            <a:noFill/>
+          </a:ln>
+        </p:spPr>
+        <p:txBody>
+          <a:bodyPr rtlCol="0" anchor="ctr" wrap="square" lIns="146304" rIns="146304" tIns="109728" bIns="109728"/>
+          <a:lstStyle/>
+          <a:p>
+            <a:pPr algn="l" marL="0" indent="0">
+              <a:spcAft>
+                <a:spcPts val="200"/>
+              </a:spcAft>
+              <a:buNone/>
+            </a:pPr>
+            <a:r>
+              <a:rPr sz="1400" b="1" i="0">
+                <a:solidFill>
+                  <a:srgbClr val="333D47"/>
+                </a:solidFill>
+                <a:latin typeface="Arial"/>
+                <a:ea typeface="Microsoft JhengHei"/>
+              </a:rPr>
+              <a:t>OCR row layout</a:t>
+            </a:r>
+          </a:p>
+          <a:p>
+            <a:pPr marL="0" indent="0" algn="l">
+              <a:spcAft>
+                <a:spcPts val="0"/>
+              </a:spcAft>
+              <a:buNone/>
+            </a:pPr>
+            <a:r>
+              <a:rPr sz="1250" b="0" i="0">
+                <a:solidFill>
+                  <a:srgbClr val="5F6770"/>
+                </a:solidFill>
+                <a:latin typeface="Arial"/>
+                <a:ea typeface="Microsoft JhengHei"/>
+              </a:rPr>
+              <a:t>plain text also 49/51</a:t>
+            </a:r>
+          </a:p>
+        </p:txBody>
+      </p:sp>
+      <p:sp>
+        <p:nvSpPr>
+          <p:cNvPr id="16" name="Rectangle 15"/>
+          <p:cNvSpPr/>
+          <p:nvPr/>
+        </p:nvSpPr>
+        <p:spPr>
+          <a:xfrm>
+            <a:off x="9100566" y="4709160"/>
+            <a:ext cx="2731770" cy="685800"/>
+          </a:xfrm>
+          <a:prstGeom prst="rect">
+            <a:avLst/>
+          </a:prstGeom>
+          <a:solidFill>
+            <a:srgbClr val="F2F2F2"/>
+          </a:solidFill>
+          <a:ln>
+            <a:noFill/>
+          </a:ln>
+        </p:spPr>
+        <p:txBody>
+          <a:bodyPr rtlCol="0" anchor="ctr" wrap="square" lIns="146304" rIns="146304" tIns="109728" bIns="109728"/>
+          <a:lstStyle/>
+          <a:p>
+            <a:pPr algn="l" marL="0" indent="0">
+              <a:spcAft>
+                <a:spcPts val="200"/>
+              </a:spcAft>
+              <a:buNone/>
+            </a:pPr>
+            <a:r>
+              <a:rPr sz="1400" b="1" i="0">
+                <a:solidFill>
+                  <a:srgbClr val="333D47"/>
+                </a:solidFill>
+                <a:latin typeface="Arial"/>
+                <a:ea typeface="Microsoft JhengHei"/>
+              </a:rPr>
+              <a:t>Photo attached</a:t>
+            </a:r>
+          </a:p>
+          <a:p>
+            <a:pPr marL="0" indent="0" algn="l">
+              <a:spcAft>
+                <a:spcPts val="0"/>
+              </a:spcAft>
+              <a:buNone/>
+            </a:pPr>
+            <a:r>
+              <a:rPr sz="1250" b="0" i="0">
+                <a:solidFill>
+                  <a:srgbClr val="5F6770"/>
+                </a:solidFill>
+                <a:latin typeface="Arial"/>
+                <a:ea typeface="Microsoft JhengHei"/>
+              </a:rPr>
+              <a:t>also 49/51</a:t>
+            </a:r>
+          </a:p>
+        </p:txBody>
+      </p:sp>
+      <p:sp>
+        <p:nvSpPr>
+          <p:cNvPr id="17" name="TextBox 16"/>
+          <p:cNvSpPr txBox="1"/>
+          <p:nvPr/>
+        </p:nvSpPr>
+        <p:spPr>
+          <a:xfrm>
+            <a:off x="356616" y="5532120"/>
+            <a:ext cx="10972800" cy="320040"/>
+          </a:xfrm>
+          <a:prstGeom prst="rect">
+            <a:avLst/>
+          </a:prstGeom>
+          <a:noFill/>
+        </p:spPr>
+        <p:txBody>
+          <a:bodyPr wrap="square" lIns="0" rIns="0" tIns="0" bIns="0" anchor="t"/>
+          <a:lstStyle/>
+          <a:p>
+            <a:pPr marL="0" indent="0" algn="l">
+              <a:spcAft>
+                <a:spcPts val="0"/>
+              </a:spcAft>
+              <a:buNone/>
+            </a:pPr>
+            <a:r>
+              <a:rPr sz="1100" b="0" i="1">
+                <a:solidFill>
+                  <a:srgbClr val="5F6770"/>
+                </a:solidFill>
+                <a:latin typeface="Arial"/>
+                <a:ea typeface="Microsoft JhengHei"/>
+              </a:rPr>
+              <a:t>Development result: prompt v2 was written after reviewing these errors. Still wrong: the vet invoice doctor and the pharmacy service date.</a:t>
+            </a:r>
+          </a:p>
+        </p:txBody>
+      </p:sp>
+    </p:spTree>
+  </p:cSld>
+  <p:clrMapOvr>
+    <a:masterClrMapping/>
+  </p:clrMapOvr>
+</p:sld>
+</file>
+
+<file path=ppt/slides/slide7.xml><?xml version="1.0" encoding="utf-8"?>
 <p:sld xmlns:a="http://schemas.openxmlformats.org/drawingml/2006/main" xmlns:p="http://schemas.openxmlformats.org/presentationml/2006/main" xmlns:r="http://schemas.openxmlformats.org/officeDocument/2006/relationships">
   <p:cSld>
     <p:spTree>
@@ -10060,7 +14895,7 @@
 </p:sld>
 </file>
 
-<file path=ppt/slides/slide6.xml><?xml version="1.0" encoding="utf-8"?>
+<file path=ppt/slides/slide8.xml><?xml version="1.0" encoding="utf-8"?>
 <p:sld xmlns:a="http://schemas.openxmlformats.org/drawingml/2006/main" xmlns:p="http://schemas.openxmlformats.org/presentationml/2006/main" xmlns:r="http://schemas.openxmlformats.org/officeDocument/2006/relationships">
   <p:cSld>
     <p:spTree>
@@ -10491,7 +15326,7 @@
 </p:sld>
 </file>
 
-<file path=ppt/slides/slide7.xml><?xml version="1.0" encoding="utf-8"?>
+<file path=ppt/slides/slide9.xml><?xml version="1.0" encoding="utf-8"?>
 <p:sld xmlns:a="http://schemas.openxmlformats.org/drawingml/2006/main" xmlns:p="http://schemas.openxmlformats.org/presentationml/2006/main" xmlns:r="http://schemas.openxmlformats.org/officeDocument/2006/relationships">
   <p:cSld>
     <p:spTree>
@@ -11617,1693 +16452,7 @@
                 <a:latin typeface="Arial"/>
                 <a:ea typeface="Microsoft JhengHei"/>
               </a:rPr>
-              <a:t>AOAI (original prompt): picked the sub total. Prompt v2 fixes it, but was tuned on this receipt.</a:t>
-            </a:r>
-          </a:p>
-        </p:txBody>
-      </p:sp>
-    </p:spTree>
-  </p:cSld>
-  <p:clrMapOvr>
-    <a:masterClrMapping/>
-  </p:clrMapOvr>
-</p:sld>
-</file>
-
-<file path=ppt/slides/slide8.xml><?xml version="1.0" encoding="utf-8"?>
-<p:sld xmlns:a="http://schemas.openxmlformats.org/drawingml/2006/main" xmlns:p="http://schemas.openxmlformats.org/presentationml/2006/main" xmlns:r="http://schemas.openxmlformats.org/officeDocument/2006/relationships">
-  <p:cSld>
-    <p:spTree>
-      <p:nvGrpSpPr>
-        <p:cNvPr id="1" name=""/>
-        <p:cNvGrpSpPr/>
-        <p:nvPr/>
-      </p:nvGrpSpPr>
-      <p:grpSpPr/>
-      <p:sp>
-        <p:nvSpPr>
-          <p:cNvPr id="4" name="Text Placeholder 3"/>
-          <p:cNvSpPr>
-            <a:spLocks noGrp="1"/>
-          </p:cNvSpPr>
-          <p:nvPr>
-            <p:ph type="body" idx="10" sz="quarter"/>
-          </p:nvPr>
-        </p:nvSpPr>
-        <p:spPr>
-          <a:xfrm>
-            <a:off x="356616" y="502920"/>
-            <a:ext cx="11155680" cy="566928"/>
-          </a:xfrm>
-        </p:spPr>
-        <p:txBody>
-          <a:bodyPr lIns="0"/>
-          <a:lstStyle/>
-          <a:p>
-            <a:r>
-              <a:rPr sz="2800" b="1">
-                <a:solidFill>
-                  <a:srgbClr val="333D47"/>
-                </a:solidFill>
-                <a:latin typeface="Arial"/>
-                <a:ea typeface="Microsoft JhengHei"/>
-              </a:rPr>
-              <a:t>Development Effort and Maintenance</a:t>
-            </a:r>
-          </a:p>
-        </p:txBody>
-      </p:sp>
-      <p:sp>
-        <p:nvSpPr>
-          <p:cNvPr id="10" name="Slide Number Placeholder 5">
-            <a:extLst>
-              <a:ext uri="{FF2B5EF4-FFF2-40B4-BE49-F238E27FC236}">
-                <a16:creationId xmlns:a16="http://schemas.microsoft.com/office/drawing/2014/main" id="{3E493E1F-F28C-FD47-B996-3EBF17D328AE}"/>
-              </a:ext>
-            </a:extLst>
-          </p:cNvPr>
-          <p:cNvSpPr>
-            <a:spLocks noGrp="1"/>
-          </p:cNvSpPr>
-          <p:nvPr>
-            <p:ph type="sldNum" sz="quarter" idx="4"/>
-          </p:nvPr>
-        </p:nvSpPr>
-        <p:spPr>
-          <a:xfrm>
-            <a:off x="359999" y="6264872"/>
-            <a:ext cx="360000" cy="360000"/>
-          </a:xfrm>
-          <a:prstGeom prst="rect">
-            <a:avLst/>
-          </a:prstGeom>
-        </p:spPr>
-        <p:txBody>
-          <a:bodyPr vert="horz" lIns="91440" tIns="45720" rIns="91440" bIns="45720" rtlCol="0" anchor="ctr"/>
-          <a:lstStyle>
-            <a:lvl1pPr algn="l">
-              <a:defRPr sz="800" b="0" i="0">
-                <a:solidFill>
-                  <a:schemeClr val="tx1"/>
-                </a:solidFill>
-                <a:latin typeface="Arial" panose="020B0604020202020204" pitchFamily="34" charset="0"/>
-                <a:cs typeface="Arial" panose="020B0604020202020204" pitchFamily="34" charset="0"/>
-              </a:defRPr>
-            </a:lvl1pPr>
-          </a:lstStyle>
-          <a:p>
-            <a:fld id="{18A41853-EF22-D446-BDBC-A7CF3FE93503}" type="slidenum">
-              <a:rPr lang="en-US" smtClean="0"/>
-              <a:pPr/>
-              <a:t>‹#›</a:t>
-            </a:fld>
-            <a:endParaRPr lang="en-US" dirty="0"/>
-          </a:p>
-        </p:txBody>
-      </p:sp>
-      <p:sp>
-        <p:nvSpPr>
-          <p:cNvPr id="11" name="TextBox 10"/>
-          <p:cNvSpPr txBox="1"/>
-          <p:nvPr/>
-        </p:nvSpPr>
-        <p:spPr>
-          <a:xfrm>
-            <a:off x="356616" y="1115568"/>
-            <a:ext cx="11475720" cy="457200"/>
-          </a:xfrm>
-          <a:prstGeom prst="rect">
-            <a:avLst/>
-          </a:prstGeom>
-          <a:noFill/>
-        </p:spPr>
-        <p:txBody>
-          <a:bodyPr wrap="square" lIns="0" rIns="0" tIns="0" bIns="0" anchor="t"/>
-          <a:lstStyle/>
-          <a:p>
-            <a:pPr marL="0" indent="0" algn="l">
-              <a:spcAft>
-                <a:spcPts val="0"/>
-              </a:spcAft>
-              <a:buNone/>
-            </a:pPr>
-            <a:r>
-              <a:rPr sz="1700" b="0" i="0">
-                <a:solidFill>
-                  <a:srgbClr val="D31145"/>
-                </a:solidFill>
-                <a:latin typeface="Arial"/>
-                <a:ea typeface="Microsoft JhengHei"/>
-              </a:rPr>
-              <a:t>The difference is the manual work to handle each layout, and to keep it working.</a:t>
-            </a:r>
-          </a:p>
-        </p:txBody>
-      </p:sp>
-      <p:graphicFrame>
-        <p:nvGraphicFramePr>
-          <p:cNvPr id="12" name="Table 11"/>
-          <p:cNvGraphicFramePr>
-            <a:graphicFrameLocks noGrp="1"/>
-          </p:cNvGraphicFramePr>
-          <p:nvPr/>
-        </p:nvGraphicFramePr>
-        <p:xfrm>
-          <a:off x="356616" y="1783080"/>
-          <a:ext cx="11475720" cy="3383280"/>
-        </p:xfrm>
-        <a:graphic>
-          <a:graphicData uri="http://schemas.openxmlformats.org/drawingml/2006/table">
-            <a:tbl>
-              <a:tblPr firstRow="0" bandRow="0">
-                <a:tableStyleId>{2D5ABB26-0587-4C30-8999-92F81FD0307C}</a:tableStyleId>
-              </a:tblPr>
-              <a:tblGrid>
-                <a:gridCol w="2743200"/>
-                <a:gridCol w="4343400"/>
-                <a:gridCol w="4389120"/>
-              </a:tblGrid>
-              <a:tr h="548640">
-                <a:tc>
-                  <a:txBody>
-                    <a:bodyPr wrap="square"/>
-                    <a:lstStyle/>
-                    <a:p>
-                      <a:pPr algn="l"/>
-                      <a:r>
-                        <a:rPr sz="1500" b="1" i="0">
-                          <a:solidFill>
-                            <a:srgbClr val="FFFFFF"/>
-                          </a:solidFill>
-                          <a:latin typeface="Arial"/>
-                          <a:ea typeface="Microsoft JhengHei"/>
-                        </a:rPr>
-                        <a:t/>
-                      </a:r>
-                    </a:p>
-                  </a:txBody>
-                  <a:tcPr marL="91440" marR="91440" marT="45720" marB="45720" anchor="ctr">
-                    <a:lnL w="0">
-                      <a:noFill/>
-                    </a:lnL>
-                    <a:lnR w="0">
-                      <a:noFill/>
-                    </a:lnR>
-                    <a:lnT w="0">
-                      <a:noFill/>
-                    </a:lnT>
-                    <a:lnB w="0">
-                      <a:noFill/>
-                    </a:lnB>
-                    <a:solidFill>
-                      <a:srgbClr val="333D47"/>
-                    </a:solidFill>
-                  </a:tcPr>
-                </a:tc>
-                <a:tc>
-                  <a:txBody>
-                    <a:bodyPr wrap="square"/>
-                    <a:lstStyle/>
-                    <a:p>
-                      <a:pPr algn="l"/>
-                      <a:r>
-                        <a:rPr sz="1500" b="1" i="0">
-                          <a:solidFill>
-                            <a:srgbClr val="FFFFFF"/>
-                          </a:solidFill>
-                          <a:latin typeface="Arial"/>
-                          <a:ea typeface="Microsoft JhengHei"/>
-                        </a:rPr>
-                        <a:t>PaddleOCR Light + rules</a:t>
-                      </a:r>
-                    </a:p>
-                  </a:txBody>
-                  <a:tcPr marL="91440" marR="91440" marT="45720" marB="45720" anchor="ctr">
-                    <a:lnL w="0">
-                      <a:noFill/>
-                    </a:lnL>
-                    <a:lnR w="0">
-                      <a:noFill/>
-                    </a:lnR>
-                    <a:lnT w="0">
-                      <a:noFill/>
-                    </a:lnT>
-                    <a:lnB w="0">
-                      <a:noFill/>
-                    </a:lnB>
-                    <a:solidFill>
-                      <a:srgbClr val="333D47"/>
-                    </a:solidFill>
-                  </a:tcPr>
-                </a:tc>
-                <a:tc>
-                  <a:txBody>
-                    <a:bodyPr wrap="square"/>
-                    <a:lstStyle/>
-                    <a:p>
-                      <a:pPr algn="l"/>
-                      <a:r>
-                        <a:rPr sz="1500" b="1" i="0">
-                          <a:solidFill>
-                            <a:srgbClr val="FFFFFF"/>
-                          </a:solidFill>
-                          <a:latin typeface="Arial"/>
-                          <a:ea typeface="Microsoft JhengHei"/>
-                        </a:rPr>
-                        <a:t>Azure DI + AOAI</a:t>
-                      </a:r>
-                    </a:p>
-                  </a:txBody>
-                  <a:tcPr marL="91440" marR="91440" marT="45720" marB="45720" anchor="ctr">
-                    <a:lnL w="0">
-                      <a:noFill/>
-                    </a:lnL>
-                    <a:lnR w="0">
-                      <a:noFill/>
-                    </a:lnR>
-                    <a:lnT w="0">
-                      <a:noFill/>
-                    </a:lnT>
-                    <a:lnB w="0">
-                      <a:noFill/>
-                    </a:lnB>
-                    <a:solidFill>
-                      <a:srgbClr val="333D47"/>
-                    </a:solidFill>
-                  </a:tcPr>
-                </a:tc>
-              </a:tr>
-              <a:tr h="566928">
-                <a:tc>
-                  <a:txBody>
-                    <a:bodyPr wrap="square"/>
-                    <a:lstStyle/>
-                    <a:p>
-                      <a:pPr algn="l"/>
-                      <a:r>
-                        <a:rPr sz="1400" b="1" i="0">
-                          <a:solidFill>
-                            <a:srgbClr val="333D47"/>
-                          </a:solidFill>
-                          <a:latin typeface="Arial"/>
-                          <a:ea typeface="Microsoft JhengHei"/>
-                        </a:rPr>
-                        <a:t>Effort to improve</a:t>
-                      </a:r>
-                    </a:p>
-                  </a:txBody>
-                  <a:tcPr marL="91440" marR="91440" marT="45720" marB="45720" anchor="ctr">
-                    <a:lnL w="0">
-                      <a:noFill/>
-                    </a:lnL>
-                    <a:lnR w="0">
-                      <a:noFill/>
-                    </a:lnR>
-                    <a:lnT w="0">
-                      <a:noFill/>
-                    </a:lnT>
-                    <a:lnB w="9525" cmpd="sng">
-                      <a:solidFill>
-                        <a:srgbClr val="BFBFBF"/>
-                      </a:solidFill>
-                    </a:lnB>
-                    <a:noFill/>
-                  </a:tcPr>
-                </a:tc>
-                <a:tc>
-                  <a:txBody>
-                    <a:bodyPr wrap="square"/>
-                    <a:lstStyle/>
-                    <a:p>
-                      <a:pPr algn="l"/>
-                      <a:r>
-                        <a:rPr sz="1400" b="0" i="0">
-                          <a:solidFill>
-                            <a:srgbClr val="333D47"/>
-                          </a:solidFill>
-                          <a:latin typeface="Arial"/>
-                          <a:ea typeface="Microsoft JhengHei"/>
-                        </a:rPr>
-                        <a:t>Rules rewritten by hand after reviewing errors on these receipts</a:t>
-                      </a:r>
-                    </a:p>
-                  </a:txBody>
-                  <a:tcPr marL="91440" marR="91440" marT="45720" marB="45720" anchor="ctr">
-                    <a:lnL w="0">
-                      <a:noFill/>
-                    </a:lnL>
-                    <a:lnR w="0">
-                      <a:noFill/>
-                    </a:lnR>
-                    <a:lnT w="0">
-                      <a:noFill/>
-                    </a:lnT>
-                    <a:lnB w="9525" cmpd="sng">
-                      <a:solidFill>
-                        <a:srgbClr val="BFBFBF"/>
-                      </a:solidFill>
-                    </a:lnB>
-                    <a:noFill/>
-                  </a:tcPr>
-                </a:tc>
-                <a:tc>
-                  <a:txBody>
-                    <a:bodyPr wrap="square"/>
-                    <a:lstStyle/>
-                    <a:p>
-                      <a:pPr algn="l"/>
-                      <a:r>
-                        <a:rPr sz="1400" b="0" i="0">
-                          <a:solidFill>
-                            <a:srgbClr val="333D47"/>
-                          </a:solidFill>
-                          <a:latin typeface="Arial"/>
-                          <a:ea typeface="Microsoft JhengHei"/>
-                        </a:rPr>
-                        <a:t>One prompt revision after reviewing errors</a:t>
-                      </a:r>
-                    </a:p>
-                  </a:txBody>
-                  <a:tcPr marL="91440" marR="91440" marT="45720" marB="45720" anchor="ctr">
-                    <a:lnL w="0">
-                      <a:noFill/>
-                    </a:lnL>
-                    <a:lnR w="0">
-                      <a:noFill/>
-                    </a:lnR>
-                    <a:lnT w="0">
-                      <a:noFill/>
-                    </a:lnT>
-                    <a:lnB w="9525" cmpd="sng">
-                      <a:solidFill>
-                        <a:srgbClr val="BFBFBF"/>
-                      </a:solidFill>
-                    </a:lnB>
-                    <a:noFill/>
-                  </a:tcPr>
-                </a:tc>
-              </a:tr>
-              <a:tr h="566928">
-                <a:tc>
-                  <a:txBody>
-                    <a:bodyPr wrap="square"/>
-                    <a:lstStyle/>
-                    <a:p>
-                      <a:pPr algn="l"/>
-                      <a:r>
-                        <a:rPr sz="1400" b="1" i="0">
-                          <a:solidFill>
-                            <a:srgbClr val="333D47"/>
-                          </a:solidFill>
-                          <a:latin typeface="Arial"/>
-                          <a:ea typeface="Microsoft JhengHei"/>
-                        </a:rPr>
-                        <a:t>What a change looks like</a:t>
-                      </a:r>
-                    </a:p>
-                  </a:txBody>
-                  <a:tcPr marL="91440" marR="91440" marT="45720" marB="45720" anchor="ctr">
-                    <a:lnL w="0">
-                      <a:noFill/>
-                    </a:lnL>
-                    <a:lnR w="0">
-                      <a:noFill/>
-                    </a:lnR>
-                    <a:lnT w="0">
-                      <a:noFill/>
-                    </a:lnT>
-                    <a:lnB w="9525" cmpd="sng">
-                      <a:solidFill>
-                        <a:srgbClr val="BFBFBF"/>
-                      </a:solidFill>
-                    </a:lnB>
-                    <a:noFill/>
-                  </a:tcPr>
-                </a:tc>
-                <a:tc>
-                  <a:txBody>
-                    <a:bodyPr wrap="square"/>
-                    <a:lstStyle/>
-                    <a:p>
-                      <a:pPr algn="l"/>
-                      <a:r>
-                        <a:rPr sz="1400" b="0" i="0">
-                          <a:solidFill>
-                            <a:srgbClr val="333D47"/>
-                          </a:solidFill>
-                          <a:latin typeface="Arial"/>
-                          <a:ea typeface="Microsoft JhengHei"/>
-                        </a:rPr>
-                        <a:t>Code and label lists (69 → 225 phrases)</a:t>
-                      </a:r>
-                    </a:p>
-                  </a:txBody>
-                  <a:tcPr marL="91440" marR="91440" marT="45720" marB="45720" anchor="ctr">
-                    <a:lnL w="0">
-                      <a:noFill/>
-                    </a:lnL>
-                    <a:lnR w="0">
-                      <a:noFill/>
-                    </a:lnR>
-                    <a:lnT w="0">
-                      <a:noFill/>
-                    </a:lnT>
-                    <a:lnB w="9525" cmpd="sng">
-                      <a:solidFill>
-                        <a:srgbClr val="BFBFBF"/>
-                      </a:solidFill>
-                    </a:lnB>
-                    <a:noFill/>
-                  </a:tcPr>
-                </a:tc>
-                <a:tc>
-                  <a:txBody>
-                    <a:bodyPr wrap="square"/>
-                    <a:lstStyle/>
-                    <a:p>
-                      <a:pPr algn="l"/>
-                      <a:r>
-                        <a:rPr sz="1400" b="0" i="0">
-                          <a:solidFill>
-                            <a:srgbClr val="333D47"/>
-                          </a:solidFill>
-                          <a:latin typeface="Arial"/>
-                          <a:ea typeface="Microsoft JhengHei"/>
-                        </a:rPr>
-                        <a:t>Prompt wording and a few general checks</a:t>
-                      </a:r>
-                    </a:p>
-                  </a:txBody>
-                  <a:tcPr marL="91440" marR="91440" marT="45720" marB="45720" anchor="ctr">
-                    <a:lnL w="0">
-                      <a:noFill/>
-                    </a:lnL>
-                    <a:lnR w="0">
-                      <a:noFill/>
-                    </a:lnR>
-                    <a:lnT w="0">
-                      <a:noFill/>
-                    </a:lnT>
-                    <a:lnB w="9525" cmpd="sng">
-                      <a:solidFill>
-                        <a:srgbClr val="BFBFBF"/>
-                      </a:solidFill>
-                    </a:lnB>
-                    <a:noFill/>
-                  </a:tcPr>
-                </a:tc>
-              </a:tr>
-              <a:tr h="566928">
-                <a:tc>
-                  <a:txBody>
-                    <a:bodyPr wrap="square"/>
-                    <a:lstStyle/>
-                    <a:p>
-                      <a:pPr algn="l"/>
-                      <a:r>
-                        <a:rPr sz="1400" b="1" i="0">
-                          <a:solidFill>
-                            <a:srgbClr val="333D47"/>
-                          </a:solidFill>
-                          <a:latin typeface="Arial"/>
-                          <a:ea typeface="Microsoft JhengHei"/>
-                        </a:rPr>
-                        <a:t>Side effects seen</a:t>
-                      </a:r>
-                    </a:p>
-                  </a:txBody>
-                  <a:tcPr marL="91440" marR="91440" marT="45720" marB="45720" anchor="ctr">
-                    <a:lnL w="0">
-                      <a:noFill/>
-                    </a:lnL>
-                    <a:lnR w="0">
-                      <a:noFill/>
-                    </a:lnR>
-                    <a:lnT w="0">
-                      <a:noFill/>
-                    </a:lnT>
-                    <a:lnB w="9525" cmpd="sng">
-                      <a:solidFill>
-                        <a:srgbClr val="BFBFBF"/>
-                      </a:solidFill>
-                    </a:lnB>
-                    <a:noFill/>
-                  </a:tcPr>
-                </a:tc>
-                <a:tc>
-                  <a:txBody>
-                    <a:bodyPr wrap="square"/>
-                    <a:lstStyle/>
-                    <a:p>
-                      <a:pPr algn="l"/>
-                      <a:r>
-                        <a:rPr sz="1400" b="0" i="0">
-                          <a:solidFill>
-                            <a:srgbClr val="333D47"/>
-                          </a:solidFill>
-                          <a:latin typeface="Arial"/>
-                          <a:ea typeface="Microsoft JhengHei"/>
-                        </a:rPr>
-                        <a:t>1 correct field broken by the rule changes</a:t>
-                      </a:r>
-                    </a:p>
-                  </a:txBody>
-                  <a:tcPr marL="91440" marR="91440" marT="45720" marB="45720" anchor="ctr">
-                    <a:lnL w="0">
-                      <a:noFill/>
-                    </a:lnL>
-                    <a:lnR w="0">
-                      <a:noFill/>
-                    </a:lnR>
-                    <a:lnT w="0">
-                      <a:noFill/>
-                    </a:lnT>
-                    <a:lnB w="9525" cmpd="sng">
-                      <a:solidFill>
-                        <a:srgbClr val="BFBFBF"/>
-                      </a:solidFill>
-                    </a:lnB>
-                    <a:noFill/>
-                  </a:tcPr>
-                </a:tc>
-                <a:tc>
-                  <a:txBody>
-                    <a:bodyPr wrap="square"/>
-                    <a:lstStyle/>
-                    <a:p>
-                      <a:pPr algn="l"/>
-                      <a:r>
-                        <a:rPr sz="1400" b="0" i="0">
-                          <a:solidFill>
-                            <a:srgbClr val="333D47"/>
-                          </a:solidFill>
-                          <a:latin typeface="Arial"/>
-                          <a:ea typeface="Microsoft JhengHei"/>
-                        </a:rPr>
-                        <a:t>0 correct fields broken by the prompt revision</a:t>
-                      </a:r>
-                    </a:p>
-                  </a:txBody>
-                  <a:tcPr marL="91440" marR="91440" marT="45720" marB="45720" anchor="ctr">
-                    <a:lnL w="0">
-                      <a:noFill/>
-                    </a:lnL>
-                    <a:lnR w="0">
-                      <a:noFill/>
-                    </a:lnR>
-                    <a:lnT w="0">
-                      <a:noFill/>
-                    </a:lnT>
-                    <a:lnB w="9525" cmpd="sng">
-                      <a:solidFill>
-                        <a:srgbClr val="BFBFBF"/>
-                      </a:solidFill>
-                    </a:lnB>
-                    <a:noFill/>
-                  </a:tcPr>
-                </a:tc>
-              </a:tr>
-              <a:tr h="566928">
-                <a:tc>
-                  <a:txBody>
-                    <a:bodyPr wrap="square"/>
-                    <a:lstStyle/>
-                    <a:p>
-                      <a:pPr algn="l"/>
-                      <a:r>
-                        <a:rPr sz="1400" b="1" i="0">
-                          <a:solidFill>
-                            <a:srgbClr val="333D47"/>
-                          </a:solidFill>
-                          <a:latin typeface="Arial"/>
-                          <a:ea typeface="Microsoft JhengHei"/>
-                        </a:rPr>
-                        <a:t>New receipt layouts</a:t>
-                      </a:r>
-                    </a:p>
-                  </a:txBody>
-                  <a:tcPr marL="91440" marR="91440" marT="45720" marB="45720" anchor="ctr">
-                    <a:lnL w="0">
-                      <a:noFill/>
-                    </a:lnL>
-                    <a:lnR w="0">
-                      <a:noFill/>
-                    </a:lnR>
-                    <a:lnT w="0">
-                      <a:noFill/>
-                    </a:lnT>
-                    <a:lnB w="9525" cmpd="sng">
-                      <a:solidFill>
-                        <a:srgbClr val="BFBFBF"/>
-                      </a:solidFill>
-                    </a:lnB>
-                    <a:noFill/>
-                  </a:tcPr>
-                </a:tc>
-                <a:tc>
-                  <a:txBody>
-                    <a:bodyPr wrap="square"/>
-                    <a:lstStyle/>
-                    <a:p>
-                      <a:pPr algn="l"/>
-                      <a:r>
-                        <a:rPr sz="1400" b="0" i="0">
-                          <a:solidFill>
-                            <a:srgbClr val="333D47"/>
-                          </a:solidFill>
-                          <a:latin typeface="Arial"/>
-                          <a:ea typeface="Microsoft JhengHei"/>
-                        </a:rPr>
-                        <a:t>Likely more rule updates and a regression test of every receipt</a:t>
-                      </a:r>
-                    </a:p>
-                  </a:txBody>
-                  <a:tcPr marL="91440" marR="91440" marT="45720" marB="45720" anchor="ctr">
-                    <a:lnL w="0">
-                      <a:noFill/>
-                    </a:lnL>
-                    <a:lnR w="0">
-                      <a:noFill/>
-                    </a:lnR>
-                    <a:lnT w="0">
-                      <a:noFill/>
-                    </a:lnT>
-                    <a:lnB w="9525" cmpd="sng">
-                      <a:solidFill>
-                        <a:srgbClr val="BFBFBF"/>
-                      </a:solidFill>
-                    </a:lnB>
-                    <a:noFill/>
-                  </a:tcPr>
-                </a:tc>
-                <a:tc>
-                  <a:txBody>
-                    <a:bodyPr wrap="square"/>
-                    <a:lstStyle/>
-                    <a:p>
-                      <a:pPr algn="l"/>
-                      <a:r>
-                        <a:rPr sz="1400" b="0" i="0">
-                          <a:solidFill>
-                            <a:srgbClr val="333D47"/>
-                          </a:solidFill>
-                          <a:latin typeface="Arial"/>
-                          <a:ea typeface="Microsoft JhengHei"/>
-                        </a:rPr>
-                        <a:t>Possibly no change; not yet tested</a:t>
-                      </a:r>
-                    </a:p>
-                  </a:txBody>
-                  <a:tcPr marL="91440" marR="91440" marT="45720" marB="45720" anchor="ctr">
-                    <a:lnL w="0">
-                      <a:noFill/>
-                    </a:lnL>
-                    <a:lnR w="0">
-                      <a:noFill/>
-                    </a:lnR>
-                    <a:lnT w="0">
-                      <a:noFill/>
-                    </a:lnT>
-                    <a:lnB w="9525" cmpd="sng">
-                      <a:solidFill>
-                        <a:srgbClr val="BFBFBF"/>
-                      </a:solidFill>
-                    </a:lnB>
-                    <a:noFill/>
-                  </a:tcPr>
-                </a:tc>
-              </a:tr>
-              <a:tr h="566928">
-                <a:tc>
-                  <a:txBody>
-                    <a:bodyPr wrap="square"/>
-                    <a:lstStyle/>
-                    <a:p>
-                      <a:pPr algn="l"/>
-                      <a:r>
-                        <a:rPr sz="1400" b="1" i="0">
-                          <a:solidFill>
-                            <a:srgbClr val="333D47"/>
-                          </a:solidFill>
-                          <a:latin typeface="Arial"/>
-                          <a:ea typeface="Microsoft JhengHei"/>
-                        </a:rPr>
-                        <a:t>Time and running cost</a:t>
-                      </a:r>
-                    </a:p>
-                  </a:txBody>
-                  <a:tcPr marL="91440" marR="91440" marT="45720" marB="45720" anchor="ctr">
-                    <a:lnL w="0">
-                      <a:noFill/>
-                    </a:lnL>
-                    <a:lnR w="0">
-                      <a:noFill/>
-                    </a:lnR>
-                    <a:lnT w="0">
-                      <a:noFill/>
-                    </a:lnT>
-                    <a:lnB w="9525" cmpd="sng">
-                      <a:solidFill>
-                        <a:srgbClr val="BFBFBF"/>
-                      </a:solidFill>
-                    </a:lnB>
-                    <a:noFill/>
-                  </a:tcPr>
-                </a:tc>
-                <a:tc>
-                  <a:txBody>
-                    <a:bodyPr wrap="square"/>
-                    <a:lstStyle/>
-                    <a:p>
-                      <a:pPr algn="l"/>
-                      <a:r>
-                        <a:rPr sz="1400" b="0" i="0">
-                          <a:solidFill>
-                            <a:srgbClr val="333D47"/>
-                          </a:solidFill>
-                          <a:latin typeface="Arial"/>
-                          <a:ea typeface="Microsoft JhengHei"/>
-                        </a:rPr>
-                        <a:t>13.9 s, own compute, no API fee</a:t>
-                      </a:r>
-                    </a:p>
-                  </a:txBody>
-                  <a:tcPr marL="91440" marR="91440" marT="45720" marB="45720" anchor="ctr">
-                    <a:lnL w="0">
-                      <a:noFill/>
-                    </a:lnL>
-                    <a:lnR w="0">
-                      <a:noFill/>
-                    </a:lnR>
-                    <a:lnT w="0">
-                      <a:noFill/>
-                    </a:lnT>
-                    <a:lnB w="9525" cmpd="sng">
-                      <a:solidFill>
-                        <a:srgbClr val="BFBFBF"/>
-                      </a:solidFill>
-                    </a:lnB>
-                    <a:noFill/>
-                  </a:tcPr>
-                </a:tc>
-                <a:tc>
-                  <a:txBody>
-                    <a:bodyPr wrap="square"/>
-                    <a:lstStyle/>
-                    <a:p>
-                      <a:pPr algn="l"/>
-                      <a:r>
-                        <a:rPr sz="1400" b="0" i="0">
-                          <a:solidFill>
-                            <a:srgbClr val="333D47"/>
-                          </a:solidFill>
-                          <a:latin typeface="Arial"/>
-                          <a:ea typeface="Microsoft JhengHei"/>
-                        </a:rPr>
-                        <a:t>6.2 s, Azure fees per receipt (to confirm)</a:t>
-                      </a:r>
-                    </a:p>
-                  </a:txBody>
-                  <a:tcPr marL="91440" marR="91440" marT="45720" marB="45720" anchor="ctr">
-                    <a:lnL w="0">
-                      <a:noFill/>
-                    </a:lnL>
-                    <a:lnR w="0">
-                      <a:noFill/>
-                    </a:lnR>
-                    <a:lnT w="0">
-                      <a:noFill/>
-                    </a:lnT>
-                    <a:lnB w="9525" cmpd="sng">
-                      <a:solidFill>
-                        <a:srgbClr val="BFBFBF"/>
-                      </a:solidFill>
-                    </a:lnB>
-                    <a:noFill/>
-                  </a:tcPr>
-                </a:tc>
-              </a:tr>
-            </a:tbl>
-          </a:graphicData>
-        </a:graphic>
-      </p:graphicFrame>
-      <p:sp>
-        <p:nvSpPr>
-          <p:cNvPr id="13" name="TextBox 12"/>
-          <p:cNvSpPr txBox="1"/>
-          <p:nvPr/>
-        </p:nvSpPr>
-        <p:spPr>
-          <a:xfrm>
-            <a:off x="356616" y="5349240"/>
-            <a:ext cx="10972800" cy="320040"/>
-          </a:xfrm>
-          <a:prstGeom prst="rect">
-            <a:avLst/>
-          </a:prstGeom>
-          <a:noFill/>
-        </p:spPr>
-        <p:txBody>
-          <a:bodyPr wrap="square" lIns="0" rIns="0" tIns="0" bIns="0" anchor="t"/>
-          <a:lstStyle/>
-          <a:p>
-            <a:pPr marL="0" indent="0" algn="l">
-              <a:spcAft>
-                <a:spcPts val="0"/>
-              </a:spcAft>
-              <a:buNone/>
-            </a:pPr>
-            <a:r>
-              <a:rPr sz="1100" b="0" i="1">
-                <a:solidFill>
-                  <a:srgbClr val="5F6770"/>
-                </a:solidFill>
-                <a:latin typeface="Arial"/>
-                <a:ea typeface="Microsoft JhengHei"/>
-              </a:rPr>
-              <a:t>The main question is not API price but who maintains the extraction logic as layouts change. Lower maintenance for AOAI is implied by this benchmark, not yet proven.</a:t>
-            </a:r>
-          </a:p>
-        </p:txBody>
-      </p:sp>
-    </p:spTree>
-  </p:cSld>
-  <p:clrMapOvr>
-    <a:masterClrMapping/>
-  </p:clrMapOvr>
-</p:sld>
-</file>
-
-<file path=ppt/slides/slide9.xml><?xml version="1.0" encoding="utf-8"?>
-<p:sld xmlns:a="http://schemas.openxmlformats.org/drawingml/2006/main" xmlns:p="http://schemas.openxmlformats.org/presentationml/2006/main" xmlns:r="http://schemas.openxmlformats.org/officeDocument/2006/relationships">
-  <p:cSld>
-    <p:spTree>
-      <p:nvGrpSpPr>
-        <p:cNvPr id="1" name=""/>
-        <p:cNvGrpSpPr/>
-        <p:nvPr/>
-      </p:nvGrpSpPr>
-      <p:grpSpPr/>
-      <p:sp>
-        <p:nvSpPr>
-          <p:cNvPr id="4" name="Text Placeholder 3"/>
-          <p:cNvSpPr>
-            <a:spLocks noGrp="1"/>
-          </p:cNvSpPr>
-          <p:nvPr>
-            <p:ph type="body" idx="10" sz="quarter"/>
-          </p:nvPr>
-        </p:nvSpPr>
-        <p:spPr>
-          <a:xfrm>
-            <a:off x="356616" y="502920"/>
-            <a:ext cx="11155680" cy="566928"/>
-          </a:xfrm>
-        </p:spPr>
-        <p:txBody>
-          <a:bodyPr lIns="0"/>
-          <a:lstStyle/>
-          <a:p>
-            <a:r>
-              <a:rPr sz="2800" b="1">
-                <a:solidFill>
-                  <a:srgbClr val="333D47"/>
-                </a:solidFill>
-                <a:latin typeface="Arial"/>
-                <a:ea typeface="Microsoft JhengHei"/>
-              </a:rPr>
-              <a:t>Manual Rules vs. AI Extraction: Pros and Cons</a:t>
-            </a:r>
-          </a:p>
-        </p:txBody>
-      </p:sp>
-      <p:sp>
-        <p:nvSpPr>
-          <p:cNvPr id="10" name="Slide Number Placeholder 5">
-            <a:extLst>
-              <a:ext uri="{FF2B5EF4-FFF2-40B4-BE49-F238E27FC236}">
-                <a16:creationId xmlns:a16="http://schemas.microsoft.com/office/drawing/2014/main" id="{3E493E1F-F28C-FD47-B996-3EBF17D328AE}"/>
-              </a:ext>
-            </a:extLst>
-          </p:cNvPr>
-          <p:cNvSpPr>
-            <a:spLocks noGrp="1"/>
-          </p:cNvSpPr>
-          <p:nvPr>
-            <p:ph type="sldNum" sz="quarter" idx="4"/>
-          </p:nvPr>
-        </p:nvSpPr>
-        <p:spPr>
-          <a:xfrm>
-            <a:off x="359999" y="6264872"/>
-            <a:ext cx="360000" cy="360000"/>
-          </a:xfrm>
-          <a:prstGeom prst="rect">
-            <a:avLst/>
-          </a:prstGeom>
-        </p:spPr>
-        <p:txBody>
-          <a:bodyPr vert="horz" lIns="91440" tIns="45720" rIns="91440" bIns="45720" rtlCol="0" anchor="ctr"/>
-          <a:lstStyle>
-            <a:lvl1pPr algn="l">
-              <a:defRPr sz="800" b="0" i="0">
-                <a:solidFill>
-                  <a:schemeClr val="tx1"/>
-                </a:solidFill>
-                <a:latin typeface="Arial" panose="020B0604020202020204" pitchFamily="34" charset="0"/>
-                <a:cs typeface="Arial" panose="020B0604020202020204" pitchFamily="34" charset="0"/>
-              </a:defRPr>
-            </a:lvl1pPr>
-          </a:lstStyle>
-          <a:p>
-            <a:fld id="{18A41853-EF22-D446-BDBC-A7CF3FE93503}" type="slidenum">
-              <a:rPr lang="en-US" smtClean="0"/>
-              <a:pPr/>
-              <a:t>‹#›</a:t>
-            </a:fld>
-            <a:endParaRPr lang="en-US" dirty="0"/>
-          </a:p>
-        </p:txBody>
-      </p:sp>
-      <p:sp>
-        <p:nvSpPr>
-          <p:cNvPr id="11" name="TextBox 10"/>
-          <p:cNvSpPr txBox="1"/>
-          <p:nvPr/>
-        </p:nvSpPr>
-        <p:spPr>
-          <a:xfrm>
-            <a:off x="356616" y="1115568"/>
-            <a:ext cx="11475720" cy="457200"/>
-          </a:xfrm>
-          <a:prstGeom prst="rect">
-            <a:avLst/>
-          </a:prstGeom>
-          <a:noFill/>
-        </p:spPr>
-        <p:txBody>
-          <a:bodyPr wrap="square" lIns="0" rIns="0" tIns="0" bIns="0" anchor="t"/>
-          <a:lstStyle/>
-          <a:p>
-            <a:pPr marL="0" indent="0" algn="l">
-              <a:spcAft>
-                <a:spcPts val="0"/>
-              </a:spcAft>
-              <a:buNone/>
-            </a:pPr>
-            <a:r>
-              <a:rPr sz="1700" b="0" i="0">
-                <a:solidFill>
-                  <a:srgbClr val="D31145"/>
-                </a:solidFill>
-                <a:latin typeface="Arial"/>
-                <a:ea typeface="Microsoft JhengHei"/>
-              </a:rPr>
-              <a:t>"Measured" = this benchmark; the rest is expected.</a:t>
-            </a:r>
-          </a:p>
-        </p:txBody>
-      </p:sp>
-      <p:sp>
-        <p:nvSpPr>
-          <p:cNvPr id="12" name="Rectangle 11"/>
-          <p:cNvSpPr/>
-          <p:nvPr/>
-        </p:nvSpPr>
-        <p:spPr>
-          <a:xfrm>
-            <a:off x="356616" y="1783080"/>
-            <a:ext cx="5600700" cy="411480"/>
-          </a:xfrm>
-          <a:prstGeom prst="rect">
-            <a:avLst/>
-          </a:prstGeom>
-          <a:solidFill>
-            <a:srgbClr val="333D47"/>
-          </a:solidFill>
-          <a:ln>
-            <a:noFill/>
-          </a:ln>
-        </p:spPr>
-        <p:txBody>
-          <a:bodyPr rtlCol="0" anchor="ctr" wrap="square" lIns="164592" rIns="164592" tIns="109728" bIns="109728"/>
-          <a:lstStyle/>
-          <a:p>
-            <a:pPr algn="l" marL="0" indent="0">
-              <a:spcAft>
-                <a:spcPts val="0"/>
-              </a:spcAft>
-              <a:buNone/>
-            </a:pPr>
-            <a:r>
-              <a:rPr sz="1600" b="1" i="0">
-                <a:solidFill>
-                  <a:srgbClr val="FFFFFF"/>
-                </a:solidFill>
-                <a:latin typeface="Arial"/>
-                <a:ea typeface="Microsoft JhengHei"/>
-              </a:rPr>
-              <a:t>Manual extraction rules (PaddleOCR Light)</a:t>
-            </a:r>
-          </a:p>
-        </p:txBody>
-      </p:sp>
-      <p:sp>
-        <p:nvSpPr>
-          <p:cNvPr id="13" name="TextBox 12"/>
-          <p:cNvSpPr txBox="1"/>
-          <p:nvPr/>
-        </p:nvSpPr>
-        <p:spPr>
-          <a:xfrm>
-            <a:off x="356616" y="2267712"/>
-            <a:ext cx="5600700" cy="566928"/>
-          </a:xfrm>
-          <a:prstGeom prst="rect">
-            <a:avLst/>
-          </a:prstGeom>
-          <a:noFill/>
-        </p:spPr>
-        <p:txBody>
-          <a:bodyPr wrap="square" lIns="0" rIns="0" tIns="0" bIns="0" anchor="ctr"/>
-          <a:lstStyle/>
-          <a:p>
-            <a:pPr marL="0" indent="0" algn="l">
-              <a:spcAft>
-                <a:spcPts val="0"/>
-              </a:spcAft>
-              <a:buNone/>
-            </a:pPr>
-            <a:r>
-              <a:rPr sz="1300" b="1" i="0">
-                <a:solidFill>
-                  <a:srgbClr val="333D47"/>
-                </a:solidFill>
-                <a:latin typeface="Arial"/>
-                <a:ea typeface="Microsoft JhengHei"/>
-              </a:rPr>
-              <a:t>New formats need manual rule updates, which can break working cases and add maintenance and testing.</a:t>
-            </a:r>
-          </a:p>
-        </p:txBody>
-      </p:sp>
-      <p:sp>
-        <p:nvSpPr>
-          <p:cNvPr id="14" name="Rectangle 13"/>
-          <p:cNvSpPr/>
-          <p:nvPr/>
-        </p:nvSpPr>
-        <p:spPr>
-          <a:xfrm>
-            <a:off x="356616" y="2907792"/>
-            <a:ext cx="5600700" cy="1225296"/>
-          </a:xfrm>
-          <a:prstGeom prst="rect">
-            <a:avLst/>
-          </a:prstGeom>
-          <a:solidFill>
-            <a:srgbClr val="E6F2EA"/>
-          </a:solidFill>
-          <a:ln>
-            <a:noFill/>
-          </a:ln>
-        </p:spPr>
-        <p:txBody>
-          <a:bodyPr rtlCol="0" anchor="t" wrap="square" lIns="164592" rIns="164592" tIns="109728" bIns="109728"/>
-          <a:lstStyle/>
-          <a:p>
-            <a:pPr algn="l" marL="0" indent="0">
-              <a:spcAft>
-                <a:spcPts val="400"/>
-              </a:spcAft>
-              <a:buNone/>
-            </a:pPr>
-            <a:r>
-              <a:rPr sz="1500" b="1" i="0">
-                <a:solidFill>
-                  <a:srgbClr val="1E7B4A"/>
-                </a:solidFill>
-                <a:latin typeface="Arial"/>
-                <a:ea typeface="Microsoft JhengHei"/>
-              </a:rPr>
-              <a:t>Pros</a:t>
-            </a:r>
-          </a:p>
-          <a:p>
-            <a:pPr marL="182880" indent="-182880" algn="l">
-              <a:spcAft>
-                <a:spcPts val="300"/>
-              </a:spcAft>
-              <a:buFont typeface="Arial"/>
-              <a:buChar char="•"/>
-            </a:pPr>
-            <a:r>
-              <a:rPr sz="1300" b="0" i="0">
-                <a:solidFill>
-                  <a:srgbClr val="333D47"/>
-                </a:solidFill>
-                <a:latin typeface="Arial"/>
-                <a:ea typeface="Microsoft JhengHei"/>
-              </a:rPr>
-              <a:t>Full control; transparent and predictable on formats the rules know.</a:t>
-            </a:r>
-          </a:p>
-          <a:p>
-            <a:pPr marL="182880" indent="-182880" algn="l">
-              <a:spcAft>
-                <a:spcPts val="300"/>
-              </a:spcAft>
-              <a:buFont typeface="Arial"/>
-              <a:buChar char="•"/>
-            </a:pPr>
-            <a:r>
-              <a:rPr sz="1300" b="0" i="0">
-                <a:solidFill>
-                  <a:srgbClr val="333D47"/>
-                </a:solidFill>
-                <a:latin typeface="Arial"/>
-                <a:ea typeface="Microsoft JhengHei"/>
-              </a:rPr>
-              <a:t>No API fees: open-source OCR on our own compute.</a:t>
-            </a:r>
-          </a:p>
-          <a:p>
-            <a:pPr marL="182880" indent="-182880" algn="l">
-              <a:spcAft>
-                <a:spcPts val="0"/>
-              </a:spcAft>
-              <a:buFont typeface="Arial"/>
-              <a:buChar char="•"/>
-            </a:pPr>
-            <a:r>
-              <a:rPr sz="1300" b="1" i="0">
-                <a:solidFill>
-                  <a:srgbClr val="333D47"/>
-                </a:solidFill>
-                <a:latin typeface="Arial"/>
-                <a:ea typeface="Microsoft JhengHei"/>
-              </a:rPr>
-              <a:t>Measured: </a:t>
-            </a:r>
-            <a:r>
-              <a:rPr sz="1300" b="0" i="0">
-                <a:solidFill>
-                  <a:srgbClr val="333D47"/>
-                </a:solidFill>
-                <a:latin typeface="Arial"/>
-                <a:ea typeface="Microsoft JhengHei"/>
-              </a:rPr>
-              <a:t>the OCR read the values; the misses were missing labels.</a:t>
-            </a:r>
-          </a:p>
-        </p:txBody>
-      </p:sp>
-      <p:sp>
-        <p:nvSpPr>
-          <p:cNvPr id="15" name="Rectangle 14"/>
-          <p:cNvSpPr/>
-          <p:nvPr/>
-        </p:nvSpPr>
-        <p:spPr>
-          <a:xfrm>
-            <a:off x="356616" y="4206240"/>
-            <a:ext cx="5600700" cy="1225296"/>
-          </a:xfrm>
-          <a:prstGeom prst="rect">
-            <a:avLst/>
-          </a:prstGeom>
-          <a:solidFill>
-            <a:srgbClr val="FBE7EC"/>
-          </a:solidFill>
-          <a:ln>
-            <a:noFill/>
-          </a:ln>
-        </p:spPr>
-        <p:txBody>
-          <a:bodyPr rtlCol="0" anchor="t" wrap="square" lIns="164592" rIns="164592" tIns="109728" bIns="109728"/>
-          <a:lstStyle/>
-          <a:p>
-            <a:pPr algn="l" marL="0" indent="0">
-              <a:spcAft>
-                <a:spcPts val="400"/>
-              </a:spcAft>
-              <a:buNone/>
-            </a:pPr>
-            <a:r>
-              <a:rPr sz="1500" b="1" i="0">
-                <a:solidFill>
-                  <a:srgbClr val="D31145"/>
-                </a:solidFill>
-                <a:latin typeface="Arial"/>
-                <a:ea typeface="Microsoft JhengHei"/>
-              </a:rPr>
-              <a:t>Cons</a:t>
-            </a:r>
-          </a:p>
-          <a:p>
-            <a:pPr marL="182880" indent="-182880" algn="l">
-              <a:spcAft>
-                <a:spcPts val="300"/>
-              </a:spcAft>
-              <a:buFont typeface="Arial"/>
-              <a:buChar char="•"/>
-            </a:pPr>
-            <a:r>
-              <a:rPr sz="1300" b="0" i="0">
-                <a:solidFill>
-                  <a:srgbClr val="333D47"/>
-                </a:solidFill>
-                <a:latin typeface="Arial"/>
-                <a:ea typeface="Microsoft JhengHei"/>
-              </a:rPr>
-              <a:t>Each new format or language needs rule updates by hand.</a:t>
-            </a:r>
-          </a:p>
-          <a:p>
-            <a:pPr marL="182880" indent="-182880" algn="l">
-              <a:spcAft>
-                <a:spcPts val="300"/>
-              </a:spcAft>
-              <a:buFont typeface="Arial"/>
-              <a:buChar char="•"/>
-            </a:pPr>
-            <a:r>
-              <a:rPr sz="1300" b="1" i="0">
-                <a:solidFill>
-                  <a:srgbClr val="333D47"/>
-                </a:solidFill>
-                <a:latin typeface="Arial"/>
-                <a:ea typeface="Microsoft JhengHei"/>
-              </a:rPr>
-              <a:t>Measured: </a:t>
-            </a:r>
-            <a:r>
-              <a:rPr sz="1300" b="0" i="0">
-                <a:solidFill>
-                  <a:srgbClr val="333D47"/>
-                </a:solidFill>
-                <a:latin typeface="Arial"/>
-                <a:ea typeface="Microsoft JhengHei"/>
-              </a:rPr>
-              <a:t>a rule change broke a receipt that was already correct.</a:t>
-            </a:r>
-          </a:p>
-          <a:p>
-            <a:pPr marL="182880" indent="-182880" algn="l">
-              <a:spcAft>
-                <a:spcPts val="0"/>
-              </a:spcAft>
-              <a:buFont typeface="Arial"/>
-              <a:buChar char="•"/>
-            </a:pPr>
-            <a:r>
-              <a:rPr sz="1300" b="1" i="0">
-                <a:solidFill>
-                  <a:srgbClr val="333D47"/>
-                </a:solidFill>
-                <a:latin typeface="Arial"/>
-                <a:ea typeface="Microsoft JhengHei"/>
-              </a:rPr>
-              <a:t>Measured: </a:t>
-            </a:r>
-            <a:r>
-              <a:rPr sz="1300" b="0" i="0">
-                <a:solidFill>
-                  <a:srgbClr val="333D47"/>
-                </a:solidFill>
-                <a:latin typeface="Arial"/>
-                <a:ea typeface="Microsoft JhengHei"/>
-              </a:rPr>
-              <a:t>69 → 225 label phrases added by hand.</a:t>
-            </a:r>
-          </a:p>
-        </p:txBody>
-      </p:sp>
-      <p:sp>
-        <p:nvSpPr>
-          <p:cNvPr id="16" name="Rectangle 15"/>
-          <p:cNvSpPr/>
-          <p:nvPr/>
-        </p:nvSpPr>
-        <p:spPr>
-          <a:xfrm>
-            <a:off x="6231636" y="1783080"/>
-            <a:ext cx="5600700" cy="411480"/>
-          </a:xfrm>
-          <a:prstGeom prst="rect">
-            <a:avLst/>
-          </a:prstGeom>
-          <a:solidFill>
-            <a:srgbClr val="333D47"/>
-          </a:solidFill>
-          <a:ln>
-            <a:noFill/>
-          </a:ln>
-        </p:spPr>
-        <p:txBody>
-          <a:bodyPr rtlCol="0" anchor="ctr" wrap="square" lIns="164592" rIns="164592" tIns="109728" bIns="109728"/>
-          <a:lstStyle/>
-          <a:p>
-            <a:pPr algn="l" marL="0" indent="0">
-              <a:spcAft>
-                <a:spcPts val="0"/>
-              </a:spcAft>
-              <a:buNone/>
-            </a:pPr>
-            <a:r>
-              <a:rPr sz="1600" b="1" i="0">
-                <a:solidFill>
-                  <a:srgbClr val="FFFFFF"/>
-                </a:solidFill>
-                <a:latin typeface="Arial"/>
-                <a:ea typeface="Microsoft JhengHei"/>
-              </a:rPr>
-              <a:t>AI extraction (Azure DI + AOAI)</a:t>
-            </a:r>
-          </a:p>
-        </p:txBody>
-      </p:sp>
-      <p:sp>
-        <p:nvSpPr>
-          <p:cNvPr id="17" name="TextBox 16"/>
-          <p:cNvSpPr txBox="1"/>
-          <p:nvPr/>
-        </p:nvSpPr>
-        <p:spPr>
-          <a:xfrm>
-            <a:off x="6231636" y="2267712"/>
-            <a:ext cx="5600700" cy="566928"/>
-          </a:xfrm>
-          <a:prstGeom prst="rect">
-            <a:avLst/>
-          </a:prstGeom>
-          <a:noFill/>
-        </p:spPr>
-        <p:txBody>
-          <a:bodyPr wrap="square" lIns="0" rIns="0" tIns="0" bIns="0" anchor="ctr"/>
-          <a:lstStyle/>
-          <a:p>
-            <a:pPr marL="0" indent="0" algn="l">
-              <a:spcAft>
-                <a:spcPts val="0"/>
-              </a:spcAft>
-              <a:buNone/>
-            </a:pPr>
-            <a:r>
-              <a:rPr sz="1300" b="1" i="0">
-                <a:solidFill>
-                  <a:srgbClr val="333D47"/>
-                </a:solidFill>
-                <a:latin typeface="Arial"/>
-                <a:ea typeface="Microsoft JhengHei"/>
-              </a:rPr>
-              <a:t>Less rule maintenance expected: accuracy depends mainly on the AI model, OCR output and prompt.</a:t>
-            </a:r>
-          </a:p>
-        </p:txBody>
-      </p:sp>
-      <p:sp>
-        <p:nvSpPr>
-          <p:cNvPr id="18" name="Rectangle 17"/>
-          <p:cNvSpPr/>
-          <p:nvPr/>
-        </p:nvSpPr>
-        <p:spPr>
-          <a:xfrm>
-            <a:off x="6231636" y="2907792"/>
-            <a:ext cx="5600700" cy="1225296"/>
-          </a:xfrm>
-          <a:prstGeom prst="rect">
-            <a:avLst/>
-          </a:prstGeom>
-          <a:solidFill>
-            <a:srgbClr val="E6F2EA"/>
-          </a:solidFill>
-          <a:ln>
-            <a:noFill/>
-          </a:ln>
-        </p:spPr>
-        <p:txBody>
-          <a:bodyPr rtlCol="0" anchor="t" wrap="square" lIns="164592" rIns="164592" tIns="109728" bIns="109728"/>
-          <a:lstStyle/>
-          <a:p>
-            <a:pPr algn="l" marL="0" indent="0">
-              <a:spcAft>
-                <a:spcPts val="400"/>
-              </a:spcAft>
-              <a:buNone/>
-            </a:pPr>
-            <a:r>
-              <a:rPr sz="1500" b="1" i="0">
-                <a:solidFill>
-                  <a:srgbClr val="1E7B4A"/>
-                </a:solidFill>
-                <a:latin typeface="Arial"/>
-                <a:ea typeface="Microsoft JhengHei"/>
-              </a:rPr>
-              <a:t>Pros</a:t>
-            </a:r>
-          </a:p>
-          <a:p>
-            <a:pPr marL="182880" indent="-182880" algn="l">
-              <a:spcAft>
-                <a:spcPts val="300"/>
-              </a:spcAft>
-              <a:buFont typeface="Arial"/>
-              <a:buChar char="•"/>
-            </a:pPr>
-            <a:r>
-              <a:rPr sz="1300" b="1" i="0">
-                <a:solidFill>
-                  <a:srgbClr val="333D47"/>
-                </a:solidFill>
-                <a:latin typeface="Arial"/>
-                <a:ea typeface="Microsoft JhengHei"/>
-              </a:rPr>
-              <a:t>Measured: </a:t>
-            </a:r>
-            <a:r>
-              <a:rPr sz="1300" b="0" i="0">
-                <a:solidFill>
-                  <a:srgbClr val="333D47"/>
-                </a:solidFill>
-                <a:latin typeface="Arial"/>
-                <a:ea typeface="Microsoft JhengHei"/>
-              </a:rPr>
-              <a:t>highest accuracy before any tuning on these receipts.</a:t>
-            </a:r>
-          </a:p>
-          <a:p>
-            <a:pPr marL="182880" indent="-182880" algn="l">
-              <a:spcAft>
-                <a:spcPts val="300"/>
-              </a:spcAft>
-              <a:buFont typeface="Arial"/>
-              <a:buChar char="•"/>
-            </a:pPr>
-            <a:r>
-              <a:rPr sz="1300" b="0" i="0">
-                <a:solidFill>
-                  <a:srgbClr val="333D47"/>
-                </a:solidFill>
-                <a:latin typeface="Arial"/>
-                <a:ea typeface="Microsoft JhengHei"/>
-              </a:rPr>
-              <a:t>Reads varied formats using existing model capabilities.</a:t>
-            </a:r>
-          </a:p>
-          <a:p>
-            <a:pPr marL="182880" indent="-182880" algn="l">
-              <a:spcAft>
-                <a:spcPts val="0"/>
-              </a:spcAft>
-              <a:buFont typeface="Arial"/>
-              <a:buChar char="•"/>
-            </a:pPr>
-            <a:r>
-              <a:rPr sz="1300" b="1" i="0">
-                <a:solidFill>
-                  <a:srgbClr val="333D47"/>
-                </a:solidFill>
-                <a:latin typeface="Arial"/>
-                <a:ea typeface="Microsoft JhengHei"/>
-              </a:rPr>
-              <a:t>Measured: </a:t>
-            </a:r>
-            <a:r>
-              <a:rPr sz="1300" b="0" i="0">
-                <a:solidFill>
-                  <a:srgbClr val="333D47"/>
-                </a:solidFill>
-                <a:latin typeface="Arial"/>
-                <a:ea typeface="Microsoft JhengHei"/>
-              </a:rPr>
-              <a:t>faster, 6.2 s vs 13.9 s per receipt.</a:t>
-            </a:r>
-          </a:p>
-        </p:txBody>
-      </p:sp>
-      <p:sp>
-        <p:nvSpPr>
-          <p:cNvPr id="19" name="Rectangle 18"/>
-          <p:cNvSpPr/>
-          <p:nvPr/>
-        </p:nvSpPr>
-        <p:spPr>
-          <a:xfrm>
-            <a:off x="6231636" y="4206240"/>
-            <a:ext cx="5600700" cy="1225296"/>
-          </a:xfrm>
-          <a:prstGeom prst="rect">
-            <a:avLst/>
-          </a:prstGeom>
-          <a:solidFill>
-            <a:srgbClr val="FBE7EC"/>
-          </a:solidFill>
-          <a:ln>
-            <a:noFill/>
-          </a:ln>
-        </p:spPr>
-        <p:txBody>
-          <a:bodyPr rtlCol="0" anchor="t" wrap="square" lIns="164592" rIns="164592" tIns="109728" bIns="109728"/>
-          <a:lstStyle/>
-          <a:p>
-            <a:pPr algn="l" marL="0" indent="0">
-              <a:spcAft>
-                <a:spcPts val="400"/>
-              </a:spcAft>
-              <a:buNone/>
-            </a:pPr>
-            <a:r>
-              <a:rPr sz="1500" b="1" i="0">
-                <a:solidFill>
-                  <a:srgbClr val="D31145"/>
-                </a:solidFill>
-                <a:latin typeface="Arial"/>
-                <a:ea typeface="Microsoft JhengHei"/>
-              </a:rPr>
-              <a:t>Cons</a:t>
-            </a:r>
-          </a:p>
-          <a:p>
-            <a:pPr marL="182880" indent="-182880" algn="l">
-              <a:spcAft>
-                <a:spcPts val="300"/>
-              </a:spcAft>
-              <a:buFont typeface="Arial"/>
-              <a:buChar char="•"/>
-            </a:pPr>
-            <a:r>
-              <a:rPr sz="1300" b="1" i="0">
-                <a:solidFill>
-                  <a:srgbClr val="333D47"/>
-                </a:solidFill>
-                <a:latin typeface="Arial"/>
-                <a:ea typeface="Microsoft JhengHei"/>
-              </a:rPr>
-              <a:t>Measured: </a:t>
-            </a:r>
-            <a:r>
-              <a:rPr sz="1300" b="0" i="0">
-                <a:solidFill>
-                  <a:srgbClr val="333D47"/>
-                </a:solidFill>
-                <a:latin typeface="Arial"/>
-                <a:ea typeface="Microsoft JhengHei"/>
-              </a:rPr>
-              <a:t>still makes mistakes, e.g. a sub total taken as the total.</a:t>
-            </a:r>
-          </a:p>
-          <a:p>
-            <a:pPr marL="182880" indent="-182880" algn="l">
-              <a:spcAft>
-                <a:spcPts val="300"/>
-              </a:spcAft>
-              <a:buFont typeface="Arial"/>
-              <a:buChar char="•"/>
-            </a:pPr>
-            <a:r>
-              <a:rPr sz="1300" b="0" i="0">
-                <a:solidFill>
-                  <a:srgbClr val="333D47"/>
-                </a:solidFill>
-                <a:latin typeface="Arial"/>
-                <a:ea typeface="Microsoft JhengHei"/>
-              </a:rPr>
-              <a:t>Less direct control: results depend on model, OCR, prompt.</a:t>
-            </a:r>
-          </a:p>
-          <a:p>
-            <a:pPr marL="182880" indent="-182880" algn="l">
-              <a:spcAft>
-                <a:spcPts val="0"/>
-              </a:spcAft>
-              <a:buFont typeface="Arial"/>
-              <a:buChar char="•"/>
-            </a:pPr>
-            <a:r>
-              <a:rPr sz="1300" b="0" i="0">
-                <a:solidFill>
-                  <a:srgbClr val="333D47"/>
-                </a:solidFill>
-                <a:latin typeface="Arial"/>
-                <a:ea typeface="Microsoft JhengHei"/>
-              </a:rPr>
-              <a:t>API fees; needs validation, monitoring and prompt upkeep.</a:t>
-            </a:r>
-          </a:p>
-        </p:txBody>
-      </p:sp>
-      <p:sp>
-        <p:nvSpPr>
-          <p:cNvPr id="20" name="Rectangle 19"/>
-          <p:cNvSpPr/>
-          <p:nvPr/>
-        </p:nvSpPr>
-        <p:spPr>
-          <a:xfrm>
-            <a:off x="356616" y="5486400"/>
-            <a:ext cx="10607040" cy="411480"/>
-          </a:xfrm>
-          <a:prstGeom prst="rect">
-            <a:avLst/>
-          </a:prstGeom>
-          <a:solidFill>
-            <a:srgbClr val="F2F2F2"/>
-          </a:solidFill>
-          <a:ln>
-            <a:noFill/>
-          </a:ln>
-        </p:spPr>
-        <p:txBody>
-          <a:bodyPr rtlCol="0" anchor="ctr" wrap="square" lIns="164592" rIns="164592" tIns="109728" bIns="109728"/>
-          <a:lstStyle/>
-          <a:p>
-            <a:pPr algn="l" marL="0" indent="0">
-              <a:spcAft>
-                <a:spcPts val="0"/>
-              </a:spcAft>
-              <a:buNone/>
-            </a:pPr>
-            <a:r>
-              <a:rPr sz="1400" b="1" i="0">
-                <a:solidFill>
-                  <a:srgbClr val="333D47"/>
-                </a:solidFill>
-                <a:latin typeface="Arial"/>
-                <a:ea typeface="Microsoft JhengHei"/>
-              </a:rPr>
-              <a:t>Neither is maintenance free. </a:t>
-            </a:r>
-            <a:r>
-              <a:rPr sz="1400" b="0" i="0">
-                <a:solidFill>
-                  <a:srgbClr val="333D47"/>
-                </a:solidFill>
-                <a:latin typeface="Arial"/>
-                <a:ea typeface="Microsoft JhengHei"/>
-              </a:rPr>
-              <a:t>The difference is where the effort sits: rules for every layout, or one prompt plus validation.</a:t>
+              <a:t>AOAI (original prompt): picked the sub total instead of the total.</a:t>
             </a:r>
           </a:p>
         </p:txBody>
